--- a/decks/day1/module-6-hosting-styles.pptx
+++ b/decks/day1/module-6-hosting-styles.pptx
@@ -2443,7 +2443,7 @@
             <a:off x="365760" y="4343400"/>
             <a:ext cx="8412480" cy="457200"/>
           </a:xfrm>
-          <a:prstGeom prst="1">
+          <a:prstGeom prst="rect">
             <a:avLst/>
           </a:prstGeom>
           <a:solidFill>
@@ -3105,7 +3105,7 @@
             <a:off x="365760" y="1097280"/>
             <a:ext cx="8412480" cy="3291840"/>
           </a:xfrm>
-          <a:prstGeom prst="1">
+          <a:prstGeom prst="rect">
             <a:avLst/>
           </a:prstGeom>
           <a:solidFill>
@@ -3503,7 +3503,7 @@
             <a:off x="365760" y="1097280"/>
             <a:ext cx="8412480" cy="3291840"/>
           </a:xfrm>
-          <a:prstGeom prst="1">
+          <a:prstGeom prst="rect">
             <a:avLst/>
           </a:prstGeom>
           <a:solidFill>
@@ -3940,7 +3940,7 @@
             <a:off x="365760" y="1874520"/>
             <a:ext cx="8412480" cy="2468880"/>
           </a:xfrm>
-          <a:prstGeom prst="1">
+          <a:prstGeom prst="rect">
             <a:avLst/>
           </a:prstGeom>
           <a:solidFill>
@@ -4360,7 +4360,7 @@
             <a:off x="365760" y="1874520"/>
             <a:ext cx="8412480" cy="2468880"/>
           </a:xfrm>
-          <a:prstGeom prst="1">
+          <a:prstGeom prst="rect">
             <a:avLst/>
           </a:prstGeom>
           <a:solidFill>

--- a/decks/day1/module-6-hosting-styles.pptx
+++ b/decks/day1/module-6-hosting-styles.pptx
@@ -16,9 +16,10 @@
     <p:sldId id="264" r:id="rId10"/>
     <p:sldId id="265" r:id="rId11"/>
     <p:sldId id="266" r:id="rId12"/>
+    <p:sldId id="267" r:id="rId13"/>
   </p:sldIdLst>
   <p:notesMasterIdLst>
-    <p:notesMasterId r:id="rId13"/>
+    <p:notesMasterId r:id="rId14"/>
   </p:notesMasterIdLst>
   <p:sldSz cx="9144000" cy="5143500"/>
   <p:notesSz cx="5143500" cy="9144000"/>
@@ -600,7 +601,7 @@
           <a:p>
             <a:r>
               <a:rPr lang="en-US" dirty="0"/>
-              <a:t>Bridge to Module 7 (lab kickoff). Attendees should feel prepared.</a:t>
+              <a:t>This is the anti-lock-in reassurance. Attendees debating client-side vs. hosted often worry about being trapped; this slide says the choice is reversible for agent code, but Foundry-specific *features* are the actual coupling.</a:t>
             </a:r>
             <a:endParaRPr lang="en-US" dirty="0"/>
           </a:p>
@@ -688,7 +689,7 @@
           <a:p>
             <a:r>
               <a:rPr lang="en-US" dirty="0"/>
-              <a:t>Two-minute recap. Confirm no vocabulary confusion before moving to the lab.</a:t>
+              <a:t>Bridge to Module 7 (lab kickoff). Attendees should feel prepared.</a:t>
             </a:r>
             <a:endParaRPr lang="en-US" dirty="0"/>
           </a:p>
@@ -712,6 +713,94 @@
             <a:fld id="{F7021451-1387-4CA6-816F-3879F97B5CBC}" type="slidenum">
               <a:rPr lang="en-US"/>
               <a:t>11</a:t>
+            </a:fld>
+            <a:endParaRPr lang="en-US"/>
+          </a:p>
+        </p:txBody>
+      </p:sp>
+    </p:spTree>
+    <p:extLst>
+      <p:ext uri="{BB962C8B-B14F-4D97-AF65-F5344CB8AC3E}">
+        <p14:creationId xmlns:p14="http://schemas.microsoft.com/office/powerpoint/2010/main" val="1024086991"/>
+      </p:ext>
+    </p:extLst>
+  </p:cSld>
+  <p:clrMapOvr>
+    <a:masterClrMapping/>
+  </p:clrMapOvr>
+</p:notes>
+</file>
+
+<file path=ppt/notesSlides/notesSlide12.xml><?xml version="1.0" encoding="utf-8"?>
+<p:notes xmlns:a="http://schemas.openxmlformats.org/drawingml/2006/main" xmlns:r="http://schemas.openxmlformats.org/officeDocument/2006/relationships" xmlns:p="http://schemas.openxmlformats.org/presentationml/2006/main">
+  <p:cSld>
+    <p:spTree>
+      <p:nvGrpSpPr>
+        <p:cNvPr id="1" name=""/>
+        <p:cNvGrpSpPr/>
+        <p:nvPr/>
+      </p:nvGrpSpPr>
+      <p:grpSpPr>
+        <a:xfrm>
+          <a:off x="0" y="0"/>
+          <a:ext cx="0" cy="0"/>
+          <a:chOff x="0" y="0"/>
+          <a:chExt cx="0" cy="0"/>
+        </a:xfrm>
+      </p:grpSpPr>
+      <p:sp>
+        <p:nvSpPr>
+          <p:cNvPr id="2" name="Slide Image Placeholder 1"/>
+          <p:cNvSpPr>
+            <a:spLocks noGrp="1" noRot="1" noChangeAspect="1"/>
+          </p:cNvSpPr>
+          <p:nvPr>
+            <p:ph type="sldImg"/>
+          </p:nvPr>
+        </p:nvSpPr>
+        <p:spPr/>
+      </p:sp>
+      <p:sp>
+        <p:nvSpPr>
+          <p:cNvPr id="3" name="Notes Placeholder 2"/>
+          <p:cNvSpPr>
+            <a:spLocks noGrp="1"/>
+          </p:cNvSpPr>
+          <p:nvPr>
+            <p:ph type="body" idx="1"/>
+          </p:nvPr>
+        </p:nvSpPr>
+        <p:spPr/>
+        <p:txBody>
+          <a:bodyPr/>
+          <a:lstStyle/>
+          <a:p>
+            <a:r>
+              <a:rPr lang="en-US" dirty="0"/>
+              <a:t>Two-minute recap. Confirm no vocabulary confusion before moving to the lab.</a:t>
+            </a:r>
+            <a:endParaRPr lang="en-US" dirty="0"/>
+          </a:p>
+        </p:txBody>
+      </p:sp>
+      <p:sp>
+        <p:nvSpPr>
+          <p:cNvPr id="4" name="Slide Number Placeholder 3"/>
+          <p:cNvSpPr>
+            <a:spLocks noGrp="1"/>
+          </p:cNvSpPr>
+          <p:nvPr>
+            <p:ph type="sldNum" sz="quarter" idx="10"/>
+          </p:nvPr>
+        </p:nvSpPr>
+        <p:spPr/>
+        <p:txBody>
+          <a:bodyPr/>
+          <a:lstStyle/>
+          <a:p>
+            <a:fld id="{F7021451-1387-4CA6-816F-3879F97B5CBC}" type="slidenum">
+              <a:rPr lang="en-US"/>
+              <a:t>12</a:t>
             </a:fld>
             <a:endParaRPr lang="en-US"/>
           </a:p>
@@ -2045,7 +2134,7 @@
                 <a:ea typeface="Calibri" pitchFamily="34" charset="-122"/>
                 <a:cs typeface="Calibri" pitchFamily="34" charset="-120"/>
               </a:rPr>
-              <a:t>What you'll do in the lab</a:t>
+              <a:t>Same code, different destinations</a:t>
             </a:r>
             <a:endParaRPr lang="en-US" sz="2800" dirty="0"/>
           </a:p>
@@ -2060,7 +2149,7 @@
         <p:spPr>
           <a:xfrm>
             <a:off x="365760" y="1097280"/>
-            <a:ext cx="8412480" cy="3749040"/>
+            <a:ext cx="8412480" cy="457200"/>
           </a:xfrm>
           <a:prstGeom prst="rect">
             <a:avLst/>
@@ -2069,18 +2158,121 @@
           <a:ln/>
         </p:spPr>
         <p:txBody>
-          <a:bodyPr wrap="square" rtlCol="0" anchor="ctr"/>
+          <a:bodyPr wrap="square" lIns="0" tIns="0" rIns="0" bIns="0" rtlCol="0" anchor="ctr"/>
+          <a:lstStyle/>
+          <a:p>
+            <a:pPr indent="0" marL="0">
+              <a:buNone/>
+            </a:pPr>
+            <a:r>
+              <a:rPr lang="en-US" sz="1400" i="1" dirty="0">
+                <a:solidFill>
+                  <a:srgbClr val="6B7280"/>
+                </a:solidFill>
+                <a:latin typeface="Calibri" pitchFamily="34" charset="0"/>
+                <a:ea typeface="Calibri" pitchFamily="34" charset="-122"/>
+                <a:cs typeface="Calibri" pitchFamily="34" charset="-120"/>
+              </a:rPr>
+              <a:t>A MAF agent you write on your laptop is portable. The hosting decision is separable from the agent code.</a:t>
+            </a:r>
+            <a:endParaRPr lang="en-US" sz="1400" dirty="0"/>
+          </a:p>
+        </p:txBody>
+      </p:sp>
+      <p:sp>
+        <p:nvSpPr>
+          <p:cNvPr id="6" name="Shape 4"/>
+          <p:cNvSpPr/>
+          <p:nvPr/>
+        </p:nvSpPr>
+        <p:spPr>
+          <a:xfrm>
+            <a:off x="365760" y="1783080"/>
+            <a:ext cx="2743200" cy="2194560"/>
+          </a:xfrm>
+          <a:prstGeom prst="rect">
+            <a:avLst/>
+          </a:prstGeom>
+          <a:solidFill>
+            <a:srgbClr val="FFFFFF"/>
+          </a:solidFill>
+          <a:ln w="12700">
+            <a:solidFill>
+              <a:srgbClr val="1E2761"/>
+            </a:solidFill>
+            <a:prstDash val="solid"/>
+          </a:ln>
+        </p:spPr>
+      </p:sp>
+      <p:sp>
+        <p:nvSpPr>
+          <p:cNvPr id="7" name="Text 5"/>
+          <p:cNvSpPr/>
+          <p:nvPr/>
+        </p:nvSpPr>
+        <p:spPr>
+          <a:xfrm>
+            <a:off x="502920" y="1920240"/>
+            <a:ext cx="2468880" cy="365760"/>
+          </a:xfrm>
+          <a:prstGeom prst="rect">
+            <a:avLst/>
+          </a:prstGeom>
+          <a:noFill/>
+          <a:ln/>
+        </p:spPr>
+        <p:txBody>
+          <a:bodyPr wrap="square" lIns="0" tIns="0" rIns="0" bIns="0" rtlCol="0" anchor="ctr"/>
+          <a:lstStyle/>
+          <a:p>
+            <a:pPr algn="ctr" indent="0" marL="0">
+              <a:buNone/>
+            </a:pPr>
+            <a:r>
+              <a:rPr lang="en-US" sz="1500" b="1" dirty="0">
+                <a:solidFill>
+                  <a:srgbClr val="1E2761"/>
+                </a:solidFill>
+                <a:latin typeface="Calibri" pitchFamily="34" charset="0"/>
+                <a:ea typeface="Calibri" pitchFamily="34" charset="-122"/>
+                <a:cs typeface="Calibri" pitchFamily="34" charset="-120"/>
+              </a:rPr>
+              <a:t>Local dev on your laptop</a:t>
+            </a:r>
+            <a:endParaRPr lang="en-US" sz="1500" dirty="0"/>
+          </a:p>
+        </p:txBody>
+      </p:sp>
+      <p:sp>
+        <p:nvSpPr>
+          <p:cNvPr id="8" name="Text 6"/>
+          <p:cNvSpPr/>
+          <p:nvPr/>
+        </p:nvSpPr>
+        <p:spPr>
+          <a:xfrm>
+            <a:off x="548640" y="2423160"/>
+            <a:ext cx="2423160" cy="1417320"/>
+          </a:xfrm>
+          <a:prstGeom prst="rect">
+            <a:avLst/>
+          </a:prstGeom>
+          <a:noFill/>
+          <a:ln/>
+        </p:spPr>
+        <p:txBody>
+          <a:bodyPr wrap="square" rtlCol="0" anchor="t"/>
           <a:lstStyle/>
           <a:p>
             <a:pPr marL="342900" indent="-342900">
               <a:spcAft>
-                <a:spcPts val="600"/>
+                <a:spcPts val="400"/>
               </a:spcAft>
               <a:buSzPct val="100000"/>
               <a:buChar char="•"/>
             </a:pPr>
             <a:r>
-              <a:rPr lang="en-US" sz="1500" dirty="0">
+              <a:rPr lang="en-US" sz="1200" dirty="0">
                 <a:solidFill>
                   <a:srgbClr val="212121"/>
                 </a:solidFill>
@@ -2088,20 +2280,20 @@
                 <a:ea typeface="Calibri" pitchFamily="34" charset="-122"/>
                 <a:cs typeface="Calibri" pitchFamily="34" charset="-120"/>
               </a:rPr>
-              <a:t>Part A — build a client-side agent in your code</a:t>
-            </a:r>
-            <a:endParaRPr lang="en-US" sz="1500" dirty="0"/>
+              <a:t>uv run from a terminal</a:t>
+            </a:r>
+            <a:endParaRPr lang="en-US" sz="1200" dirty="0"/>
           </a:p>
           <a:p>
             <a:pPr marL="342900" indent="-342900">
               <a:spcAft>
-                <a:spcPts val="600"/>
+                <a:spcPts val="400"/>
               </a:spcAft>
               <a:buSzPct val="100000"/>
               <a:buChar char="•"/>
             </a:pPr>
             <a:r>
-              <a:rPr lang="en-US" sz="1500" dirty="0">
+              <a:rPr lang="en-US" sz="1200" dirty="0">
                 <a:solidFill>
                   <a:srgbClr val="212121"/>
                 </a:solidFill>
@@ -2109,20 +2301,20 @@
                 <a:ea typeface="Calibri" pitchFamily="34" charset="-122"/>
                 <a:cs typeface="Calibri" pitchFamily="34" charset="-120"/>
               </a:rPr>
-              <a:t>Part B — connect to a Foundry PromptAgent you create in the portal</a:t>
-            </a:r>
-            <a:endParaRPr lang="en-US" sz="1500" dirty="0"/>
+              <a:t>F5 in VS Code</a:t>
+            </a:r>
+            <a:endParaRPr lang="en-US" sz="1200" dirty="0"/>
           </a:p>
           <a:p>
             <a:pPr marL="342900" indent="-342900">
               <a:spcAft>
-                <a:spcPts val="600"/>
+                <a:spcPts val="400"/>
               </a:spcAft>
               <a:buSzPct val="100000"/>
               <a:buChar char="•"/>
             </a:pPr>
             <a:r>
-              <a:rPr lang="en-US" sz="1500" dirty="0">
+              <a:rPr lang="en-US" sz="1200" dirty="0">
                 <a:solidFill>
                   <a:srgbClr val="212121"/>
                 </a:solidFill>
@@ -2130,20 +2322,20 @@
                 <a:ea typeface="Calibri" pitchFamily="34" charset="-122"/>
                 <a:cs typeface="Calibri" pitchFamily="34" charset="-120"/>
               </a:rPr>
-              <a:t>Part C (bonus) — connect to a Foundry HostedAgent</a:t>
-            </a:r>
-            <a:endParaRPr lang="en-US" sz="1500" dirty="0"/>
+              <a:t>Fast iteration</a:t>
+            </a:r>
+            <a:endParaRPr lang="en-US" sz="1200" dirty="0"/>
           </a:p>
           <a:p>
             <a:pPr marL="342900" indent="-342900">
               <a:spcAft>
-                <a:spcPts val="600"/>
+                <a:spcPts val="400"/>
               </a:spcAft>
               <a:buSzPct val="100000"/>
               <a:buChar char="•"/>
             </a:pPr>
             <a:r>
-              <a:rPr lang="en-US" sz="1500" dirty="0">
+              <a:rPr lang="en-US" sz="1200" dirty="0">
                 <a:solidFill>
                   <a:srgbClr val="212121"/>
                 </a:solidFill>
@@ -2151,22 +2343,46 @@
                 <a:ea typeface="Calibri" pitchFamily="34" charset="-122"/>
                 <a:cs typeface="Calibri" pitchFamily="34" charset="-120"/>
               </a:rPr>
-              <a:t>Compare responses, thread persistence, and where each configuration lives</a:t>
-            </a:r>
-            <a:endParaRPr lang="en-US" sz="1500" dirty="0"/>
-          </a:p>
-        </p:txBody>
-      </p:sp>
-      <p:sp>
-        <p:nvSpPr>
-          <p:cNvPr id="6" name="Text 4"/>
+              <a:t>No cloud round-trip for logic</a:t>
+            </a:r>
+            <a:endParaRPr lang="en-US" sz="1200" dirty="0"/>
+          </a:p>
+        </p:txBody>
+      </p:sp>
+      <p:sp>
+        <p:nvSpPr>
+          <p:cNvPr id="9" name="Shape 7"/>
           <p:cNvSpPr/>
           <p:nvPr/>
         </p:nvSpPr>
         <p:spPr>
           <a:xfrm>
-            <a:off x="365760" y="4160520"/>
-            <a:ext cx="8412480" cy="365760"/>
+            <a:off x="3246120" y="2880360"/>
+            <a:ext cx="1280160" cy="0"/>
+          </a:xfrm>
+          <a:prstGeom prst="line">
+            <a:avLst/>
+          </a:prstGeom>
+          <a:noFill/>
+          <a:ln w="38100">
+            <a:solidFill>
+              <a:srgbClr val="1E2761"/>
+            </a:solidFill>
+            <a:prstDash val="solid"/>
+            <a:tailEnd type="triangle"/>
+          </a:ln>
+        </p:spPr>
+      </p:sp>
+      <p:sp>
+        <p:nvSpPr>
+          <p:cNvPr id="10" name="Text 8"/>
+          <p:cNvSpPr/>
+          <p:nvPr/>
+        </p:nvSpPr>
+        <p:spPr>
+          <a:xfrm>
+            <a:off x="3200400" y="2514600"/>
+            <a:ext cx="1371600" cy="274320"/>
           </a:xfrm>
           <a:prstGeom prst="rect">
             <a:avLst/>
@@ -2175,14 +2391,14 @@
           <a:ln/>
         </p:spPr>
         <p:txBody>
-          <a:bodyPr wrap="square" rtlCol="0" anchor="ctr"/>
-          <a:lstStyle/>
-          <a:p>
-            <a:pPr indent="0" marL="0">
-              <a:buNone/>
-            </a:pPr>
-            <a:r>
-              <a:rPr lang="en-US" sz="1500" b="1" i="1" dirty="0">
+          <a:bodyPr wrap="square" lIns="0" tIns="0" rIns="0" bIns="0" rtlCol="0" anchor="ctr"/>
+          <a:lstStyle/>
+          <a:p>
+            <a:pPr algn="ctr" indent="0" marL="0">
+              <a:buNone/>
+            </a:pPr>
+            <a:r>
+              <a:rPr lang="en-US" sz="1100" b="1" i="1" dirty="0">
                 <a:solidFill>
                   <a:srgbClr val="1E2761"/>
                 </a:solidFill>
@@ -2190,9 +2406,430 @@
                 <a:ea typeface="Calibri" pitchFamily="34" charset="-122"/>
                 <a:cs typeface="Calibri" pitchFamily="34" charset="-120"/>
               </a:rPr>
-              <a:t>Same model, three hosting styles. You'll feel the trade-offs.</a:t>
-            </a:r>
-            <a:endParaRPr lang="en-US" sz="1500" dirty="0"/>
+              <a:t>Same MAF code</a:t>
+            </a:r>
+            <a:endParaRPr lang="en-US" sz="1100" dirty="0"/>
+          </a:p>
+        </p:txBody>
+      </p:sp>
+      <p:sp>
+        <p:nvSpPr>
+          <p:cNvPr id="11" name="Text 9"/>
+          <p:cNvSpPr/>
+          <p:nvPr/>
+        </p:nvSpPr>
+        <p:spPr>
+          <a:xfrm>
+            <a:off x="3200400" y="2971800"/>
+            <a:ext cx="1371600" cy="274320"/>
+          </a:xfrm>
+          <a:prstGeom prst="rect">
+            <a:avLst/>
+          </a:prstGeom>
+          <a:noFill/>
+          <a:ln/>
+        </p:spPr>
+        <p:txBody>
+          <a:bodyPr wrap="square" lIns="0" tIns="0" rIns="0" bIns="0" rtlCol="0" anchor="ctr"/>
+          <a:lstStyle/>
+          <a:p>
+            <a:pPr algn="ctr" indent="0" marL="0">
+              <a:buNone/>
+            </a:pPr>
+            <a:r>
+              <a:rPr lang="en-US" sz="1000" i="1" dirty="0">
+                <a:solidFill>
+                  <a:srgbClr val="6B7280"/>
+                </a:solidFill>
+                <a:latin typeface="Calibri" pitchFamily="34" charset="0"/>
+                <a:ea typeface="Calibri" pitchFamily="34" charset="-122"/>
+                <a:cs typeface="Calibri" pitchFamily="34" charset="-120"/>
+              </a:rPr>
+              <a:t>no rewrite</a:t>
+            </a:r>
+            <a:endParaRPr lang="en-US" sz="1000" dirty="0"/>
+          </a:p>
+        </p:txBody>
+      </p:sp>
+      <p:sp>
+        <p:nvSpPr>
+          <p:cNvPr id="12" name="Shape 10"/>
+          <p:cNvSpPr/>
+          <p:nvPr/>
+        </p:nvSpPr>
+        <p:spPr>
+          <a:xfrm>
+            <a:off x="4937760" y="1783080"/>
+            <a:ext cx="3840480" cy="640080"/>
+          </a:xfrm>
+          <a:prstGeom prst="rect">
+            <a:avLst/>
+          </a:prstGeom>
+          <a:solidFill>
+            <a:srgbClr val="F3F4F6"/>
+          </a:solidFill>
+          <a:ln w="6350">
+            <a:solidFill>
+              <a:srgbClr val="D1D5DB"/>
+            </a:solidFill>
+            <a:prstDash val="solid"/>
+          </a:ln>
+        </p:spPr>
+      </p:sp>
+      <p:sp>
+        <p:nvSpPr>
+          <p:cNvPr id="13" name="Text 11"/>
+          <p:cNvSpPr/>
+          <p:nvPr/>
+        </p:nvSpPr>
+        <p:spPr>
+          <a:xfrm>
+            <a:off x="5074920" y="1837944"/>
+            <a:ext cx="3566160" cy="274320"/>
+          </a:xfrm>
+          <a:prstGeom prst="rect">
+            <a:avLst/>
+          </a:prstGeom>
+          <a:noFill/>
+          <a:ln/>
+        </p:spPr>
+        <p:txBody>
+          <a:bodyPr wrap="square" lIns="0" tIns="0" rIns="0" bIns="0" rtlCol="0" anchor="ctr"/>
+          <a:lstStyle/>
+          <a:p>
+            <a:pPr indent="0" marL="0">
+              <a:buNone/>
+            </a:pPr>
+            <a:r>
+              <a:rPr lang="en-US" sz="1300" b="1" dirty="0">
+                <a:solidFill>
+                  <a:srgbClr val="1E2761"/>
+                </a:solidFill>
+                <a:latin typeface="Calibri" pitchFamily="34" charset="0"/>
+                <a:ea typeface="Calibri" pitchFamily="34" charset="-122"/>
+                <a:cs typeface="Calibri" pitchFamily="34" charset="-120"/>
+              </a:rPr>
+              <a:t>Foundry Agent Service</a:t>
+            </a:r>
+            <a:endParaRPr lang="en-US" sz="1300" dirty="0"/>
+          </a:p>
+        </p:txBody>
+      </p:sp>
+      <p:sp>
+        <p:nvSpPr>
+          <p:cNvPr id="14" name="Text 12"/>
+          <p:cNvSpPr/>
+          <p:nvPr/>
+        </p:nvSpPr>
+        <p:spPr>
+          <a:xfrm>
+            <a:off x="5074920" y="2103120"/>
+            <a:ext cx="3566160" cy="274320"/>
+          </a:xfrm>
+          <a:prstGeom prst="rect">
+            <a:avLst/>
+          </a:prstGeom>
+          <a:noFill/>
+          <a:ln/>
+        </p:spPr>
+        <p:txBody>
+          <a:bodyPr wrap="square" lIns="0" tIns="0" rIns="0" bIns="0" rtlCol="0" anchor="ctr"/>
+          <a:lstStyle/>
+          <a:p>
+            <a:pPr indent="0" marL="0">
+              <a:buNone/>
+            </a:pPr>
+            <a:r>
+              <a:rPr lang="en-US" sz="1100" i="1" dirty="0">
+                <a:solidFill>
+                  <a:srgbClr val="6B7280"/>
+                </a:solidFill>
+                <a:latin typeface="Calibri" pitchFamily="34" charset="0"/>
+                <a:ea typeface="Calibri" pitchFamily="34" charset="-122"/>
+                <a:cs typeface="Calibri" pitchFamily="34" charset="-120"/>
+              </a:rPr>
+              <a:t>register as a PromptAgent or HostedAgent</a:t>
+            </a:r>
+            <a:endParaRPr lang="en-US" sz="1100" dirty="0"/>
+          </a:p>
+        </p:txBody>
+      </p:sp>
+      <p:sp>
+        <p:nvSpPr>
+          <p:cNvPr id="15" name="Shape 13"/>
+          <p:cNvSpPr/>
+          <p:nvPr/>
+        </p:nvSpPr>
+        <p:spPr>
+          <a:xfrm>
+            <a:off x="4937760" y="2560320"/>
+            <a:ext cx="3840480" cy="640080"/>
+          </a:xfrm>
+          <a:prstGeom prst="rect">
+            <a:avLst/>
+          </a:prstGeom>
+          <a:solidFill>
+            <a:srgbClr val="F3F4F6"/>
+          </a:solidFill>
+          <a:ln w="6350">
+            <a:solidFill>
+              <a:srgbClr val="D1D5DB"/>
+            </a:solidFill>
+            <a:prstDash val="solid"/>
+          </a:ln>
+        </p:spPr>
+      </p:sp>
+      <p:sp>
+        <p:nvSpPr>
+          <p:cNvPr id="16" name="Text 14"/>
+          <p:cNvSpPr/>
+          <p:nvPr/>
+        </p:nvSpPr>
+        <p:spPr>
+          <a:xfrm>
+            <a:off x="5074920" y="2615184"/>
+            <a:ext cx="3566160" cy="274320"/>
+          </a:xfrm>
+          <a:prstGeom prst="rect">
+            <a:avLst/>
+          </a:prstGeom>
+          <a:noFill/>
+          <a:ln/>
+        </p:spPr>
+        <p:txBody>
+          <a:bodyPr wrap="square" lIns="0" tIns="0" rIns="0" bIns="0" rtlCol="0" anchor="ctr"/>
+          <a:lstStyle/>
+          <a:p>
+            <a:pPr indent="0" marL="0">
+              <a:buNone/>
+            </a:pPr>
+            <a:r>
+              <a:rPr lang="en-US" sz="1300" b="1" dirty="0">
+                <a:solidFill>
+                  <a:srgbClr val="1E2761"/>
+                </a:solidFill>
+                <a:latin typeface="Calibri" pitchFamily="34" charset="0"/>
+                <a:ea typeface="Calibri" pitchFamily="34" charset="-122"/>
+                <a:cs typeface="Calibri" pitchFamily="34" charset="-120"/>
+              </a:rPr>
+              <a:t>Azure Container Apps or AKS</a:t>
+            </a:r>
+            <a:endParaRPr lang="en-US" sz="1300" dirty="0"/>
+          </a:p>
+        </p:txBody>
+      </p:sp>
+      <p:sp>
+        <p:nvSpPr>
+          <p:cNvPr id="17" name="Text 15"/>
+          <p:cNvSpPr/>
+          <p:nvPr/>
+        </p:nvSpPr>
+        <p:spPr>
+          <a:xfrm>
+            <a:off x="5074920" y="2880360"/>
+            <a:ext cx="3566160" cy="274320"/>
+          </a:xfrm>
+          <a:prstGeom prst="rect">
+            <a:avLst/>
+          </a:prstGeom>
+          <a:noFill/>
+          <a:ln/>
+        </p:spPr>
+        <p:txBody>
+          <a:bodyPr wrap="square" lIns="0" tIns="0" rIns="0" bIns="0" rtlCol="0" anchor="ctr"/>
+          <a:lstStyle/>
+          <a:p>
+            <a:pPr indent="0" marL="0">
+              <a:buNone/>
+            </a:pPr>
+            <a:r>
+              <a:rPr lang="en-US" sz="1100" i="1" dirty="0">
+                <a:solidFill>
+                  <a:srgbClr val="6B7280"/>
+                </a:solidFill>
+                <a:latin typeface="Calibri" pitchFamily="34" charset="0"/>
+                <a:ea typeface="Calibri" pitchFamily="34" charset="-122"/>
+                <a:cs typeface="Calibri" pitchFamily="34" charset="-120"/>
+              </a:rPr>
+              <a:t>you own the container</a:t>
+            </a:r>
+            <a:endParaRPr lang="en-US" sz="1100" dirty="0"/>
+          </a:p>
+        </p:txBody>
+      </p:sp>
+      <p:sp>
+        <p:nvSpPr>
+          <p:cNvPr id="18" name="Shape 16"/>
+          <p:cNvSpPr/>
+          <p:nvPr/>
+        </p:nvSpPr>
+        <p:spPr>
+          <a:xfrm>
+            <a:off x="4937760" y="3337560"/>
+            <a:ext cx="3840480" cy="640080"/>
+          </a:xfrm>
+          <a:prstGeom prst="rect">
+            <a:avLst/>
+          </a:prstGeom>
+          <a:solidFill>
+            <a:srgbClr val="F3F4F6"/>
+          </a:solidFill>
+          <a:ln w="6350">
+            <a:solidFill>
+              <a:srgbClr val="D1D5DB"/>
+            </a:solidFill>
+            <a:prstDash val="solid"/>
+          </a:ln>
+        </p:spPr>
+      </p:sp>
+      <p:sp>
+        <p:nvSpPr>
+          <p:cNvPr id="19" name="Text 17"/>
+          <p:cNvSpPr/>
+          <p:nvPr/>
+        </p:nvSpPr>
+        <p:spPr>
+          <a:xfrm>
+            <a:off x="5074920" y="3392424"/>
+            <a:ext cx="3566160" cy="274320"/>
+          </a:xfrm>
+          <a:prstGeom prst="rect">
+            <a:avLst/>
+          </a:prstGeom>
+          <a:noFill/>
+          <a:ln/>
+        </p:spPr>
+        <p:txBody>
+          <a:bodyPr wrap="square" lIns="0" tIns="0" rIns="0" bIns="0" rtlCol="0" anchor="ctr"/>
+          <a:lstStyle/>
+          <a:p>
+            <a:pPr indent="0" marL="0">
+              <a:buNone/>
+            </a:pPr>
+            <a:r>
+              <a:rPr lang="en-US" sz="1300" b="1" dirty="0">
+                <a:solidFill>
+                  <a:srgbClr val="1E2761"/>
+                </a:solidFill>
+                <a:latin typeface="Calibri" pitchFamily="34" charset="0"/>
+                <a:ea typeface="Calibri" pitchFamily="34" charset="-122"/>
+                <a:cs typeface="Calibri" pitchFamily="34" charset="-120"/>
+              </a:rPr>
+              <a:t>Azure Functions</a:t>
+            </a:r>
+            <a:endParaRPr lang="en-US" sz="1300" dirty="0"/>
+          </a:p>
+        </p:txBody>
+      </p:sp>
+      <p:sp>
+        <p:nvSpPr>
+          <p:cNvPr id="20" name="Text 18"/>
+          <p:cNvSpPr/>
+          <p:nvPr/>
+        </p:nvSpPr>
+        <p:spPr>
+          <a:xfrm>
+            <a:off x="5074920" y="3657600"/>
+            <a:ext cx="3566160" cy="274320"/>
+          </a:xfrm>
+          <a:prstGeom prst="rect">
+            <a:avLst/>
+          </a:prstGeom>
+          <a:noFill/>
+          <a:ln/>
+        </p:spPr>
+        <p:txBody>
+          <a:bodyPr wrap="square" lIns="0" tIns="0" rIns="0" bIns="0" rtlCol="0" anchor="ctr"/>
+          <a:lstStyle/>
+          <a:p>
+            <a:pPr indent="0" marL="0">
+              <a:buNone/>
+            </a:pPr>
+            <a:r>
+              <a:rPr lang="en-US" sz="1100" i="1" dirty="0">
+                <a:solidFill>
+                  <a:srgbClr val="6B7280"/>
+                </a:solidFill>
+                <a:latin typeface="Calibri" pitchFamily="34" charset="0"/>
+                <a:ea typeface="Calibri" pitchFamily="34" charset="-122"/>
+                <a:cs typeface="Calibri" pitchFamily="34" charset="-120"/>
+              </a:rPr>
+              <a:t>event-driven or HTTP triggers</a:t>
+            </a:r>
+            <a:endParaRPr lang="en-US" sz="1100" dirty="0"/>
+          </a:p>
+        </p:txBody>
+      </p:sp>
+      <p:sp>
+        <p:nvSpPr>
+          <p:cNvPr id="21" name="Shape 19"/>
+          <p:cNvSpPr/>
+          <p:nvPr/>
+        </p:nvSpPr>
+        <p:spPr>
+          <a:xfrm>
+            <a:off x="365760" y="4206240"/>
+            <a:ext cx="8412480" cy="548640"/>
+          </a:xfrm>
+          <a:prstGeom prst="rect">
+            <a:avLst/>
+          </a:prstGeom>
+          <a:solidFill>
+            <a:srgbClr val="CADCFC"/>
+          </a:solidFill>
+          <a:ln/>
+        </p:spPr>
+      </p:sp>
+      <p:sp>
+        <p:nvSpPr>
+          <p:cNvPr id="22" name="Text 20"/>
+          <p:cNvSpPr/>
+          <p:nvPr/>
+        </p:nvSpPr>
+        <p:spPr>
+          <a:xfrm>
+            <a:off x="502920" y="4251960"/>
+            <a:ext cx="8138160" cy="457200"/>
+          </a:xfrm>
+          <a:prstGeom prst="rect">
+            <a:avLst/>
+          </a:prstGeom>
+          <a:noFill/>
+          <a:ln/>
+        </p:spPr>
+        <p:txBody>
+          <a:bodyPr wrap="square" lIns="0" tIns="0" rIns="0" bIns="0" rtlCol="0" anchor="ctr"/>
+          <a:lstStyle/>
+          <a:p>
+            <a:pPr indent="0" marL="0">
+              <a:buNone/>
+            </a:pPr>
+            <a:r>
+              <a:rPr lang="en-US" sz="1200" b="1" dirty="0">
+                <a:solidFill>
+                  <a:srgbClr val="1E2761"/>
+                </a:solidFill>
+                <a:latin typeface="Calibri" pitchFamily="34" charset="0"/>
+                <a:ea typeface="Calibri" pitchFamily="34" charset="-122"/>
+                <a:cs typeface="Calibri" pitchFamily="34" charset="-120"/>
+              </a:rPr>
+              <a:t>Prototype and evaluate locally first — then pick a hosting destination. </a:t>
+            </a:r>
+            <a:pPr indent="0" marL="0">
+              <a:buNone/>
+            </a:pPr>
+            <a:r>
+              <a:rPr lang="en-US" sz="1200" dirty="0">
+                <a:solidFill>
+                  <a:srgbClr val="1E2761"/>
+                </a:solidFill>
+                <a:latin typeface="Calibri" pitchFamily="34" charset="0"/>
+                <a:ea typeface="Calibri" pitchFamily="34" charset="-122"/>
+                <a:cs typeface="Calibri" pitchFamily="34" charset="-120"/>
+              </a:rPr>
+              <a:t>Foundry-specific features (PromptAgent versioning, IQ, portal connections) remain hosted-only.</a:t>
+            </a:r>
+            <a:endParaRPr lang="en-US" sz="1200" dirty="0"/>
           </a:p>
         </p:txBody>
       </p:sp>
@@ -2207,6 +2844,281 @@
 <file path=ppt/slides/slide11.xml><?xml version="1.0" encoding="utf-8"?>
 <p:sld xmlns:a="http://schemas.openxmlformats.org/drawingml/2006/main" xmlns:r="http://schemas.openxmlformats.org/officeDocument/2006/relationships" xmlns:p="http://schemas.openxmlformats.org/presentationml/2006/main">
   <p:cSld name="Slide 11">
+    <p:bg>
+      <p:bgPr>
+        <a:solidFill>
+          <a:srgbClr val="FFFFFF"/>
+        </a:solidFill>
+      </p:bgPr>
+    </p:bg>
+    <p:spTree>
+      <p:nvGrpSpPr>
+        <p:cNvPr id="1" name=""/>
+        <p:cNvGrpSpPr/>
+        <p:nvPr/>
+      </p:nvGrpSpPr>
+      <p:grpSpPr>
+        <a:xfrm>
+          <a:off x="0" y="0"/>
+          <a:ext cx="0" cy="0"/>
+          <a:chOff x="0" y="0"/>
+          <a:chExt cx="0" cy="0"/>
+        </a:xfrm>
+      </p:grpSpPr>
+      <p:sp>
+        <p:nvSpPr>
+          <p:cNvPr id="2" name="Shape 0"/>
+          <p:cNvSpPr/>
+          <p:nvPr/>
+        </p:nvSpPr>
+        <p:spPr>
+          <a:xfrm>
+            <a:off x="0" y="0"/>
+            <a:ext cx="54864" cy="5143500"/>
+          </a:xfrm>
+          <a:prstGeom prst="rect">
+            <a:avLst/>
+          </a:prstGeom>
+          <a:solidFill>
+            <a:srgbClr val="1E2761"/>
+          </a:solidFill>
+          <a:ln/>
+        </p:spPr>
+      </p:sp>
+      <p:sp>
+        <p:nvSpPr>
+          <p:cNvPr id="3" name="Text 1"/>
+          <p:cNvSpPr/>
+          <p:nvPr/>
+        </p:nvSpPr>
+        <p:spPr>
+          <a:xfrm>
+            <a:off x="5669280" y="274320"/>
+            <a:ext cx="3291840" cy="274320"/>
+          </a:xfrm>
+          <a:prstGeom prst="rect">
+            <a:avLst/>
+          </a:prstGeom>
+          <a:noFill/>
+          <a:ln/>
+        </p:spPr>
+        <p:txBody>
+          <a:bodyPr wrap="square" lIns="0" tIns="0" rIns="0" bIns="0" rtlCol="0" anchor="ctr"/>
+          <a:lstStyle/>
+          <a:p>
+            <a:pPr algn="r" indent="0" marL="0">
+              <a:buNone/>
+            </a:pPr>
+            <a:r>
+              <a:rPr lang="en-US" sz="1000" dirty="0">
+                <a:solidFill>
+                  <a:srgbClr val="6B7280"/>
+                </a:solidFill>
+                <a:latin typeface="Calibri" pitchFamily="34" charset="0"/>
+                <a:ea typeface="Calibri" pitchFamily="34" charset="-122"/>
+                <a:cs typeface="Calibri" pitchFamily="34" charset="-120"/>
+              </a:rPr>
+              <a:t>Day 1 · Module 6</a:t>
+            </a:r>
+            <a:endParaRPr lang="en-US" sz="1000" dirty="0"/>
+          </a:p>
+        </p:txBody>
+      </p:sp>
+      <p:sp>
+        <p:nvSpPr>
+          <p:cNvPr id="4" name="Text 2"/>
+          <p:cNvSpPr/>
+          <p:nvPr/>
+        </p:nvSpPr>
+        <p:spPr>
+          <a:xfrm>
+            <a:off x="365760" y="320040"/>
+            <a:ext cx="6217920" cy="640080"/>
+          </a:xfrm>
+          <a:prstGeom prst="rect">
+            <a:avLst/>
+          </a:prstGeom>
+          <a:noFill/>
+          <a:ln/>
+        </p:spPr>
+        <p:txBody>
+          <a:bodyPr wrap="square" lIns="0" tIns="0" rIns="0" bIns="0" rtlCol="0" anchor="ctr"/>
+          <a:lstStyle/>
+          <a:p>
+            <a:pPr indent="0" marL="0">
+              <a:buNone/>
+            </a:pPr>
+            <a:r>
+              <a:rPr lang="en-US" sz="2800" b="1" dirty="0">
+                <a:solidFill>
+                  <a:srgbClr val="1E2761"/>
+                </a:solidFill>
+                <a:latin typeface="Calibri" pitchFamily="34" charset="0"/>
+                <a:ea typeface="Calibri" pitchFamily="34" charset="-122"/>
+                <a:cs typeface="Calibri" pitchFamily="34" charset="-120"/>
+              </a:rPr>
+              <a:t>What you'll do in the lab</a:t>
+            </a:r>
+            <a:endParaRPr lang="en-US" sz="2800" dirty="0"/>
+          </a:p>
+        </p:txBody>
+      </p:sp>
+      <p:sp>
+        <p:nvSpPr>
+          <p:cNvPr id="5" name="Text 3"/>
+          <p:cNvSpPr/>
+          <p:nvPr/>
+        </p:nvSpPr>
+        <p:spPr>
+          <a:xfrm>
+            <a:off x="365760" y="1097280"/>
+            <a:ext cx="8412480" cy="3749040"/>
+          </a:xfrm>
+          <a:prstGeom prst="rect">
+            <a:avLst/>
+          </a:prstGeom>
+          <a:noFill/>
+          <a:ln/>
+        </p:spPr>
+        <p:txBody>
+          <a:bodyPr wrap="square" rtlCol="0" anchor="ctr"/>
+          <a:lstStyle/>
+          <a:p>
+            <a:pPr marL="342900" indent="-342900">
+              <a:spcAft>
+                <a:spcPts val="600"/>
+              </a:spcAft>
+              <a:buSzPct val="100000"/>
+              <a:buChar char="•"/>
+            </a:pPr>
+            <a:r>
+              <a:rPr lang="en-US" sz="1500" dirty="0">
+                <a:solidFill>
+                  <a:srgbClr val="212121"/>
+                </a:solidFill>
+                <a:latin typeface="Calibri" pitchFamily="34" charset="0"/>
+                <a:ea typeface="Calibri" pitchFamily="34" charset="-122"/>
+                <a:cs typeface="Calibri" pitchFamily="34" charset="-120"/>
+              </a:rPr>
+              <a:t>Part A — build a client-side agent in your code</a:t>
+            </a:r>
+            <a:endParaRPr lang="en-US" sz="1500" dirty="0"/>
+          </a:p>
+          <a:p>
+            <a:pPr marL="342900" indent="-342900">
+              <a:spcAft>
+                <a:spcPts val="600"/>
+              </a:spcAft>
+              <a:buSzPct val="100000"/>
+              <a:buChar char="•"/>
+            </a:pPr>
+            <a:r>
+              <a:rPr lang="en-US" sz="1500" dirty="0">
+                <a:solidFill>
+                  <a:srgbClr val="212121"/>
+                </a:solidFill>
+                <a:latin typeface="Calibri" pitchFamily="34" charset="0"/>
+                <a:ea typeface="Calibri" pitchFamily="34" charset="-122"/>
+                <a:cs typeface="Calibri" pitchFamily="34" charset="-120"/>
+              </a:rPr>
+              <a:t>Part B — connect to a Foundry PromptAgent you create in the portal</a:t>
+            </a:r>
+            <a:endParaRPr lang="en-US" sz="1500" dirty="0"/>
+          </a:p>
+          <a:p>
+            <a:pPr marL="342900" indent="-342900">
+              <a:spcAft>
+                <a:spcPts val="600"/>
+              </a:spcAft>
+              <a:buSzPct val="100000"/>
+              <a:buChar char="•"/>
+            </a:pPr>
+            <a:r>
+              <a:rPr lang="en-US" sz="1500" dirty="0">
+                <a:solidFill>
+                  <a:srgbClr val="212121"/>
+                </a:solidFill>
+                <a:latin typeface="Calibri" pitchFamily="34" charset="0"/>
+                <a:ea typeface="Calibri" pitchFamily="34" charset="-122"/>
+                <a:cs typeface="Calibri" pitchFamily="34" charset="-120"/>
+              </a:rPr>
+              <a:t>Part C (bonus) — connect to a Foundry HostedAgent</a:t>
+            </a:r>
+            <a:endParaRPr lang="en-US" sz="1500" dirty="0"/>
+          </a:p>
+          <a:p>
+            <a:pPr marL="342900" indent="-342900">
+              <a:spcAft>
+                <a:spcPts val="600"/>
+              </a:spcAft>
+              <a:buSzPct val="100000"/>
+              <a:buChar char="•"/>
+            </a:pPr>
+            <a:r>
+              <a:rPr lang="en-US" sz="1500" dirty="0">
+                <a:solidFill>
+                  <a:srgbClr val="212121"/>
+                </a:solidFill>
+                <a:latin typeface="Calibri" pitchFamily="34" charset="0"/>
+                <a:ea typeface="Calibri" pitchFamily="34" charset="-122"/>
+                <a:cs typeface="Calibri" pitchFamily="34" charset="-120"/>
+              </a:rPr>
+              <a:t>Compare responses, thread persistence, and where each configuration lives</a:t>
+            </a:r>
+            <a:endParaRPr lang="en-US" sz="1500" dirty="0"/>
+          </a:p>
+        </p:txBody>
+      </p:sp>
+      <p:sp>
+        <p:nvSpPr>
+          <p:cNvPr id="6" name="Text 4"/>
+          <p:cNvSpPr/>
+          <p:nvPr/>
+        </p:nvSpPr>
+        <p:spPr>
+          <a:xfrm>
+            <a:off x="365760" y="4160520"/>
+            <a:ext cx="8412480" cy="365760"/>
+          </a:xfrm>
+          <a:prstGeom prst="rect">
+            <a:avLst/>
+          </a:prstGeom>
+          <a:noFill/>
+          <a:ln/>
+        </p:spPr>
+        <p:txBody>
+          <a:bodyPr wrap="square" rtlCol="0" anchor="ctr"/>
+          <a:lstStyle/>
+          <a:p>
+            <a:pPr indent="0" marL="0">
+              <a:buNone/>
+            </a:pPr>
+            <a:r>
+              <a:rPr lang="en-US" sz="1500" b="1" i="1" dirty="0">
+                <a:solidFill>
+                  <a:srgbClr val="1E2761"/>
+                </a:solidFill>
+                <a:latin typeface="Calibri" pitchFamily="34" charset="0"/>
+                <a:ea typeface="Calibri" pitchFamily="34" charset="-122"/>
+                <a:cs typeface="Calibri" pitchFamily="34" charset="-120"/>
+              </a:rPr>
+              <a:t>Same model, three hosting styles. You'll feel the trade-offs.</a:t>
+            </a:r>
+            <a:endParaRPr lang="en-US" sz="1500" dirty="0"/>
+          </a:p>
+        </p:txBody>
+      </p:sp>
+    </p:spTree>
+  </p:cSld>
+  <p:clrMapOvr>
+    <a:masterClrMapping/>
+  </p:clrMapOvr>
+</p:sld>
+</file>
+
+<file path=ppt/slides/slide12.xml><?xml version="1.0" encoding="utf-8"?>
+<p:sld xmlns:a="http://schemas.openxmlformats.org/drawingml/2006/main" xmlns:r="http://schemas.openxmlformats.org/officeDocument/2006/relationships" xmlns:p="http://schemas.openxmlformats.org/presentationml/2006/main">
+  <p:cSld name="Slide 12">
     <p:bg>
       <p:bgPr>
         <a:solidFill>

--- a/decks/day1/module-6-hosting-styles.pptx
+++ b/decks/day1/module-6-hosting-styles.pptx
@@ -17,9 +17,10 @@
     <p:sldId id="265" r:id="rId11"/>
     <p:sldId id="266" r:id="rId12"/>
     <p:sldId id="267" r:id="rId13"/>
+    <p:sldId id="268" r:id="rId14"/>
   </p:sldIdLst>
   <p:notesMasterIdLst>
-    <p:notesMasterId r:id="rId14"/>
+    <p:notesMasterId r:id="rId15"/>
   </p:notesMasterIdLst>
   <p:sldSz cx="9144000" cy="5143500"/>
   <p:notesSz cx="5143500" cy="9144000"/>
@@ -513,7 +514,7 @@
           <a:p>
             <a:r>
               <a:rPr lang="en-US" dirty="0"/>
-              <a:t>This is the terminology-heavy module. Get the words right — they're the actual MAF vocabulary and appear in every future day.</a:t>
+              <a:t>Terminology-heavy module. Get the words right — these are the actual Foundry Agent Service terms and appear in every future day. All three paths use the Responses API; what changes is where the code runs and how much of the runtime Foundry manages.</a:t>
             </a:r>
             <a:endParaRPr lang="en-US" dirty="0"/>
           </a:p>
@@ -601,7 +602,7 @@
           <a:p>
             <a:r>
               <a:rPr lang="en-US" dirty="0"/>
-              <a:t>This is the anti-lock-in reassurance. Attendees debating client-side vs. hosted often worry about being trapped; this slide says the choice is reversible for agent code, but Foundry-specific *features* are the actual coupling.</a:t>
+              <a:t>The first two gotchas are the terminology collisions the module was designed to fix. Reinforce.</a:t>
             </a:r>
             <a:endParaRPr lang="en-US" dirty="0"/>
           </a:p>
@@ -689,7 +690,7 @@
           <a:p>
             <a:r>
               <a:rPr lang="en-US" dirty="0"/>
-              <a:t>Bridge to Module 7 (lab kickoff). Attendees should feel prepared.</a:t>
+              <a:t>Anti-lock-in reassurance for the agent code. Foundry-specific *features* remain the coupling — call that out honestly.</a:t>
             </a:r>
             <a:endParaRPr lang="en-US" dirty="0"/>
           </a:p>
@@ -777,7 +778,7 @@
           <a:p>
             <a:r>
               <a:rPr lang="en-US" dirty="0"/>
-              <a:t>Two-minute recap. Confirm no vocabulary confusion before moving to the lab.</a:t>
+              <a:t>Bridge to Module 7 lab kickoff. Attendees should feel prepared.</a:t>
             </a:r>
             <a:endParaRPr lang="en-US" dirty="0"/>
           </a:p>
@@ -801,6 +802,94 @@
             <a:fld id="{F7021451-1387-4CA6-816F-3879F97B5CBC}" type="slidenum">
               <a:rPr lang="en-US"/>
               <a:t>12</a:t>
+            </a:fld>
+            <a:endParaRPr lang="en-US"/>
+          </a:p>
+        </p:txBody>
+      </p:sp>
+    </p:spTree>
+    <p:extLst>
+      <p:ext uri="{BB962C8B-B14F-4D97-AF65-F5344CB8AC3E}">
+        <p14:creationId xmlns:p14="http://schemas.microsoft.com/office/powerpoint/2010/main" val="1024086991"/>
+      </p:ext>
+    </p:extLst>
+  </p:cSld>
+  <p:clrMapOvr>
+    <a:masterClrMapping/>
+  </p:clrMapOvr>
+</p:notes>
+</file>
+
+<file path=ppt/notesSlides/notesSlide13.xml><?xml version="1.0" encoding="utf-8"?>
+<p:notes xmlns:a="http://schemas.openxmlformats.org/drawingml/2006/main" xmlns:r="http://schemas.openxmlformats.org/officeDocument/2006/relationships" xmlns:p="http://schemas.openxmlformats.org/presentationml/2006/main">
+  <p:cSld>
+    <p:spTree>
+      <p:nvGrpSpPr>
+        <p:cNvPr id="1" name=""/>
+        <p:cNvGrpSpPr/>
+        <p:nvPr/>
+      </p:nvGrpSpPr>
+      <p:grpSpPr>
+        <a:xfrm>
+          <a:off x="0" y="0"/>
+          <a:ext cx="0" cy="0"/>
+          <a:chOff x="0" y="0"/>
+          <a:chExt cx="0" cy="0"/>
+        </a:xfrm>
+      </p:grpSpPr>
+      <p:sp>
+        <p:nvSpPr>
+          <p:cNvPr id="2" name="Slide Image Placeholder 1"/>
+          <p:cNvSpPr>
+            <a:spLocks noGrp="1" noRot="1" noChangeAspect="1"/>
+          </p:cNvSpPr>
+          <p:nvPr>
+            <p:ph type="sldImg"/>
+          </p:nvPr>
+        </p:nvSpPr>
+        <p:spPr/>
+      </p:sp>
+      <p:sp>
+        <p:nvSpPr>
+          <p:cNvPr id="3" name="Notes Placeholder 2"/>
+          <p:cNvSpPr>
+            <a:spLocks noGrp="1"/>
+          </p:cNvSpPr>
+          <p:nvPr>
+            <p:ph type="body" idx="1"/>
+          </p:nvPr>
+        </p:nvSpPr>
+        <p:spPr/>
+        <p:txBody>
+          <a:bodyPr/>
+          <a:lstStyle/>
+          <a:p>
+            <a:r>
+              <a:rPr lang="en-US" dirty="0"/>
+              <a:t>Two-minute recap. Confirm no vocabulary confusion before moving to the lab.</a:t>
+            </a:r>
+            <a:endParaRPr lang="en-US" dirty="0"/>
+          </a:p>
+        </p:txBody>
+      </p:sp>
+      <p:sp>
+        <p:nvSpPr>
+          <p:cNvPr id="4" name="Slide Number Placeholder 3"/>
+          <p:cNvSpPr>
+            <a:spLocks noGrp="1"/>
+          </p:cNvSpPr>
+          <p:nvPr>
+            <p:ph type="sldNum" sz="quarter" idx="10"/>
+          </p:nvPr>
+        </p:nvSpPr>
+        <p:spPr/>
+        <p:txBody>
+          <a:bodyPr/>
+          <a:lstStyle/>
+          <a:p>
+            <a:fld id="{F7021451-1387-4CA6-816F-3879F97B5CBC}" type="slidenum">
+              <a:rPr lang="en-US"/>
+              <a:t>13</a:t>
             </a:fld>
             <a:endParaRPr lang="en-US"/>
           </a:p>
@@ -865,7 +954,7 @@
           <a:p>
             <a:r>
               <a:rPr lang="en-US" dirty="0"/>
-              <a:t>Frame the choice as scenario-driven. No wrong answer — it's about who owns lifecycle and who consumes the agent.</a:t>
+              <a:t>Anchor slide for the module. Reinforce: the Responses API is the shared entry point. What changes across the three paths is where the code lives and who manages the runtime.</a:t>
             </a:r>
             <a:endParaRPr lang="en-US" dirty="0"/>
           </a:p>
@@ -953,7 +1042,7 @@
           <a:p>
             <a:r>
               <a:rPr lang="en-US" dirty="0"/>
-              <a:t>Note there's no versioning here — you version the code, not the agent.</a:t>
+              <a:t>Call out: this is Learn's recommended 'start here' path. Zero infrastructure and the fastest way to see an agent working.</a:t>
             </a:r>
             <a:endParaRPr lang="en-US" dirty="0"/>
           </a:p>
@@ -1041,7 +1130,7 @@
           <a:p>
             <a:r>
               <a:rPr lang="en-US" dirty="0"/>
-              <a:t>Point out AIProjectClient.AsAIAgent(...) is the .NET client-side pattern; same primitives.</a:t>
+              <a:t>The most common developer path. Emphasize the additive relationship with Path C — Path B code becomes a Hosted agent by packaging, not rewriting.</a:t>
             </a:r>
             <a:endParaRPr lang="en-US" dirty="0"/>
           </a:p>
@@ -1129,7 +1218,7 @@
           <a:p>
             <a:r>
               <a:rPr lang="en-US" dirty="0"/>
-              <a:t>This is where 'the P word' collision usually confuses people — clarify PromptAgent is a Foundry-hosted thing, NOT the in-process pattern.</a:t>
+              <a:t>Point out AIProjectClient.AsAIAgent(...) is C#'s way to write Path B. Python and C# APIs mirror.</a:t>
             </a:r>
             <a:endParaRPr lang="en-US" dirty="0"/>
           </a:p>
@@ -1217,7 +1306,7 @@
           <a:p>
             <a:r>
               <a:rPr lang="en-US" dirty="0"/>
-              <a:t>Only difference from PromptAgent in code = no agent_version. Emphasize how small the API delta is.</a:t>
+              <a:t>Path C is where Foundry stops being 'model host' and starts being 'agent app host + platform tooling.' Attendees see this in Part C of the lab.</a:t>
             </a:r>
             <a:endParaRPr lang="en-US" dirty="0"/>
           </a:p>
@@ -1305,7 +1394,7 @@
           <a:p>
             <a:r>
               <a:rPr lang="en-US" dirty="0"/>
-              <a:t>Walk down each row. Pause on 'versioning' — that's the main reason to pick PromptAgent over HostedAgent.</a:t>
+              <a:t>This is the answer to 'why not just run my own container?' Foundry hosts your app runtime AND the tooling around it in one place.</a:t>
             </a:r>
             <a:endParaRPr lang="en-US" dirty="0"/>
           </a:p>
@@ -1393,7 +1482,7 @@
           <a:p>
             <a:r>
               <a:rPr lang="en-US" dirty="0"/>
-              <a:t>Ask the audience: 'anyone see their scenario fitting more than one row?' Common — good discussion.</a:t>
+              <a:t>Walk down each row. Emphasize how Path B is the most portable but requires you to handle endpoint, scaling, identity yourself.</a:t>
             </a:r>
             <a:endParaRPr lang="en-US" dirty="0"/>
           </a:p>
@@ -1481,7 +1570,7 @@
           <a:p>
             <a:r>
               <a:rPr lang="en-US" dirty="0"/>
-              <a:t>The first bullet is the terminology collision we surface all week. If attendees only remember one gotcha, this is it.</a:t>
+              <a:t>Ask the audience whether their scenario fits more than one row — many will. That's the point.</a:t>
             </a:r>
             <a:endParaRPr lang="en-US" dirty="0"/>
           </a:p>
@@ -1926,7 +2015,7 @@
                 <a:ea typeface="Calibri" pitchFamily="34" charset="-122"/>
                 <a:cs typeface="Calibri" pitchFamily="34" charset="-120"/>
               </a:rPr>
-              <a:t>Agent Hosting Styles</a:t>
+              <a:t>Three ways to run an agent with Foundry</a:t>
             </a:r>
             <a:endParaRPr lang="en-US" sz="4000" dirty="0"/>
           </a:p>
@@ -1965,7 +2054,7 @@
                 <a:ea typeface="Calibri" pitchFamily="34" charset="-122"/>
                 <a:cs typeface="Calibri" pitchFamily="34" charset="-120"/>
               </a:rPr>
-              <a:t>Client-side vs. Foundry-hosted (PromptAgent and HostedAgent)</a:t>
+              <a:t>Prompt agents, Hosted agents, and calling the Responses API from your own code</a:t>
             </a:r>
             <a:endParaRPr lang="en-US" sz="1800" dirty="0"/>
           </a:p>
@@ -2134,7 +2223,7 @@
                 <a:ea typeface="Calibri" pitchFamily="34" charset="-122"/>
                 <a:cs typeface="Calibri" pitchFamily="34" charset="-120"/>
               </a:rPr>
-              <a:t>Same code, different destinations</a:t>
+              <a:t>Common gotchas</a:t>
             </a:r>
             <a:endParaRPr lang="en-US" sz="2800" dirty="0"/>
           </a:p>
@@ -2149,7 +2238,7 @@
         <p:spPr>
           <a:xfrm>
             <a:off x="365760" y="1097280"/>
-            <a:ext cx="8412480" cy="457200"/>
+            <a:ext cx="8412480" cy="3749040"/>
           </a:xfrm>
           <a:prstGeom prst="rect">
             <a:avLst/>
@@ -2158,121 +2247,18 @@
           <a:ln/>
         </p:spPr>
         <p:txBody>
-          <a:bodyPr wrap="square" lIns="0" tIns="0" rIns="0" bIns="0" rtlCol="0" anchor="ctr"/>
-          <a:lstStyle/>
-          <a:p>
-            <a:pPr indent="0" marL="0">
-              <a:buNone/>
-            </a:pPr>
-            <a:r>
-              <a:rPr lang="en-US" sz="1400" i="1" dirty="0">
-                <a:solidFill>
-                  <a:srgbClr val="6B7280"/>
-                </a:solidFill>
-                <a:latin typeface="Calibri" pitchFamily="34" charset="0"/>
-                <a:ea typeface="Calibri" pitchFamily="34" charset="-122"/>
-                <a:cs typeface="Calibri" pitchFamily="34" charset="-120"/>
-              </a:rPr>
-              <a:t>A MAF agent you write on your laptop is portable. The hosting decision is separable from the agent code.</a:t>
-            </a:r>
-            <a:endParaRPr lang="en-US" sz="1400" dirty="0"/>
-          </a:p>
-        </p:txBody>
-      </p:sp>
-      <p:sp>
-        <p:nvSpPr>
-          <p:cNvPr id="6" name="Shape 4"/>
-          <p:cNvSpPr/>
-          <p:nvPr/>
-        </p:nvSpPr>
-        <p:spPr>
-          <a:xfrm>
-            <a:off x="365760" y="1783080"/>
-            <a:ext cx="2743200" cy="2194560"/>
-          </a:xfrm>
-          <a:prstGeom prst="rect">
-            <a:avLst/>
-          </a:prstGeom>
-          <a:solidFill>
-            <a:srgbClr val="FFFFFF"/>
-          </a:solidFill>
-          <a:ln w="12700">
-            <a:solidFill>
-              <a:srgbClr val="1E2761"/>
-            </a:solidFill>
-            <a:prstDash val="solid"/>
-          </a:ln>
-        </p:spPr>
-      </p:sp>
-      <p:sp>
-        <p:nvSpPr>
-          <p:cNvPr id="7" name="Text 5"/>
-          <p:cNvSpPr/>
-          <p:nvPr/>
-        </p:nvSpPr>
-        <p:spPr>
-          <a:xfrm>
-            <a:off x="502920" y="1920240"/>
-            <a:ext cx="2468880" cy="365760"/>
-          </a:xfrm>
-          <a:prstGeom prst="rect">
-            <a:avLst/>
-          </a:prstGeom>
-          <a:noFill/>
-          <a:ln/>
-        </p:spPr>
-        <p:txBody>
-          <a:bodyPr wrap="square" lIns="0" tIns="0" rIns="0" bIns="0" rtlCol="0" anchor="ctr"/>
-          <a:lstStyle/>
-          <a:p>
-            <a:pPr algn="ctr" indent="0" marL="0">
-              <a:buNone/>
-            </a:pPr>
-            <a:r>
-              <a:rPr lang="en-US" sz="1500" b="1" dirty="0">
-                <a:solidFill>
-                  <a:srgbClr val="1E2761"/>
-                </a:solidFill>
-                <a:latin typeface="Calibri" pitchFamily="34" charset="0"/>
-                <a:ea typeface="Calibri" pitchFamily="34" charset="-122"/>
-                <a:cs typeface="Calibri" pitchFamily="34" charset="-120"/>
-              </a:rPr>
-              <a:t>Local dev on your laptop</a:t>
-            </a:r>
-            <a:endParaRPr lang="en-US" sz="1500" dirty="0"/>
-          </a:p>
-        </p:txBody>
-      </p:sp>
-      <p:sp>
-        <p:nvSpPr>
-          <p:cNvPr id="8" name="Text 6"/>
-          <p:cNvSpPr/>
-          <p:nvPr/>
-        </p:nvSpPr>
-        <p:spPr>
-          <a:xfrm>
-            <a:off x="548640" y="2423160"/>
-            <a:ext cx="2423160" cy="1417320"/>
-          </a:xfrm>
-          <a:prstGeom prst="rect">
-            <a:avLst/>
-          </a:prstGeom>
-          <a:noFill/>
-          <a:ln/>
-        </p:spPr>
-        <p:txBody>
-          <a:bodyPr wrap="square" rtlCol="0" anchor="t"/>
+          <a:bodyPr wrap="square" rtlCol="0" anchor="ctr"/>
           <a:lstStyle/>
           <a:p>
             <a:pPr marL="342900" indent="-342900">
               <a:spcAft>
-                <a:spcPts val="400"/>
+                <a:spcPts val="600"/>
               </a:spcAft>
               <a:buSzPct val="100000"/>
               <a:buChar char="•"/>
             </a:pPr>
             <a:r>
-              <a:rPr lang="en-US" sz="1200" dirty="0">
+              <a:rPr lang="en-US" sz="1300" dirty="0">
                 <a:solidFill>
                   <a:srgbClr val="212121"/>
                 </a:solidFill>
@@ -2280,20 +2266,20 @@
                 <a:ea typeface="Calibri" pitchFamily="34" charset="-122"/>
                 <a:cs typeface="Calibri" pitchFamily="34" charset="-120"/>
               </a:rPr>
-              <a:t>uv run from a terminal</a:t>
-            </a:r>
-            <a:endParaRPr lang="en-US" sz="1200" dirty="0"/>
+              <a:t>"Prompt agent = client-side" — wrong. A Prompt agent is Foundry-managed. There's no client-side runtime for it at all.</a:t>
+            </a:r>
+            <a:endParaRPr lang="en-US" sz="1300" dirty="0"/>
           </a:p>
           <a:p>
             <a:pPr marL="342900" indent="-342900">
               <a:spcAft>
-                <a:spcPts val="400"/>
+                <a:spcPts val="600"/>
               </a:spcAft>
               <a:buSzPct val="100000"/>
               <a:buChar char="•"/>
             </a:pPr>
             <a:r>
-              <a:rPr lang="en-US" sz="1200" dirty="0">
+              <a:rPr lang="en-US" sz="1300" dirty="0">
                 <a:solidFill>
                   <a:srgbClr val="212121"/>
                 </a:solidFill>
@@ -2301,20 +2287,20 @@
                 <a:ea typeface="Calibri" pitchFamily="34" charset="-122"/>
                 <a:cs typeface="Calibri" pitchFamily="34" charset="-120"/>
               </a:rPr>
-              <a:t>F5 in VS Code</a:t>
-            </a:r>
-            <a:endParaRPr lang="en-US" sz="1200" dirty="0"/>
+              <a:t>"Hosted agent = my code running anywhere in Azure" — wrong. Hosted agent specifically means your code as a container run by Foundry Agent Service. Your own container in your own App Service is Path B, not Path C.</a:t>
+            </a:r>
+            <a:endParaRPr lang="en-US" sz="1300" dirty="0"/>
           </a:p>
           <a:p>
             <a:pPr marL="342900" indent="-342900">
               <a:spcAft>
-                <a:spcPts val="400"/>
+                <a:spcPts val="600"/>
               </a:spcAft>
               <a:buSzPct val="100000"/>
               <a:buChar char="•"/>
             </a:pPr>
             <a:r>
-              <a:rPr lang="en-US" sz="1200" dirty="0">
+              <a:rPr lang="en-US" sz="1300" dirty="0">
                 <a:solidFill>
                   <a:srgbClr val="212121"/>
                 </a:solidFill>
@@ -2322,20 +2308,20 @@
                 <a:ea typeface="Calibri" pitchFamily="34" charset="-122"/>
                 <a:cs typeface="Calibri" pitchFamily="34" charset="-120"/>
               </a:rPr>
-              <a:t>Fast iteration</a:t>
-            </a:r>
-            <a:endParaRPr lang="en-US" sz="1200" dirty="0"/>
+              <a:t>Assuming portability off Foundry — Path A is Foundry-only by construction. Path C keeps Foundry-managed features (Toolbox, IQ, portal connections) behind the managed endpoint. Path B is the most portable.</a:t>
+            </a:r>
+            <a:endParaRPr lang="en-US" sz="1300" dirty="0"/>
           </a:p>
           <a:p>
             <a:pPr marL="342900" indent="-342900">
               <a:spcAft>
-                <a:spcPts val="400"/>
+                <a:spcPts val="600"/>
               </a:spcAft>
               <a:buSzPct val="100000"/>
               <a:buChar char="•"/>
             </a:pPr>
             <a:r>
-              <a:rPr lang="en-US" sz="1200" dirty="0">
+              <a:rPr lang="en-US" sz="1300" dirty="0">
                 <a:solidFill>
                   <a:srgbClr val="212121"/>
                 </a:solidFill>
@@ -2343,493 +2329,9 @@
                 <a:ea typeface="Calibri" pitchFamily="34" charset="-122"/>
                 <a:cs typeface="Calibri" pitchFamily="34" charset="-120"/>
               </a:rPr>
-              <a:t>No cloud round-trip for logic</a:t>
-            </a:r>
-            <a:endParaRPr lang="en-US" sz="1200" dirty="0"/>
-          </a:p>
-        </p:txBody>
-      </p:sp>
-      <p:sp>
-        <p:nvSpPr>
-          <p:cNvPr id="9" name="Shape 7"/>
-          <p:cNvSpPr/>
-          <p:nvPr/>
-        </p:nvSpPr>
-        <p:spPr>
-          <a:xfrm>
-            <a:off x="3246120" y="2880360"/>
-            <a:ext cx="1280160" cy="0"/>
-          </a:xfrm>
-          <a:prstGeom prst="line">
-            <a:avLst/>
-          </a:prstGeom>
-          <a:noFill/>
-          <a:ln w="38100">
-            <a:solidFill>
-              <a:srgbClr val="1E2761"/>
-            </a:solidFill>
-            <a:prstDash val="solid"/>
-            <a:tailEnd type="triangle"/>
-          </a:ln>
-        </p:spPr>
-      </p:sp>
-      <p:sp>
-        <p:nvSpPr>
-          <p:cNvPr id="10" name="Text 8"/>
-          <p:cNvSpPr/>
-          <p:nvPr/>
-        </p:nvSpPr>
-        <p:spPr>
-          <a:xfrm>
-            <a:off x="3200400" y="2514600"/>
-            <a:ext cx="1371600" cy="274320"/>
-          </a:xfrm>
-          <a:prstGeom prst="rect">
-            <a:avLst/>
-          </a:prstGeom>
-          <a:noFill/>
-          <a:ln/>
-        </p:spPr>
-        <p:txBody>
-          <a:bodyPr wrap="square" lIns="0" tIns="0" rIns="0" bIns="0" rtlCol="0" anchor="ctr"/>
-          <a:lstStyle/>
-          <a:p>
-            <a:pPr algn="ctr" indent="0" marL="0">
-              <a:buNone/>
-            </a:pPr>
-            <a:r>
-              <a:rPr lang="en-US" sz="1100" b="1" i="1" dirty="0">
-                <a:solidFill>
-                  <a:srgbClr val="1E2761"/>
-                </a:solidFill>
-                <a:latin typeface="Calibri" pitchFamily="34" charset="0"/>
-                <a:ea typeface="Calibri" pitchFamily="34" charset="-122"/>
-                <a:cs typeface="Calibri" pitchFamily="34" charset="-120"/>
-              </a:rPr>
-              <a:t>Same MAF code</a:t>
-            </a:r>
-            <a:endParaRPr lang="en-US" sz="1100" dirty="0"/>
-          </a:p>
-        </p:txBody>
-      </p:sp>
-      <p:sp>
-        <p:nvSpPr>
-          <p:cNvPr id="11" name="Text 9"/>
-          <p:cNvSpPr/>
-          <p:nvPr/>
-        </p:nvSpPr>
-        <p:spPr>
-          <a:xfrm>
-            <a:off x="3200400" y="2971800"/>
-            <a:ext cx="1371600" cy="274320"/>
-          </a:xfrm>
-          <a:prstGeom prst="rect">
-            <a:avLst/>
-          </a:prstGeom>
-          <a:noFill/>
-          <a:ln/>
-        </p:spPr>
-        <p:txBody>
-          <a:bodyPr wrap="square" lIns="0" tIns="0" rIns="0" bIns="0" rtlCol="0" anchor="ctr"/>
-          <a:lstStyle/>
-          <a:p>
-            <a:pPr algn="ctr" indent="0" marL="0">
-              <a:buNone/>
-            </a:pPr>
-            <a:r>
-              <a:rPr lang="en-US" sz="1000" i="1" dirty="0">
-                <a:solidFill>
-                  <a:srgbClr val="6B7280"/>
-                </a:solidFill>
-                <a:latin typeface="Calibri" pitchFamily="34" charset="0"/>
-                <a:ea typeface="Calibri" pitchFamily="34" charset="-122"/>
-                <a:cs typeface="Calibri" pitchFamily="34" charset="-120"/>
-              </a:rPr>
-              <a:t>no rewrite</a:t>
-            </a:r>
-            <a:endParaRPr lang="en-US" sz="1000" dirty="0"/>
-          </a:p>
-        </p:txBody>
-      </p:sp>
-      <p:sp>
-        <p:nvSpPr>
-          <p:cNvPr id="12" name="Shape 10"/>
-          <p:cNvSpPr/>
-          <p:nvPr/>
-        </p:nvSpPr>
-        <p:spPr>
-          <a:xfrm>
-            <a:off x="4937760" y="1783080"/>
-            <a:ext cx="3840480" cy="640080"/>
-          </a:xfrm>
-          <a:prstGeom prst="rect">
-            <a:avLst/>
-          </a:prstGeom>
-          <a:solidFill>
-            <a:srgbClr val="F3F4F6"/>
-          </a:solidFill>
-          <a:ln w="6350">
-            <a:solidFill>
-              <a:srgbClr val="D1D5DB"/>
-            </a:solidFill>
-            <a:prstDash val="solid"/>
-          </a:ln>
-        </p:spPr>
-      </p:sp>
-      <p:sp>
-        <p:nvSpPr>
-          <p:cNvPr id="13" name="Text 11"/>
-          <p:cNvSpPr/>
-          <p:nvPr/>
-        </p:nvSpPr>
-        <p:spPr>
-          <a:xfrm>
-            <a:off x="5074920" y="1837944"/>
-            <a:ext cx="3566160" cy="274320"/>
-          </a:xfrm>
-          <a:prstGeom prst="rect">
-            <a:avLst/>
-          </a:prstGeom>
-          <a:noFill/>
-          <a:ln/>
-        </p:spPr>
-        <p:txBody>
-          <a:bodyPr wrap="square" lIns="0" tIns="0" rIns="0" bIns="0" rtlCol="0" anchor="ctr"/>
-          <a:lstStyle/>
-          <a:p>
-            <a:pPr indent="0" marL="0">
-              <a:buNone/>
-            </a:pPr>
-            <a:r>
-              <a:rPr lang="en-US" sz="1300" b="1" dirty="0">
-                <a:solidFill>
-                  <a:srgbClr val="1E2761"/>
-                </a:solidFill>
-                <a:latin typeface="Calibri" pitchFamily="34" charset="0"/>
-                <a:ea typeface="Calibri" pitchFamily="34" charset="-122"/>
-                <a:cs typeface="Calibri" pitchFamily="34" charset="-120"/>
-              </a:rPr>
-              <a:t>Foundry Agent Service</a:t>
+              <a:t>Mixing up authentication — all three use Azure identity; the credential authenticates to different things.</a:t>
             </a:r>
             <a:endParaRPr lang="en-US" sz="1300" dirty="0"/>
-          </a:p>
-        </p:txBody>
-      </p:sp>
-      <p:sp>
-        <p:nvSpPr>
-          <p:cNvPr id="14" name="Text 12"/>
-          <p:cNvSpPr/>
-          <p:nvPr/>
-        </p:nvSpPr>
-        <p:spPr>
-          <a:xfrm>
-            <a:off x="5074920" y="2103120"/>
-            <a:ext cx="3566160" cy="274320"/>
-          </a:xfrm>
-          <a:prstGeom prst="rect">
-            <a:avLst/>
-          </a:prstGeom>
-          <a:noFill/>
-          <a:ln/>
-        </p:spPr>
-        <p:txBody>
-          <a:bodyPr wrap="square" lIns="0" tIns="0" rIns="0" bIns="0" rtlCol="0" anchor="ctr"/>
-          <a:lstStyle/>
-          <a:p>
-            <a:pPr indent="0" marL="0">
-              <a:buNone/>
-            </a:pPr>
-            <a:r>
-              <a:rPr lang="en-US" sz="1100" i="1" dirty="0">
-                <a:solidFill>
-                  <a:srgbClr val="6B7280"/>
-                </a:solidFill>
-                <a:latin typeface="Calibri" pitchFamily="34" charset="0"/>
-                <a:ea typeface="Calibri" pitchFamily="34" charset="-122"/>
-                <a:cs typeface="Calibri" pitchFamily="34" charset="-120"/>
-              </a:rPr>
-              <a:t>register as a PromptAgent or HostedAgent</a:t>
-            </a:r>
-            <a:endParaRPr lang="en-US" sz="1100" dirty="0"/>
-          </a:p>
-        </p:txBody>
-      </p:sp>
-      <p:sp>
-        <p:nvSpPr>
-          <p:cNvPr id="15" name="Shape 13"/>
-          <p:cNvSpPr/>
-          <p:nvPr/>
-        </p:nvSpPr>
-        <p:spPr>
-          <a:xfrm>
-            <a:off x="4937760" y="2560320"/>
-            <a:ext cx="3840480" cy="640080"/>
-          </a:xfrm>
-          <a:prstGeom prst="rect">
-            <a:avLst/>
-          </a:prstGeom>
-          <a:solidFill>
-            <a:srgbClr val="F3F4F6"/>
-          </a:solidFill>
-          <a:ln w="6350">
-            <a:solidFill>
-              <a:srgbClr val="D1D5DB"/>
-            </a:solidFill>
-            <a:prstDash val="solid"/>
-          </a:ln>
-        </p:spPr>
-      </p:sp>
-      <p:sp>
-        <p:nvSpPr>
-          <p:cNvPr id="16" name="Text 14"/>
-          <p:cNvSpPr/>
-          <p:nvPr/>
-        </p:nvSpPr>
-        <p:spPr>
-          <a:xfrm>
-            <a:off x="5074920" y="2615184"/>
-            <a:ext cx="3566160" cy="274320"/>
-          </a:xfrm>
-          <a:prstGeom prst="rect">
-            <a:avLst/>
-          </a:prstGeom>
-          <a:noFill/>
-          <a:ln/>
-        </p:spPr>
-        <p:txBody>
-          <a:bodyPr wrap="square" lIns="0" tIns="0" rIns="0" bIns="0" rtlCol="0" anchor="ctr"/>
-          <a:lstStyle/>
-          <a:p>
-            <a:pPr indent="0" marL="0">
-              <a:buNone/>
-            </a:pPr>
-            <a:r>
-              <a:rPr lang="en-US" sz="1300" b="1" dirty="0">
-                <a:solidFill>
-                  <a:srgbClr val="1E2761"/>
-                </a:solidFill>
-                <a:latin typeface="Calibri" pitchFamily="34" charset="0"/>
-                <a:ea typeface="Calibri" pitchFamily="34" charset="-122"/>
-                <a:cs typeface="Calibri" pitchFamily="34" charset="-120"/>
-              </a:rPr>
-              <a:t>Azure Container Apps or AKS</a:t>
-            </a:r>
-            <a:endParaRPr lang="en-US" sz="1300" dirty="0"/>
-          </a:p>
-        </p:txBody>
-      </p:sp>
-      <p:sp>
-        <p:nvSpPr>
-          <p:cNvPr id="17" name="Text 15"/>
-          <p:cNvSpPr/>
-          <p:nvPr/>
-        </p:nvSpPr>
-        <p:spPr>
-          <a:xfrm>
-            <a:off x="5074920" y="2880360"/>
-            <a:ext cx="3566160" cy="274320"/>
-          </a:xfrm>
-          <a:prstGeom prst="rect">
-            <a:avLst/>
-          </a:prstGeom>
-          <a:noFill/>
-          <a:ln/>
-        </p:spPr>
-        <p:txBody>
-          <a:bodyPr wrap="square" lIns="0" tIns="0" rIns="0" bIns="0" rtlCol="0" anchor="ctr"/>
-          <a:lstStyle/>
-          <a:p>
-            <a:pPr indent="0" marL="0">
-              <a:buNone/>
-            </a:pPr>
-            <a:r>
-              <a:rPr lang="en-US" sz="1100" i="1" dirty="0">
-                <a:solidFill>
-                  <a:srgbClr val="6B7280"/>
-                </a:solidFill>
-                <a:latin typeface="Calibri" pitchFamily="34" charset="0"/>
-                <a:ea typeface="Calibri" pitchFamily="34" charset="-122"/>
-                <a:cs typeface="Calibri" pitchFamily="34" charset="-120"/>
-              </a:rPr>
-              <a:t>you own the container</a:t>
-            </a:r>
-            <a:endParaRPr lang="en-US" sz="1100" dirty="0"/>
-          </a:p>
-        </p:txBody>
-      </p:sp>
-      <p:sp>
-        <p:nvSpPr>
-          <p:cNvPr id="18" name="Shape 16"/>
-          <p:cNvSpPr/>
-          <p:nvPr/>
-        </p:nvSpPr>
-        <p:spPr>
-          <a:xfrm>
-            <a:off x="4937760" y="3337560"/>
-            <a:ext cx="3840480" cy="640080"/>
-          </a:xfrm>
-          <a:prstGeom prst="rect">
-            <a:avLst/>
-          </a:prstGeom>
-          <a:solidFill>
-            <a:srgbClr val="F3F4F6"/>
-          </a:solidFill>
-          <a:ln w="6350">
-            <a:solidFill>
-              <a:srgbClr val="D1D5DB"/>
-            </a:solidFill>
-            <a:prstDash val="solid"/>
-          </a:ln>
-        </p:spPr>
-      </p:sp>
-      <p:sp>
-        <p:nvSpPr>
-          <p:cNvPr id="19" name="Text 17"/>
-          <p:cNvSpPr/>
-          <p:nvPr/>
-        </p:nvSpPr>
-        <p:spPr>
-          <a:xfrm>
-            <a:off x="5074920" y="3392424"/>
-            <a:ext cx="3566160" cy="274320"/>
-          </a:xfrm>
-          <a:prstGeom prst="rect">
-            <a:avLst/>
-          </a:prstGeom>
-          <a:noFill/>
-          <a:ln/>
-        </p:spPr>
-        <p:txBody>
-          <a:bodyPr wrap="square" lIns="0" tIns="0" rIns="0" bIns="0" rtlCol="0" anchor="ctr"/>
-          <a:lstStyle/>
-          <a:p>
-            <a:pPr indent="0" marL="0">
-              <a:buNone/>
-            </a:pPr>
-            <a:r>
-              <a:rPr lang="en-US" sz="1300" b="1" dirty="0">
-                <a:solidFill>
-                  <a:srgbClr val="1E2761"/>
-                </a:solidFill>
-                <a:latin typeface="Calibri" pitchFamily="34" charset="0"/>
-                <a:ea typeface="Calibri" pitchFamily="34" charset="-122"/>
-                <a:cs typeface="Calibri" pitchFamily="34" charset="-120"/>
-              </a:rPr>
-              <a:t>Azure Functions</a:t>
-            </a:r>
-            <a:endParaRPr lang="en-US" sz="1300" dirty="0"/>
-          </a:p>
-        </p:txBody>
-      </p:sp>
-      <p:sp>
-        <p:nvSpPr>
-          <p:cNvPr id="20" name="Text 18"/>
-          <p:cNvSpPr/>
-          <p:nvPr/>
-        </p:nvSpPr>
-        <p:spPr>
-          <a:xfrm>
-            <a:off x="5074920" y="3657600"/>
-            <a:ext cx="3566160" cy="274320"/>
-          </a:xfrm>
-          <a:prstGeom prst="rect">
-            <a:avLst/>
-          </a:prstGeom>
-          <a:noFill/>
-          <a:ln/>
-        </p:spPr>
-        <p:txBody>
-          <a:bodyPr wrap="square" lIns="0" tIns="0" rIns="0" bIns="0" rtlCol="0" anchor="ctr"/>
-          <a:lstStyle/>
-          <a:p>
-            <a:pPr indent="0" marL="0">
-              <a:buNone/>
-            </a:pPr>
-            <a:r>
-              <a:rPr lang="en-US" sz="1100" i="1" dirty="0">
-                <a:solidFill>
-                  <a:srgbClr val="6B7280"/>
-                </a:solidFill>
-                <a:latin typeface="Calibri" pitchFamily="34" charset="0"/>
-                <a:ea typeface="Calibri" pitchFamily="34" charset="-122"/>
-                <a:cs typeface="Calibri" pitchFamily="34" charset="-120"/>
-              </a:rPr>
-              <a:t>event-driven or HTTP triggers</a:t>
-            </a:r>
-            <a:endParaRPr lang="en-US" sz="1100" dirty="0"/>
-          </a:p>
-        </p:txBody>
-      </p:sp>
-      <p:sp>
-        <p:nvSpPr>
-          <p:cNvPr id="21" name="Shape 19"/>
-          <p:cNvSpPr/>
-          <p:nvPr/>
-        </p:nvSpPr>
-        <p:spPr>
-          <a:xfrm>
-            <a:off x="365760" y="4206240"/>
-            <a:ext cx="8412480" cy="548640"/>
-          </a:xfrm>
-          <a:prstGeom prst="rect">
-            <a:avLst/>
-          </a:prstGeom>
-          <a:solidFill>
-            <a:srgbClr val="CADCFC"/>
-          </a:solidFill>
-          <a:ln/>
-        </p:spPr>
-      </p:sp>
-      <p:sp>
-        <p:nvSpPr>
-          <p:cNvPr id="22" name="Text 20"/>
-          <p:cNvSpPr/>
-          <p:nvPr/>
-        </p:nvSpPr>
-        <p:spPr>
-          <a:xfrm>
-            <a:off x="502920" y="4251960"/>
-            <a:ext cx="8138160" cy="457200"/>
-          </a:xfrm>
-          <a:prstGeom prst="rect">
-            <a:avLst/>
-          </a:prstGeom>
-          <a:noFill/>
-          <a:ln/>
-        </p:spPr>
-        <p:txBody>
-          <a:bodyPr wrap="square" lIns="0" tIns="0" rIns="0" bIns="0" rtlCol="0" anchor="ctr"/>
-          <a:lstStyle/>
-          <a:p>
-            <a:pPr indent="0" marL="0">
-              <a:buNone/>
-            </a:pPr>
-            <a:r>
-              <a:rPr lang="en-US" sz="1200" b="1" dirty="0">
-                <a:solidFill>
-                  <a:srgbClr val="1E2761"/>
-                </a:solidFill>
-                <a:latin typeface="Calibri" pitchFamily="34" charset="0"/>
-                <a:ea typeface="Calibri" pitchFamily="34" charset="-122"/>
-                <a:cs typeface="Calibri" pitchFamily="34" charset="-120"/>
-              </a:rPr>
-              <a:t>Prototype and evaluate locally first — then pick a hosting destination. </a:t>
-            </a:r>
-            <a:pPr indent="0" marL="0">
-              <a:buNone/>
-            </a:pPr>
-            <a:r>
-              <a:rPr lang="en-US" sz="1200" dirty="0">
-                <a:solidFill>
-                  <a:srgbClr val="1E2761"/>
-                </a:solidFill>
-                <a:latin typeface="Calibri" pitchFamily="34" charset="0"/>
-                <a:ea typeface="Calibri" pitchFamily="34" charset="-122"/>
-                <a:cs typeface="Calibri" pitchFamily="34" charset="-120"/>
-              </a:rPr>
-              <a:t>Foundry-specific features (PromptAgent versioning, IQ, portal connections) remain hosted-only.</a:t>
-            </a:r>
-            <a:endParaRPr lang="en-US" sz="1200" dirty="0"/>
           </a:p>
         </p:txBody>
       </p:sp>
@@ -2957,7 +2459,7 @@
                 <a:ea typeface="Calibri" pitchFamily="34" charset="-122"/>
                 <a:cs typeface="Calibri" pitchFamily="34" charset="-120"/>
               </a:rPr>
-              <a:t>What you'll do in the lab</a:t>
+              <a:t>Same MAF code, different destinations</a:t>
             </a:r>
             <a:endParaRPr lang="en-US" sz="2800" dirty="0"/>
           </a:p>
@@ -2972,7 +2474,7 @@
         <p:spPr>
           <a:xfrm>
             <a:off x="365760" y="1097280"/>
-            <a:ext cx="8412480" cy="3749040"/>
+            <a:ext cx="8412480" cy="457200"/>
           </a:xfrm>
           <a:prstGeom prst="rect">
             <a:avLst/>
@@ -2981,18 +2483,121 @@
           <a:ln/>
         </p:spPr>
         <p:txBody>
-          <a:bodyPr wrap="square" rtlCol="0" anchor="ctr"/>
+          <a:bodyPr wrap="square" lIns="0" tIns="0" rIns="0" bIns="0" rtlCol="0" anchor="ctr"/>
+          <a:lstStyle/>
+          <a:p>
+            <a:pPr indent="0" marL="0">
+              <a:buNone/>
+            </a:pPr>
+            <a:r>
+              <a:rPr lang="en-US" sz="1400" i="1" dirty="0">
+                <a:solidFill>
+                  <a:srgbClr val="6B7280"/>
+                </a:solidFill>
+                <a:latin typeface="Calibri" pitchFamily="34" charset="0"/>
+                <a:ea typeface="Calibri" pitchFamily="34" charset="-122"/>
+                <a:cs typeface="Calibri" pitchFamily="34" charset="-120"/>
+              </a:rPr>
+              <a:t>Path B code can be repackaged as a Path C Hosted agent later. The MAF code you write does not change.</a:t>
+            </a:r>
+            <a:endParaRPr lang="en-US" sz="1400" dirty="0"/>
+          </a:p>
+        </p:txBody>
+      </p:sp>
+      <p:sp>
+        <p:nvSpPr>
+          <p:cNvPr id="6" name="Shape 4"/>
+          <p:cNvSpPr/>
+          <p:nvPr/>
+        </p:nvSpPr>
+        <p:spPr>
+          <a:xfrm>
+            <a:off x="365760" y="1737360"/>
+            <a:ext cx="2743200" cy="2286000"/>
+          </a:xfrm>
+          <a:prstGeom prst="rect">
+            <a:avLst/>
+          </a:prstGeom>
+          <a:solidFill>
+            <a:srgbClr val="FFFFFF"/>
+          </a:solidFill>
+          <a:ln w="12700">
+            <a:solidFill>
+              <a:srgbClr val="1E2761"/>
+            </a:solidFill>
+            <a:prstDash val="solid"/>
+          </a:ln>
+        </p:spPr>
+      </p:sp>
+      <p:sp>
+        <p:nvSpPr>
+          <p:cNvPr id="7" name="Text 5"/>
+          <p:cNvSpPr/>
+          <p:nvPr/>
+        </p:nvSpPr>
+        <p:spPr>
+          <a:xfrm>
+            <a:off x="502920" y="1874520"/>
+            <a:ext cx="2468880" cy="365760"/>
+          </a:xfrm>
+          <a:prstGeom prst="rect">
+            <a:avLst/>
+          </a:prstGeom>
+          <a:noFill/>
+          <a:ln/>
+        </p:spPr>
+        <p:txBody>
+          <a:bodyPr wrap="square" lIns="0" tIns="0" rIns="0" bIns="0" rtlCol="0" anchor="ctr"/>
+          <a:lstStyle/>
+          <a:p>
+            <a:pPr algn="ctr" indent="0" marL="0">
+              <a:buNone/>
+            </a:pPr>
+            <a:r>
+              <a:rPr lang="en-US" sz="1500" b="1" dirty="0">
+                <a:solidFill>
+                  <a:srgbClr val="1E2761"/>
+                </a:solidFill>
+                <a:latin typeface="Calibri" pitchFamily="34" charset="0"/>
+                <a:ea typeface="Calibri" pitchFamily="34" charset="-122"/>
+                <a:cs typeface="Calibri" pitchFamily="34" charset="-120"/>
+              </a:rPr>
+              <a:t>Local dev on your laptop</a:t>
+            </a:r>
+            <a:endParaRPr lang="en-US" sz="1500" dirty="0"/>
+          </a:p>
+        </p:txBody>
+      </p:sp>
+      <p:sp>
+        <p:nvSpPr>
+          <p:cNvPr id="8" name="Text 6"/>
+          <p:cNvSpPr/>
+          <p:nvPr/>
+        </p:nvSpPr>
+        <p:spPr>
+          <a:xfrm>
+            <a:off x="548640" y="2377440"/>
+            <a:ext cx="2423160" cy="1508760"/>
+          </a:xfrm>
+          <a:prstGeom prst="rect">
+            <a:avLst/>
+          </a:prstGeom>
+          <a:noFill/>
+          <a:ln/>
+        </p:spPr>
+        <p:txBody>
+          <a:bodyPr wrap="square" rtlCol="0" anchor="t"/>
           <a:lstStyle/>
           <a:p>
             <a:pPr marL="342900" indent="-342900">
               <a:spcAft>
-                <a:spcPts val="600"/>
+                <a:spcPts val="400"/>
               </a:spcAft>
               <a:buSzPct val="100000"/>
               <a:buChar char="•"/>
             </a:pPr>
             <a:r>
-              <a:rPr lang="en-US" sz="1500" dirty="0">
+              <a:rPr lang="en-US" sz="1200" dirty="0">
                 <a:solidFill>
                   <a:srgbClr val="212121"/>
                 </a:solidFill>
@@ -3000,20 +2605,20 @@
                 <a:ea typeface="Calibri" pitchFamily="34" charset="-122"/>
                 <a:cs typeface="Calibri" pitchFamily="34" charset="-120"/>
               </a:rPr>
-              <a:t>Part A — build a client-side agent in your code</a:t>
-            </a:r>
-            <a:endParaRPr lang="en-US" sz="1500" dirty="0"/>
+              <a:t>uv run from a terminal</a:t>
+            </a:r>
+            <a:endParaRPr lang="en-US" sz="1200" dirty="0"/>
           </a:p>
           <a:p>
             <a:pPr marL="342900" indent="-342900">
               <a:spcAft>
-                <a:spcPts val="600"/>
+                <a:spcPts val="400"/>
               </a:spcAft>
               <a:buSzPct val="100000"/>
               <a:buChar char="•"/>
             </a:pPr>
             <a:r>
-              <a:rPr lang="en-US" sz="1500" dirty="0">
+              <a:rPr lang="en-US" sz="1200" dirty="0">
                 <a:solidFill>
                   <a:srgbClr val="212121"/>
                 </a:solidFill>
@@ -3021,20 +2626,20 @@
                 <a:ea typeface="Calibri" pitchFamily="34" charset="-122"/>
                 <a:cs typeface="Calibri" pitchFamily="34" charset="-120"/>
               </a:rPr>
-              <a:t>Part B — connect to a Foundry PromptAgent you create in the portal</a:t>
-            </a:r>
-            <a:endParaRPr lang="en-US" sz="1500" dirty="0"/>
+              <a:t>F5 in VS Code</a:t>
+            </a:r>
+            <a:endParaRPr lang="en-US" sz="1200" dirty="0"/>
           </a:p>
           <a:p>
             <a:pPr marL="342900" indent="-342900">
               <a:spcAft>
-                <a:spcPts val="600"/>
+                <a:spcPts val="400"/>
               </a:spcAft>
               <a:buSzPct val="100000"/>
               <a:buChar char="•"/>
             </a:pPr>
             <a:r>
-              <a:rPr lang="en-US" sz="1500" dirty="0">
+              <a:rPr lang="en-US" sz="1200" dirty="0">
                 <a:solidFill>
                   <a:srgbClr val="212121"/>
                 </a:solidFill>
@@ -3042,20 +2647,20 @@
                 <a:ea typeface="Calibri" pitchFamily="34" charset="-122"/>
                 <a:cs typeface="Calibri" pitchFamily="34" charset="-120"/>
               </a:rPr>
-              <a:t>Part C (bonus) — connect to a Foundry HostedAgent</a:t>
-            </a:r>
-            <a:endParaRPr lang="en-US" sz="1500" dirty="0"/>
+              <a:t>Fast iteration</a:t>
+            </a:r>
+            <a:endParaRPr lang="en-US" sz="1200" dirty="0"/>
           </a:p>
           <a:p>
             <a:pPr marL="342900" indent="-342900">
               <a:spcAft>
-                <a:spcPts val="600"/>
+                <a:spcPts val="400"/>
               </a:spcAft>
               <a:buSzPct val="100000"/>
               <a:buChar char="•"/>
             </a:pPr>
             <a:r>
-              <a:rPr lang="en-US" sz="1500" dirty="0">
+              <a:rPr lang="en-US" sz="1200" dirty="0">
                 <a:solidFill>
                   <a:srgbClr val="212121"/>
                 </a:solidFill>
@@ -3063,22 +2668,46 @@
                 <a:ea typeface="Calibri" pitchFamily="34" charset="-122"/>
                 <a:cs typeface="Calibri" pitchFamily="34" charset="-120"/>
               </a:rPr>
-              <a:t>Compare responses, thread persistence, and where each configuration lives</a:t>
-            </a:r>
-            <a:endParaRPr lang="en-US" sz="1500" dirty="0"/>
-          </a:p>
-        </p:txBody>
-      </p:sp>
-      <p:sp>
-        <p:nvSpPr>
-          <p:cNvPr id="6" name="Text 4"/>
-          <p:cNvSpPr/>
-          <p:nvPr/>
-        </p:nvSpPr>
-        <p:spPr>
-          <a:xfrm>
-            <a:off x="365760" y="4160520"/>
-            <a:ext cx="8412480" cy="365760"/>
+              <a:t>No cloud round-trip for logic</a:t>
+            </a:r>
+            <a:endParaRPr lang="en-US" sz="1200" dirty="0"/>
+          </a:p>
+        </p:txBody>
+      </p:sp>
+      <p:sp>
+        <p:nvSpPr>
+          <p:cNvPr id="9" name="Shape 7"/>
+          <p:cNvSpPr/>
+          <p:nvPr/>
+        </p:nvSpPr>
+        <p:spPr>
+          <a:xfrm>
+            <a:off x="3246120" y="2880360"/>
+            <a:ext cx="1280160" cy="0"/>
+          </a:xfrm>
+          <a:prstGeom prst="line">
+            <a:avLst/>
+          </a:prstGeom>
+          <a:noFill/>
+          <a:ln w="38100">
+            <a:solidFill>
+              <a:srgbClr val="1E2761"/>
+            </a:solidFill>
+            <a:prstDash val="solid"/>
+            <a:tailEnd type="triangle"/>
+          </a:ln>
+        </p:spPr>
+      </p:sp>
+      <p:sp>
+        <p:nvSpPr>
+          <p:cNvPr id="10" name="Text 8"/>
+          <p:cNvSpPr/>
+          <p:nvPr/>
+        </p:nvSpPr>
+        <p:spPr>
+          <a:xfrm>
+            <a:off x="3200400" y="2514600"/>
+            <a:ext cx="1371600" cy="274320"/>
           </a:xfrm>
           <a:prstGeom prst="rect">
             <a:avLst/>
@@ -3087,14 +2716,117 @@
           <a:ln/>
         </p:spPr>
         <p:txBody>
-          <a:bodyPr wrap="square" rtlCol="0" anchor="ctr"/>
+          <a:bodyPr wrap="square" lIns="0" tIns="0" rIns="0" bIns="0" rtlCol="0" anchor="ctr"/>
+          <a:lstStyle/>
+          <a:p>
+            <a:pPr algn="ctr" indent="0" marL="0">
+              <a:buNone/>
+            </a:pPr>
+            <a:r>
+              <a:rPr lang="en-US" sz="1100" b="1" i="1" dirty="0">
+                <a:solidFill>
+                  <a:srgbClr val="1E2761"/>
+                </a:solidFill>
+                <a:latin typeface="Calibri" pitchFamily="34" charset="0"/>
+                <a:ea typeface="Calibri" pitchFamily="34" charset="-122"/>
+                <a:cs typeface="Calibri" pitchFamily="34" charset="-120"/>
+              </a:rPr>
+              <a:t>Same MAF code</a:t>
+            </a:r>
+            <a:endParaRPr lang="en-US" sz="1100" dirty="0"/>
+          </a:p>
+        </p:txBody>
+      </p:sp>
+      <p:sp>
+        <p:nvSpPr>
+          <p:cNvPr id="11" name="Text 9"/>
+          <p:cNvSpPr/>
+          <p:nvPr/>
+        </p:nvSpPr>
+        <p:spPr>
+          <a:xfrm>
+            <a:off x="3200400" y="2971800"/>
+            <a:ext cx="1371600" cy="274320"/>
+          </a:xfrm>
+          <a:prstGeom prst="rect">
+            <a:avLst/>
+          </a:prstGeom>
+          <a:noFill/>
+          <a:ln/>
+        </p:spPr>
+        <p:txBody>
+          <a:bodyPr wrap="square" lIns="0" tIns="0" rIns="0" bIns="0" rtlCol="0" anchor="ctr"/>
+          <a:lstStyle/>
+          <a:p>
+            <a:pPr algn="ctr" indent="0" marL="0">
+              <a:buNone/>
+            </a:pPr>
+            <a:r>
+              <a:rPr lang="en-US" sz="1000" i="1" dirty="0">
+                <a:solidFill>
+                  <a:srgbClr val="6B7280"/>
+                </a:solidFill>
+                <a:latin typeface="Calibri" pitchFamily="34" charset="0"/>
+                <a:ea typeface="Calibri" pitchFamily="34" charset="-122"/>
+                <a:cs typeface="Calibri" pitchFamily="34" charset="-120"/>
+              </a:rPr>
+              <a:t>no rewrite</a:t>
+            </a:r>
+            <a:endParaRPr lang="en-US" sz="1000" dirty="0"/>
+          </a:p>
+        </p:txBody>
+      </p:sp>
+      <p:sp>
+        <p:nvSpPr>
+          <p:cNvPr id="12" name="Shape 10"/>
+          <p:cNvSpPr/>
+          <p:nvPr/>
+        </p:nvSpPr>
+        <p:spPr>
+          <a:xfrm>
+            <a:off x="4937760" y="1737360"/>
+            <a:ext cx="3840480" cy="658368"/>
+          </a:xfrm>
+          <a:prstGeom prst="rect">
+            <a:avLst/>
+          </a:prstGeom>
+          <a:solidFill>
+            <a:srgbClr val="F3F4F6"/>
+          </a:solidFill>
+          <a:ln w="6350">
+            <a:solidFill>
+              <a:srgbClr val="D1D5DB"/>
+            </a:solidFill>
+            <a:prstDash val="solid"/>
+          </a:ln>
+        </p:spPr>
+      </p:sp>
+      <p:sp>
+        <p:nvSpPr>
+          <p:cNvPr id="13" name="Text 11"/>
+          <p:cNvSpPr/>
+          <p:nvPr/>
+        </p:nvSpPr>
+        <p:spPr>
+          <a:xfrm>
+            <a:off x="5074920" y="1810512"/>
+            <a:ext cx="3566160" cy="274320"/>
+          </a:xfrm>
+          <a:prstGeom prst="rect">
+            <a:avLst/>
+          </a:prstGeom>
+          <a:noFill/>
+          <a:ln/>
+        </p:spPr>
+        <p:txBody>
+          <a:bodyPr wrap="square" lIns="0" tIns="0" rIns="0" bIns="0" rtlCol="0" anchor="ctr"/>
           <a:lstStyle/>
           <a:p>
             <a:pPr indent="0" marL="0">
               <a:buNone/>
             </a:pPr>
             <a:r>
-              <a:rPr lang="en-US" sz="1500" b="1" i="1" dirty="0">
+              <a:rPr lang="en-US" sz="1200" b="1" dirty="0">
                 <a:solidFill>
                   <a:srgbClr val="1E2761"/>
                 </a:solidFill>
@@ -3102,9 +2834,327 @@
                 <a:ea typeface="Calibri" pitchFamily="34" charset="-122"/>
                 <a:cs typeface="Calibri" pitchFamily="34" charset="-120"/>
               </a:rPr>
-              <a:t>Same model, three hosting styles. You'll feel the trade-offs.</a:t>
-            </a:r>
-            <a:endParaRPr lang="en-US" sz="1500" dirty="0"/>
+              <a:t>Foundry Agent Service (Path C)</a:t>
+            </a:r>
+            <a:endParaRPr lang="en-US" sz="1200" dirty="0"/>
+          </a:p>
+        </p:txBody>
+      </p:sp>
+      <p:sp>
+        <p:nvSpPr>
+          <p:cNvPr id="14" name="Text 12"/>
+          <p:cNvSpPr/>
+          <p:nvPr/>
+        </p:nvSpPr>
+        <p:spPr>
+          <a:xfrm>
+            <a:off x="5074920" y="2084832"/>
+            <a:ext cx="3566160" cy="274320"/>
+          </a:xfrm>
+          <a:prstGeom prst="rect">
+            <a:avLst/>
+          </a:prstGeom>
+          <a:noFill/>
+          <a:ln/>
+        </p:spPr>
+        <p:txBody>
+          <a:bodyPr wrap="square" lIns="0" tIns="0" rIns="0" bIns="0" rtlCol="0" anchor="ctr"/>
+          <a:lstStyle/>
+          <a:p>
+            <a:pPr indent="0" marL="0">
+              <a:buNone/>
+            </a:pPr>
+            <a:r>
+              <a:rPr lang="en-US" sz="1000" i="1" dirty="0">
+                <a:solidFill>
+                  <a:srgbClr val="6B7280"/>
+                </a:solidFill>
+                <a:latin typeface="Calibri" pitchFamily="34" charset="0"/>
+                <a:ea typeface="Calibri" pitchFamily="34" charset="-122"/>
+                <a:cs typeface="Calibri" pitchFamily="34" charset="-120"/>
+              </a:rPr>
+              <a:t>zip → portal → managed Hosted agent</a:t>
+            </a:r>
+            <a:endParaRPr lang="en-US" sz="1000" dirty="0"/>
+          </a:p>
+        </p:txBody>
+      </p:sp>
+      <p:sp>
+        <p:nvSpPr>
+          <p:cNvPr id="15" name="Shape 13"/>
+          <p:cNvSpPr/>
+          <p:nvPr/>
+        </p:nvSpPr>
+        <p:spPr>
+          <a:xfrm>
+            <a:off x="4937760" y="2505456"/>
+            <a:ext cx="3840480" cy="658368"/>
+          </a:xfrm>
+          <a:prstGeom prst="rect">
+            <a:avLst/>
+          </a:prstGeom>
+          <a:solidFill>
+            <a:srgbClr val="F3F4F6"/>
+          </a:solidFill>
+          <a:ln w="6350">
+            <a:solidFill>
+              <a:srgbClr val="D1D5DB"/>
+            </a:solidFill>
+            <a:prstDash val="solid"/>
+          </a:ln>
+        </p:spPr>
+      </p:sp>
+      <p:sp>
+        <p:nvSpPr>
+          <p:cNvPr id="16" name="Text 14"/>
+          <p:cNvSpPr/>
+          <p:nvPr/>
+        </p:nvSpPr>
+        <p:spPr>
+          <a:xfrm>
+            <a:off x="5074920" y="2578608"/>
+            <a:ext cx="3566160" cy="274320"/>
+          </a:xfrm>
+          <a:prstGeom prst="rect">
+            <a:avLst/>
+          </a:prstGeom>
+          <a:noFill/>
+          <a:ln/>
+        </p:spPr>
+        <p:txBody>
+          <a:bodyPr wrap="square" lIns="0" tIns="0" rIns="0" bIns="0" rtlCol="0" anchor="ctr"/>
+          <a:lstStyle/>
+          <a:p>
+            <a:pPr indent="0" marL="0">
+              <a:buNone/>
+            </a:pPr>
+            <a:r>
+              <a:rPr lang="en-US" sz="1200" b="1" dirty="0">
+                <a:solidFill>
+                  <a:srgbClr val="1E2761"/>
+                </a:solidFill>
+                <a:latin typeface="Calibri" pitchFamily="34" charset="0"/>
+                <a:ea typeface="Calibri" pitchFamily="34" charset="-122"/>
+                <a:cs typeface="Calibri" pitchFamily="34" charset="-120"/>
+              </a:rPr>
+              <a:t>Azure Container Apps or AKS</a:t>
+            </a:r>
+            <a:endParaRPr lang="en-US" sz="1200" dirty="0"/>
+          </a:p>
+        </p:txBody>
+      </p:sp>
+      <p:sp>
+        <p:nvSpPr>
+          <p:cNvPr id="17" name="Text 15"/>
+          <p:cNvSpPr/>
+          <p:nvPr/>
+        </p:nvSpPr>
+        <p:spPr>
+          <a:xfrm>
+            <a:off x="5074920" y="2852928"/>
+            <a:ext cx="3566160" cy="274320"/>
+          </a:xfrm>
+          <a:prstGeom prst="rect">
+            <a:avLst/>
+          </a:prstGeom>
+          <a:noFill/>
+          <a:ln/>
+        </p:spPr>
+        <p:txBody>
+          <a:bodyPr wrap="square" lIns="0" tIns="0" rIns="0" bIns="0" rtlCol="0" anchor="ctr"/>
+          <a:lstStyle/>
+          <a:p>
+            <a:pPr indent="0" marL="0">
+              <a:buNone/>
+            </a:pPr>
+            <a:r>
+              <a:rPr lang="en-US" sz="1000" i="1" dirty="0">
+                <a:solidFill>
+                  <a:srgbClr val="6B7280"/>
+                </a:solidFill>
+                <a:latin typeface="Calibri" pitchFamily="34" charset="0"/>
+                <a:ea typeface="Calibri" pitchFamily="34" charset="-122"/>
+                <a:cs typeface="Calibri" pitchFamily="34" charset="-120"/>
+              </a:rPr>
+              <a:t>Path B — you own the container</a:t>
+            </a:r>
+            <a:endParaRPr lang="en-US" sz="1000" dirty="0"/>
+          </a:p>
+        </p:txBody>
+      </p:sp>
+      <p:sp>
+        <p:nvSpPr>
+          <p:cNvPr id="18" name="Shape 16"/>
+          <p:cNvSpPr/>
+          <p:nvPr/>
+        </p:nvSpPr>
+        <p:spPr>
+          <a:xfrm>
+            <a:off x="4937760" y="3273552"/>
+            <a:ext cx="3840480" cy="658368"/>
+          </a:xfrm>
+          <a:prstGeom prst="rect">
+            <a:avLst/>
+          </a:prstGeom>
+          <a:solidFill>
+            <a:srgbClr val="F3F4F6"/>
+          </a:solidFill>
+          <a:ln w="6350">
+            <a:solidFill>
+              <a:srgbClr val="D1D5DB"/>
+            </a:solidFill>
+            <a:prstDash val="solid"/>
+          </a:ln>
+        </p:spPr>
+      </p:sp>
+      <p:sp>
+        <p:nvSpPr>
+          <p:cNvPr id="19" name="Text 17"/>
+          <p:cNvSpPr/>
+          <p:nvPr/>
+        </p:nvSpPr>
+        <p:spPr>
+          <a:xfrm>
+            <a:off x="5074920" y="3346704"/>
+            <a:ext cx="3566160" cy="274320"/>
+          </a:xfrm>
+          <a:prstGeom prst="rect">
+            <a:avLst/>
+          </a:prstGeom>
+          <a:noFill/>
+          <a:ln/>
+        </p:spPr>
+        <p:txBody>
+          <a:bodyPr wrap="square" lIns="0" tIns="0" rIns="0" bIns="0" rtlCol="0" anchor="ctr"/>
+          <a:lstStyle/>
+          <a:p>
+            <a:pPr indent="0" marL="0">
+              <a:buNone/>
+            </a:pPr>
+            <a:r>
+              <a:rPr lang="en-US" sz="1200" b="1" dirty="0">
+                <a:solidFill>
+                  <a:srgbClr val="1E2761"/>
+                </a:solidFill>
+                <a:latin typeface="Calibri" pitchFamily="34" charset="0"/>
+                <a:ea typeface="Calibri" pitchFamily="34" charset="-122"/>
+                <a:cs typeface="Calibri" pitchFamily="34" charset="-120"/>
+              </a:rPr>
+              <a:t>App Service or Azure Functions</a:t>
+            </a:r>
+            <a:endParaRPr lang="en-US" sz="1200" dirty="0"/>
+          </a:p>
+        </p:txBody>
+      </p:sp>
+      <p:sp>
+        <p:nvSpPr>
+          <p:cNvPr id="20" name="Text 18"/>
+          <p:cNvSpPr/>
+          <p:nvPr/>
+        </p:nvSpPr>
+        <p:spPr>
+          <a:xfrm>
+            <a:off x="5074920" y="3621024"/>
+            <a:ext cx="3566160" cy="274320"/>
+          </a:xfrm>
+          <a:prstGeom prst="rect">
+            <a:avLst/>
+          </a:prstGeom>
+          <a:noFill/>
+          <a:ln/>
+        </p:spPr>
+        <p:txBody>
+          <a:bodyPr wrap="square" lIns="0" tIns="0" rIns="0" bIns="0" rtlCol="0" anchor="ctr"/>
+          <a:lstStyle/>
+          <a:p>
+            <a:pPr indent="0" marL="0">
+              <a:buNone/>
+            </a:pPr>
+            <a:r>
+              <a:rPr lang="en-US" sz="1000" i="1" dirty="0">
+                <a:solidFill>
+                  <a:srgbClr val="6B7280"/>
+                </a:solidFill>
+                <a:latin typeface="Calibri" pitchFamily="34" charset="0"/>
+                <a:ea typeface="Calibri" pitchFamily="34" charset="-122"/>
+                <a:cs typeface="Calibri" pitchFamily="34" charset="-120"/>
+              </a:rPr>
+              <a:t>Path B — event-driven or HTTP triggers</a:t>
+            </a:r>
+            <a:endParaRPr lang="en-US" sz="1000" dirty="0"/>
+          </a:p>
+        </p:txBody>
+      </p:sp>
+      <p:sp>
+        <p:nvSpPr>
+          <p:cNvPr id="21" name="Shape 19"/>
+          <p:cNvSpPr/>
+          <p:nvPr/>
+        </p:nvSpPr>
+        <p:spPr>
+          <a:xfrm>
+            <a:off x="365760" y="4160520"/>
+            <a:ext cx="8412480" cy="457200"/>
+          </a:xfrm>
+          <a:prstGeom prst="rect">
+            <a:avLst/>
+          </a:prstGeom>
+          <a:solidFill>
+            <a:srgbClr val="CADCFC"/>
+          </a:solidFill>
+          <a:ln/>
+        </p:spPr>
+      </p:sp>
+      <p:sp>
+        <p:nvSpPr>
+          <p:cNvPr id="22" name="Text 20"/>
+          <p:cNvSpPr/>
+          <p:nvPr/>
+        </p:nvSpPr>
+        <p:spPr>
+          <a:xfrm>
+            <a:off x="502920" y="4206240"/>
+            <a:ext cx="8138160" cy="365760"/>
+          </a:xfrm>
+          <a:prstGeom prst="rect">
+            <a:avLst/>
+          </a:prstGeom>
+          <a:noFill/>
+          <a:ln/>
+        </p:spPr>
+        <p:txBody>
+          <a:bodyPr wrap="square" lIns="0" tIns="0" rIns="0" bIns="0" rtlCol="0" anchor="ctr"/>
+          <a:lstStyle/>
+          <a:p>
+            <a:pPr indent="0" marL="0">
+              <a:buNone/>
+            </a:pPr>
+            <a:r>
+              <a:rPr lang="en-US" sz="1100" b="1" dirty="0">
+                <a:solidFill>
+                  <a:srgbClr val="1E2761"/>
+                </a:solidFill>
+                <a:latin typeface="Calibri" pitchFamily="34" charset="0"/>
+                <a:ea typeface="Calibri" pitchFamily="34" charset="-122"/>
+                <a:cs typeface="Calibri" pitchFamily="34" charset="-120"/>
+              </a:rPr>
+              <a:t>Prototype locally in Path B. Decide destination later. </a:t>
+            </a:r>
+            <a:pPr indent="0" marL="0">
+              <a:buNone/>
+            </a:pPr>
+            <a:r>
+              <a:rPr lang="en-US" sz="1100" dirty="0">
+                <a:solidFill>
+                  <a:srgbClr val="1E2761"/>
+                </a:solidFill>
+                <a:latin typeface="Calibri" pitchFamily="34" charset="0"/>
+                <a:ea typeface="Calibri" pitchFamily="34" charset="-122"/>
+                <a:cs typeface="Calibri" pitchFamily="34" charset="-120"/>
+              </a:rPr>
+              <a:t>Foundry-specific features (Toolbox skills, IQ, agent identity) become available on Path A or Path C.</a:t>
+            </a:r>
+            <a:endParaRPr lang="en-US" sz="1100" dirty="0"/>
           </a:p>
         </p:txBody>
       </p:sp>
@@ -3232,7 +3282,7 @@
                 <a:ea typeface="Calibri" pitchFamily="34" charset="-122"/>
                 <a:cs typeface="Calibri" pitchFamily="34" charset="-120"/>
               </a:rPr>
-              <a:t>Takeaways</a:t>
+              <a:t>What you'll do in the lab</a:t>
             </a:r>
             <a:endParaRPr lang="en-US" sz="2800" dirty="0"/>
           </a:p>
@@ -3247,7 +3297,7 @@
         <p:spPr>
           <a:xfrm>
             <a:off x="365760" y="1097280"/>
-            <a:ext cx="8412480" cy="3108960"/>
+            <a:ext cx="8412480" cy="3749040"/>
           </a:xfrm>
           <a:prstGeom prst="rect">
             <a:avLst/>
@@ -3267,7 +3317,7 @@
               <a:buChar char="•"/>
             </a:pPr>
             <a:r>
-              <a:rPr lang="en-US" sz="1500" dirty="0">
+              <a:rPr lang="en-US" sz="1400" dirty="0">
                 <a:solidFill>
                   <a:srgbClr val="212121"/>
                 </a:solidFill>
@@ -3275,9 +3325,9 @@
                 <a:ea typeface="Calibri" pitchFamily="34" charset="-122"/>
                 <a:cs typeface="Calibri" pitchFamily="34" charset="-120"/>
               </a:rPr>
-              <a:t>Client-side agents live in your process; Foundry-hosted agents live in Foundry.</a:t>
-            </a:r>
-            <a:endParaRPr lang="en-US" sz="1500" dirty="0"/>
+              <a:t>Part A — Prompt agent: create in the Foundry portal, connect from your MAF app</a:t>
+            </a:r>
+            <a:endParaRPr lang="en-US" sz="1400" dirty="0"/>
           </a:p>
           <a:p>
             <a:pPr marL="342900" indent="-342900">
@@ -3288,7 +3338,7 @@
               <a:buChar char="•"/>
             </a:pPr>
             <a:r>
-              <a:rPr lang="en-US" sz="1500" dirty="0">
+              <a:rPr lang="en-US" sz="1400" dirty="0">
                 <a:solidFill>
                   <a:srgbClr val="212121"/>
                 </a:solidFill>
@@ -3296,9 +3346,9 @@
                 <a:ea typeface="Calibri" pitchFamily="34" charset="-122"/>
                 <a:cs typeface="Calibri" pitchFamily="34" charset="-120"/>
               </a:rPr>
-              <a:t>Foundry-hosted has two flavors: PromptAgent (versioned) and HostedAgent (non-versioned).</a:t>
-            </a:r>
-            <a:endParaRPr lang="en-US" sz="1500" dirty="0"/>
+              <a:t>Part B — Your own code + Responses API: build an MAF app in Python (or C#) that runs in your process</a:t>
+            </a:r>
+            <a:endParaRPr lang="en-US" sz="1400" dirty="0"/>
           </a:p>
           <a:p>
             <a:pPr marL="342900" indent="-342900">
@@ -3309,7 +3359,7 @@
               <a:buChar char="•"/>
             </a:pPr>
             <a:r>
-              <a:rPr lang="en-US" sz="1500" dirty="0">
+              <a:rPr lang="en-US" sz="1400" dirty="0">
                 <a:solidFill>
                   <a:srgbClr val="212121"/>
                 </a:solidFill>
@@ -3317,9 +3367,9 @@
                 <a:ea typeface="Calibri" pitchFamily="34" charset="-122"/>
                 <a:cs typeface="Calibri" pitchFamily="34" charset="-120"/>
               </a:rPr>
-              <a:t>Pick based on who owns lifecycle and who consumes the agent — not the SDK.</a:t>
-            </a:r>
-            <a:endParaRPr lang="en-US" sz="1500" dirty="0"/>
+              <a:t>Part C — Hosted agent: connect to a pre-deployed Hosted agent in the sandbox; walk the portal to see what Foundry manages (endpoint, tracing, identity, Toolbox tool, content safety)</a:t>
+            </a:r>
+            <a:endParaRPr lang="en-US" sz="1400" dirty="0"/>
           </a:p>
           <a:p>
             <a:pPr marL="342900" indent="-342900">
@@ -3330,6 +3380,218 @@
               <a:buChar char="•"/>
             </a:pPr>
             <a:r>
+              <a:rPr lang="en-US" sz="1400" dirty="0">
+                <a:solidFill>
+                  <a:srgbClr val="212121"/>
+                </a:solidFill>
+                <a:latin typeface="Calibri" pitchFamily="34" charset="0"/>
+                <a:ea typeface="Calibri" pitchFamily="34" charset="-122"/>
+                <a:cs typeface="Calibri" pitchFamily="34" charset="-120"/>
+              </a:rPr>
+              <a:t>Stretch: zip your Part B code and deploy it as your own Hosted agent</a:t>
+            </a:r>
+            <a:endParaRPr lang="en-US" sz="1400" dirty="0"/>
+          </a:p>
+        </p:txBody>
+      </p:sp>
+      <p:sp>
+        <p:nvSpPr>
+          <p:cNvPr id="6" name="Text 4"/>
+          <p:cNvSpPr/>
+          <p:nvPr/>
+        </p:nvSpPr>
+        <p:spPr>
+          <a:xfrm>
+            <a:off x="365760" y="4160520"/>
+            <a:ext cx="8412480" cy="365760"/>
+          </a:xfrm>
+          <a:prstGeom prst="rect">
+            <a:avLst/>
+          </a:prstGeom>
+          <a:noFill/>
+          <a:ln/>
+        </p:spPr>
+        <p:txBody>
+          <a:bodyPr wrap="square" rtlCol="0" anchor="ctr"/>
+          <a:lstStyle/>
+          <a:p>
+            <a:pPr indent="0" marL="0">
+              <a:buNone/>
+            </a:pPr>
+            <a:r>
+              <a:rPr lang="en-US" sz="1400" b="1" i="1" dirty="0">
+                <a:solidFill>
+                  <a:srgbClr val="1E2761"/>
+                </a:solidFill>
+                <a:latin typeface="Calibri" pitchFamily="34" charset="0"/>
+                <a:ea typeface="Calibri" pitchFamily="34" charset="-122"/>
+                <a:cs typeface="Calibri" pitchFamily="34" charset="-120"/>
+              </a:rPr>
+              <a:t>Same underlying docs-assistant behavior three ways. You'll feel the trade-offs.</a:t>
+            </a:r>
+            <a:endParaRPr lang="en-US" sz="1400" dirty="0"/>
+          </a:p>
+        </p:txBody>
+      </p:sp>
+    </p:spTree>
+  </p:cSld>
+  <p:clrMapOvr>
+    <a:masterClrMapping/>
+  </p:clrMapOvr>
+</p:sld>
+</file>
+
+<file path=ppt/slides/slide13.xml><?xml version="1.0" encoding="utf-8"?>
+<p:sld xmlns:a="http://schemas.openxmlformats.org/drawingml/2006/main" xmlns:r="http://schemas.openxmlformats.org/officeDocument/2006/relationships" xmlns:p="http://schemas.openxmlformats.org/presentationml/2006/main">
+  <p:cSld name="Slide 13">
+    <p:bg>
+      <p:bgPr>
+        <a:solidFill>
+          <a:srgbClr val="FFFFFF"/>
+        </a:solidFill>
+      </p:bgPr>
+    </p:bg>
+    <p:spTree>
+      <p:nvGrpSpPr>
+        <p:cNvPr id="1" name=""/>
+        <p:cNvGrpSpPr/>
+        <p:nvPr/>
+      </p:nvGrpSpPr>
+      <p:grpSpPr>
+        <a:xfrm>
+          <a:off x="0" y="0"/>
+          <a:ext cx="0" cy="0"/>
+          <a:chOff x="0" y="0"/>
+          <a:chExt cx="0" cy="0"/>
+        </a:xfrm>
+      </p:grpSpPr>
+      <p:sp>
+        <p:nvSpPr>
+          <p:cNvPr id="2" name="Shape 0"/>
+          <p:cNvSpPr/>
+          <p:nvPr/>
+        </p:nvSpPr>
+        <p:spPr>
+          <a:xfrm>
+            <a:off x="0" y="0"/>
+            <a:ext cx="54864" cy="5143500"/>
+          </a:xfrm>
+          <a:prstGeom prst="rect">
+            <a:avLst/>
+          </a:prstGeom>
+          <a:solidFill>
+            <a:srgbClr val="1E2761"/>
+          </a:solidFill>
+          <a:ln/>
+        </p:spPr>
+      </p:sp>
+      <p:sp>
+        <p:nvSpPr>
+          <p:cNvPr id="3" name="Text 1"/>
+          <p:cNvSpPr/>
+          <p:nvPr/>
+        </p:nvSpPr>
+        <p:spPr>
+          <a:xfrm>
+            <a:off x="5669280" y="274320"/>
+            <a:ext cx="3291840" cy="274320"/>
+          </a:xfrm>
+          <a:prstGeom prst="rect">
+            <a:avLst/>
+          </a:prstGeom>
+          <a:noFill/>
+          <a:ln/>
+        </p:spPr>
+        <p:txBody>
+          <a:bodyPr wrap="square" lIns="0" tIns="0" rIns="0" bIns="0" rtlCol="0" anchor="ctr"/>
+          <a:lstStyle/>
+          <a:p>
+            <a:pPr algn="r" indent="0" marL="0">
+              <a:buNone/>
+            </a:pPr>
+            <a:r>
+              <a:rPr lang="en-US" sz="1000" dirty="0">
+                <a:solidFill>
+                  <a:srgbClr val="6B7280"/>
+                </a:solidFill>
+                <a:latin typeface="Calibri" pitchFamily="34" charset="0"/>
+                <a:ea typeface="Calibri" pitchFamily="34" charset="-122"/>
+                <a:cs typeface="Calibri" pitchFamily="34" charset="-120"/>
+              </a:rPr>
+              <a:t>Day 1 · Module 6</a:t>
+            </a:r>
+            <a:endParaRPr lang="en-US" sz="1000" dirty="0"/>
+          </a:p>
+        </p:txBody>
+      </p:sp>
+      <p:sp>
+        <p:nvSpPr>
+          <p:cNvPr id="4" name="Text 2"/>
+          <p:cNvSpPr/>
+          <p:nvPr/>
+        </p:nvSpPr>
+        <p:spPr>
+          <a:xfrm>
+            <a:off x="365760" y="320040"/>
+            <a:ext cx="6217920" cy="640080"/>
+          </a:xfrm>
+          <a:prstGeom prst="rect">
+            <a:avLst/>
+          </a:prstGeom>
+          <a:noFill/>
+          <a:ln/>
+        </p:spPr>
+        <p:txBody>
+          <a:bodyPr wrap="square" lIns="0" tIns="0" rIns="0" bIns="0" rtlCol="0" anchor="ctr"/>
+          <a:lstStyle/>
+          <a:p>
+            <a:pPr indent="0" marL="0">
+              <a:buNone/>
+            </a:pPr>
+            <a:r>
+              <a:rPr lang="en-US" sz="2800" b="1" dirty="0">
+                <a:solidFill>
+                  <a:srgbClr val="1E2761"/>
+                </a:solidFill>
+                <a:latin typeface="Calibri" pitchFamily="34" charset="0"/>
+                <a:ea typeface="Calibri" pitchFamily="34" charset="-122"/>
+                <a:cs typeface="Calibri" pitchFamily="34" charset="-120"/>
+              </a:rPr>
+              <a:t>Takeaways</a:t>
+            </a:r>
+            <a:endParaRPr lang="en-US" sz="2800" dirty="0"/>
+          </a:p>
+        </p:txBody>
+      </p:sp>
+      <p:sp>
+        <p:nvSpPr>
+          <p:cNvPr id="5" name="Text 3"/>
+          <p:cNvSpPr/>
+          <p:nvPr/>
+        </p:nvSpPr>
+        <p:spPr>
+          <a:xfrm>
+            <a:off x="365760" y="1097280"/>
+            <a:ext cx="8412480" cy="3108960"/>
+          </a:xfrm>
+          <a:prstGeom prst="rect">
+            <a:avLst/>
+          </a:prstGeom>
+          <a:noFill/>
+          <a:ln/>
+        </p:spPr>
+        <p:txBody>
+          <a:bodyPr wrap="square" rtlCol="0" anchor="ctr"/>
+          <a:lstStyle/>
+          <a:p>
+            <a:pPr marL="342900" indent="-342900">
+              <a:spcAft>
+                <a:spcPts val="600"/>
+              </a:spcAft>
+              <a:buSzPct val="100000"/>
+              <a:buChar char="•"/>
+            </a:pPr>
+            <a:r>
               <a:rPr lang="en-US" sz="1500" dirty="0">
                 <a:solidFill>
                   <a:srgbClr val="212121"/>
@@ -3338,7 +3600,70 @@
                 <a:ea typeface="Calibri" pitchFamily="34" charset="-122"/>
                 <a:cs typeface="Calibri" pitchFamily="34" charset="-120"/>
               </a:rPr>
-              <a:t>Vocabulary matters. Use the exact MAF terms.</a:t>
+              <a:t>Foundry gives you three paths to run an agent, with the Responses API as the shared entry point.</a:t>
+            </a:r>
+            <a:endParaRPr lang="en-US" sz="1500" dirty="0"/>
+          </a:p>
+          <a:p>
+            <a:pPr marL="342900" indent="-342900">
+              <a:spcAft>
+                <a:spcPts val="600"/>
+              </a:spcAft>
+              <a:buSzPct val="100000"/>
+              <a:buChar char="•"/>
+            </a:pPr>
+            <a:r>
+              <a:rPr lang="en-US" sz="1500" dirty="0">
+                <a:solidFill>
+                  <a:srgbClr val="212121"/>
+                </a:solidFill>
+                <a:latin typeface="Calibri" pitchFamily="34" charset="0"/>
+                <a:ea typeface="Calibri" pitchFamily="34" charset="-122"/>
+                <a:cs typeface="Calibri" pitchFamily="34" charset="-120"/>
+              </a:rPr>
+              <a:t>Prompt agent = configuration only. Hosted agent = your code, Foundry-run. Path B = your code, you run it.</a:t>
+            </a:r>
+            <a:endParaRPr lang="en-US" sz="1500" dirty="0"/>
+          </a:p>
+          <a:p>
+            <a:pPr marL="342900" indent="-342900">
+              <a:spcAft>
+                <a:spcPts val="600"/>
+              </a:spcAft>
+              <a:buSzPct val="100000"/>
+              <a:buChar char="•"/>
+            </a:pPr>
+            <a:r>
+              <a:rPr lang="en-US" sz="1500" dirty="0">
+                <a:solidFill>
+                  <a:srgbClr val="212121"/>
+                </a:solidFill>
+                <a:latin typeface="Calibri" pitchFamily="34" charset="0"/>
+                <a:ea typeface="Calibri" pitchFamily="34" charset="-122"/>
+                <a:cs typeface="Calibri" pitchFamily="34" charset="-120"/>
+              </a:rPr>
+              <a:t>Foundry Agent Service manages more than models — endpoint, identity, observability, Toolbox tools, memory, content safety.</a:t>
+            </a:r>
+            <a:endParaRPr lang="en-US" sz="1500" dirty="0"/>
+          </a:p>
+          <a:p>
+            <a:pPr marL="342900" indent="-342900">
+              <a:spcAft>
+                <a:spcPts val="600"/>
+              </a:spcAft>
+              <a:buSzPct val="100000"/>
+              <a:buChar char="•"/>
+            </a:pPr>
+            <a:r>
+              <a:rPr lang="en-US" sz="1500" dirty="0">
+                <a:solidFill>
+                  <a:srgbClr val="212121"/>
+                </a:solidFill>
+                <a:latin typeface="Calibri" pitchFamily="34" charset="0"/>
+                <a:ea typeface="Calibri" pitchFamily="34" charset="-122"/>
+                <a:cs typeface="Calibri" pitchFamily="34" charset="-120"/>
+              </a:rPr>
+              <a:t>Path B code is portable — you can promote it to a Hosted agent later without a rewrite.</a:t>
             </a:r>
             <a:endParaRPr lang="en-US" sz="1500" dirty="0"/>
           </a:p>
@@ -3541,7 +3866,7 @@
                 <a:ea typeface="Calibri" pitchFamily="34" charset="-122"/>
                 <a:cs typeface="Calibri" pitchFamily="34" charset="-120"/>
               </a:rPr>
-              <a:t>Two places an agent can live</a:t>
+              <a:t>Foundry Agent Service — you pick how much of it to use</a:t>
             </a:r>
             <a:endParaRPr lang="en-US" sz="2800" dirty="0"/>
           </a:p>
@@ -3549,14 +3874,39 @@
       </p:sp>
       <p:sp>
         <p:nvSpPr>
-          <p:cNvPr id="5" name="Text 3"/>
-          <p:cNvSpPr/>
-          <p:nvPr/>
-        </p:nvSpPr>
-        <p:spPr>
-          <a:xfrm>
-            <a:off x="365760" y="1097280"/>
-            <a:ext cx="4069080" cy="365760"/>
+          <p:cNvPr id="5" name="Shape 3"/>
+          <p:cNvSpPr/>
+          <p:nvPr/>
+        </p:nvSpPr>
+        <p:spPr>
+          <a:xfrm>
+            <a:off x="320040" y="1143000"/>
+            <a:ext cx="2743200" cy="2377440"/>
+          </a:xfrm>
+          <a:prstGeom prst="rect">
+            <a:avLst/>
+          </a:prstGeom>
+          <a:solidFill>
+            <a:srgbClr val="FFFFFF"/>
+          </a:solidFill>
+          <a:ln w="12700">
+            <a:solidFill>
+              <a:srgbClr val="1E2761"/>
+            </a:solidFill>
+            <a:prstDash val="solid"/>
+          </a:ln>
+        </p:spPr>
+      </p:sp>
+      <p:sp>
+        <p:nvSpPr>
+          <p:cNvPr id="6" name="Text 4"/>
+          <p:cNvSpPr/>
+          <p:nvPr/>
+        </p:nvSpPr>
+        <p:spPr>
+          <a:xfrm>
+            <a:off x="411480" y="1280160"/>
+            <a:ext cx="2560320" cy="502920"/>
           </a:xfrm>
           <a:prstGeom prst="rect">
             <a:avLst/>
@@ -3568,11 +3918,11 @@
           <a:bodyPr wrap="square" lIns="0" tIns="0" rIns="0" bIns="0" rtlCol="0" anchor="ctr"/>
           <a:lstStyle/>
           <a:p>
-            <a:pPr indent="0" marL="0">
-              <a:buNone/>
-            </a:pPr>
-            <a:r>
-              <a:rPr lang="en-US" sz="2000" b="1" dirty="0">
+            <a:pPr algn="ctr" indent="0" marL="0">
+              <a:buNone/>
+            </a:pPr>
+            <a:r>
+              <a:rPr lang="en-US" sz="1500" b="1" dirty="0">
                 <a:solidFill>
                   <a:srgbClr val="1E2761"/>
                 </a:solidFill>
@@ -3580,22 +3930,22 @@
                 <a:ea typeface="Calibri" pitchFamily="34" charset="-122"/>
                 <a:cs typeface="Calibri" pitchFamily="34" charset="-120"/>
               </a:rPr>
-              <a:t>Client-side</a:t>
-            </a:r>
-            <a:endParaRPr lang="en-US" sz="2000" dirty="0"/>
-          </a:p>
-        </p:txBody>
-      </p:sp>
-      <p:sp>
-        <p:nvSpPr>
-          <p:cNvPr id="6" name="Text 4"/>
-          <p:cNvSpPr/>
-          <p:nvPr/>
-        </p:nvSpPr>
-        <p:spPr>
-          <a:xfrm>
-            <a:off x="4709160" y="1097280"/>
-            <a:ext cx="4069080" cy="365760"/>
+              <a:t>Path A · Prompt agent</a:t>
+            </a:r>
+            <a:endParaRPr lang="en-US" sz="1500" dirty="0"/>
+          </a:p>
+        </p:txBody>
+      </p:sp>
+      <p:sp>
+        <p:nvSpPr>
+          <p:cNvPr id="7" name="Text 5"/>
+          <p:cNvSpPr/>
+          <p:nvPr/>
+        </p:nvSpPr>
+        <p:spPr>
+          <a:xfrm>
+            <a:off x="411480" y="1920240"/>
+            <a:ext cx="2560320" cy="320040"/>
           </a:xfrm>
           <a:prstGeom prst="rect">
             <a:avLst/>
@@ -3607,34 +3957,34 @@
           <a:bodyPr wrap="square" lIns="0" tIns="0" rIns="0" bIns="0" rtlCol="0" anchor="ctr"/>
           <a:lstStyle/>
           <a:p>
-            <a:pPr indent="0" marL="0">
-              <a:buNone/>
-            </a:pPr>
-            <a:r>
-              <a:rPr lang="en-US" sz="2000" b="1" dirty="0">
-                <a:solidFill>
-                  <a:srgbClr val="1E2761"/>
-                </a:solidFill>
-                <a:latin typeface="Calibri" pitchFamily="34" charset="0"/>
-                <a:ea typeface="Calibri" pitchFamily="34" charset="-122"/>
-                <a:cs typeface="Calibri" pitchFamily="34" charset="-120"/>
-              </a:rPr>
-              <a:t>Foundry-hosted</a:t>
-            </a:r>
-            <a:endParaRPr lang="en-US" sz="2000" dirty="0"/>
-          </a:p>
-        </p:txBody>
-      </p:sp>
-      <p:sp>
-        <p:nvSpPr>
-          <p:cNvPr id="7" name="Text 5"/>
-          <p:cNvSpPr/>
-          <p:nvPr/>
-        </p:nvSpPr>
-        <p:spPr>
-          <a:xfrm>
-            <a:off x="365760" y="1554480"/>
-            <a:ext cx="4069080" cy="3291840"/>
+            <a:pPr algn="ctr" indent="0" marL="0">
+              <a:buNone/>
+            </a:pPr>
+            <a:r>
+              <a:rPr lang="en-US" sz="1200" i="1" dirty="0">
+                <a:solidFill>
+                  <a:srgbClr val="6B7280"/>
+                </a:solidFill>
+                <a:latin typeface="Calibri" pitchFamily="34" charset="0"/>
+                <a:ea typeface="Calibri" pitchFamily="34" charset="-122"/>
+                <a:cs typeface="Calibri" pitchFamily="34" charset="-120"/>
+              </a:rPr>
+              <a:t>Runs in Foundry</a:t>
+            </a:r>
+            <a:endParaRPr lang="en-US" sz="1200" dirty="0"/>
+          </a:p>
+        </p:txBody>
+      </p:sp>
+      <p:sp>
+        <p:nvSpPr>
+          <p:cNvPr id="8" name="Text 6"/>
+          <p:cNvSpPr/>
+          <p:nvPr/>
+        </p:nvSpPr>
+        <p:spPr>
+          <a:xfrm>
+            <a:off x="457200" y="2377440"/>
+            <a:ext cx="2468880" cy="1005840"/>
           </a:xfrm>
           <a:prstGeom prst="rect">
             <a:avLst/>
@@ -3643,18 +3993,14 @@
           <a:ln/>
         </p:spPr>
         <p:txBody>
-          <a:bodyPr wrap="square" rtlCol="0" anchor="ctr"/>
-          <a:lstStyle/>
-          <a:p>
-            <a:pPr marL="342900" indent="-342900">
-              <a:spcAft>
-                <a:spcPts val="600"/>
-              </a:spcAft>
-              <a:buSzPct val="100000"/>
-              <a:buChar char="•"/>
-            </a:pPr>
-            <a:r>
-              <a:rPr lang="en-US" sz="1500" dirty="0">
+          <a:bodyPr wrap="square" lIns="0" tIns="0" rIns="0" bIns="0" rtlCol="0" anchor="t"/>
+          <a:lstStyle/>
+          <a:p>
+            <a:pPr algn="ctr" indent="0" marL="0">
+              <a:buNone/>
+            </a:pPr>
+            <a:r>
+              <a:rPr lang="en-US" sz="1200" dirty="0">
                 <a:solidFill>
                   <a:srgbClr val="212121"/>
                 </a:solidFill>
@@ -3662,85 +4008,47 @@
                 <a:ea typeface="Calibri" pitchFamily="34" charset="-122"/>
                 <a:cs typeface="Calibri" pitchFamily="34" charset="-120"/>
               </a:rPr>
-              <a:t>You build the agent in your app code with Agent + a chat client</a:t>
-            </a:r>
-            <a:endParaRPr lang="en-US" sz="1500" dirty="0"/>
-          </a:p>
-          <a:p>
-            <a:pPr marL="342900" indent="-342900">
-              <a:spcAft>
-                <a:spcPts val="600"/>
-              </a:spcAft>
-              <a:buSzPct val="100000"/>
-              <a:buChar char="•"/>
-            </a:pPr>
-            <a:r>
-              <a:rPr lang="en-US" sz="1500" dirty="0">
-                <a:solidFill>
-                  <a:srgbClr val="212121"/>
-                </a:solidFill>
-                <a:latin typeface="Calibri" pitchFamily="34" charset="0"/>
-                <a:ea typeface="Calibri" pitchFamily="34" charset="-122"/>
-                <a:cs typeface="Calibri" pitchFamily="34" charset="-120"/>
-              </a:rPr>
-              <a:t>In-process thread state</a:t>
-            </a:r>
-            <a:endParaRPr lang="en-US" sz="1500" dirty="0"/>
-          </a:p>
-          <a:p>
-            <a:pPr marL="342900" indent="-342900">
-              <a:spcAft>
-                <a:spcPts val="600"/>
-              </a:spcAft>
-              <a:buSzPct val="100000"/>
-              <a:buChar char="•"/>
-            </a:pPr>
-            <a:r>
-              <a:rPr lang="en-US" sz="1500" dirty="0">
-                <a:solidFill>
-                  <a:srgbClr val="212121"/>
-                </a:solidFill>
-                <a:latin typeface="Calibri" pitchFamily="34" charset="0"/>
-                <a:ea typeface="Calibri" pitchFamily="34" charset="-122"/>
-                <a:cs typeface="Calibri" pitchFamily="34" charset="-120"/>
-              </a:rPr>
-              <a:t>Your process owns the lifecycle</a:t>
-            </a:r>
-            <a:endParaRPr lang="en-US" sz="1500" dirty="0"/>
-          </a:p>
-          <a:p>
-            <a:pPr marL="342900" indent="-342900">
-              <a:spcAft>
-                <a:spcPts val="600"/>
-              </a:spcAft>
-              <a:buSzPct val="100000"/>
-              <a:buChar char="•"/>
-            </a:pPr>
-            <a:r>
-              <a:rPr lang="en-US" sz="1500" dirty="0">
-                <a:solidFill>
-                  <a:srgbClr val="212121"/>
-                </a:solidFill>
-                <a:latin typeface="Calibri" pitchFamily="34" charset="0"/>
-                <a:ea typeface="Calibri" pitchFamily="34" charset="-122"/>
-                <a:cs typeface="Calibri" pitchFamily="34" charset="-120"/>
-              </a:rPr>
-              <a:t>Full local control over construction, tools, memory</a:t>
-            </a:r>
-            <a:endParaRPr lang="en-US" sz="1500" dirty="0"/>
-          </a:p>
-        </p:txBody>
-      </p:sp>
-      <p:sp>
-        <p:nvSpPr>
-          <p:cNvPr id="8" name="Text 6"/>
-          <p:cNvSpPr/>
-          <p:nvPr/>
-        </p:nvSpPr>
-        <p:spPr>
-          <a:xfrm>
-            <a:off x="4709160" y="1554480"/>
-            <a:ext cx="4069080" cy="3291840"/>
+              <a:t>Foundry manages everything (no code, no compute)</a:t>
+            </a:r>
+            <a:endParaRPr lang="en-US" sz="1200" dirty="0"/>
+          </a:p>
+        </p:txBody>
+      </p:sp>
+      <p:sp>
+        <p:nvSpPr>
+          <p:cNvPr id="9" name="Shape 7"/>
+          <p:cNvSpPr/>
+          <p:nvPr/>
+        </p:nvSpPr>
+        <p:spPr>
+          <a:xfrm>
+            <a:off x="3200400" y="1143000"/>
+            <a:ext cx="2743200" cy="2377440"/>
+          </a:xfrm>
+          <a:prstGeom prst="rect">
+            <a:avLst/>
+          </a:prstGeom>
+          <a:solidFill>
+            <a:srgbClr val="FFFFFF"/>
+          </a:solidFill>
+          <a:ln w="12700">
+            <a:solidFill>
+              <a:srgbClr val="1E2761"/>
+            </a:solidFill>
+            <a:prstDash val="solid"/>
+          </a:ln>
+        </p:spPr>
+      </p:sp>
+      <p:sp>
+        <p:nvSpPr>
+          <p:cNvPr id="10" name="Text 8"/>
+          <p:cNvSpPr/>
+          <p:nvPr/>
+        </p:nvSpPr>
+        <p:spPr>
+          <a:xfrm>
+            <a:off x="3291840" y="1280160"/>
+            <a:ext cx="2560320" cy="502920"/>
           </a:xfrm>
           <a:prstGeom prst="rect">
             <a:avLst/>
@@ -3749,104 +4057,37 @@
           <a:ln/>
         </p:spPr>
         <p:txBody>
-          <a:bodyPr wrap="square" rtlCol="0" anchor="ctr"/>
-          <a:lstStyle/>
-          <a:p>
-            <a:pPr marL="342900" indent="-342900">
-              <a:spcAft>
-                <a:spcPts val="600"/>
-              </a:spcAft>
-              <a:buSzPct val="100000"/>
-              <a:buChar char="•"/>
-            </a:pPr>
-            <a:r>
-              <a:rPr lang="en-US" sz="1500" dirty="0">
-                <a:solidFill>
-                  <a:srgbClr val="212121"/>
-                </a:solidFill>
-                <a:latin typeface="Calibri" pitchFamily="34" charset="0"/>
-                <a:ea typeface="Calibri" pitchFamily="34" charset="-122"/>
-                <a:cs typeface="Calibri" pitchFamily="34" charset="-120"/>
-              </a:rPr>
-              <a:t>The agent is created and configured in the Foundry portal (or via API)</a:t>
+          <a:bodyPr wrap="square" lIns="0" tIns="0" rIns="0" bIns="0" rtlCol="0" anchor="ctr"/>
+          <a:lstStyle/>
+          <a:p>
+            <a:pPr algn="ctr" indent="0" marL="0">
+              <a:buNone/>
+            </a:pPr>
+            <a:r>
+              <a:rPr lang="en-US" sz="1500" b="1" dirty="0">
+                <a:solidFill>
+                  <a:srgbClr val="1E2761"/>
+                </a:solidFill>
+                <a:latin typeface="Calibri" pitchFamily="34" charset="0"/>
+                <a:ea typeface="Calibri" pitchFamily="34" charset="-122"/>
+                <a:cs typeface="Calibri" pitchFamily="34" charset="-120"/>
+              </a:rPr>
+              <a:t>Path B · Your code + Responses API</a:t>
             </a:r>
             <a:endParaRPr lang="en-US" sz="1500" dirty="0"/>
           </a:p>
-          <a:p>
-            <a:pPr marL="342900" indent="-342900">
-              <a:spcAft>
-                <a:spcPts val="600"/>
-              </a:spcAft>
-              <a:buSzPct val="100000"/>
-              <a:buChar char="•"/>
-            </a:pPr>
-            <a:r>
-              <a:rPr lang="en-US" sz="1500" dirty="0">
-                <a:solidFill>
-                  <a:srgbClr val="212121"/>
-                </a:solidFill>
-                <a:latin typeface="Calibri" pitchFamily="34" charset="0"/>
-                <a:ea typeface="Calibri" pitchFamily="34" charset="-122"/>
-                <a:cs typeface="Calibri" pitchFamily="34" charset="-120"/>
-              </a:rPr>
-              <a:t>MAF connects to it over the wire</a:t>
-            </a:r>
-            <a:endParaRPr lang="en-US" sz="1500" dirty="0"/>
-          </a:p>
-          <a:p>
-            <a:pPr marL="342900" indent="-342900">
-              <a:spcAft>
-                <a:spcPts val="600"/>
-              </a:spcAft>
-              <a:buSzPct val="100000"/>
-              <a:buChar char="•"/>
-            </a:pPr>
-            <a:r>
-              <a:rPr lang="en-US" sz="1500" dirty="0">
-                <a:solidFill>
-                  <a:srgbClr val="212121"/>
-                </a:solidFill>
-                <a:latin typeface="Calibri" pitchFamily="34" charset="0"/>
-                <a:ea typeface="Calibri" pitchFamily="34" charset="-122"/>
-                <a:cs typeface="Calibri" pitchFamily="34" charset="-120"/>
-              </a:rPr>
-              <a:t>Foundry owns the lifecycle</a:t>
-            </a:r>
-            <a:endParaRPr lang="en-US" sz="1500" dirty="0"/>
-          </a:p>
-          <a:p>
-            <a:pPr marL="342900" indent="-342900">
-              <a:spcAft>
-                <a:spcPts val="600"/>
-              </a:spcAft>
-              <a:buSzPct val="100000"/>
-              <a:buChar char="•"/>
-            </a:pPr>
-            <a:r>
-              <a:rPr lang="en-US" sz="1500" dirty="0">
-                <a:solidFill>
-                  <a:srgbClr val="212121"/>
-                </a:solidFill>
-                <a:latin typeface="Calibri" pitchFamily="34" charset="0"/>
-                <a:ea typeface="Calibri" pitchFamily="34" charset="-122"/>
-                <a:cs typeface="Calibri" pitchFamily="34" charset="-120"/>
-              </a:rPr>
-              <a:t>Shared identity across apps and teams</a:t>
-            </a:r>
-            <a:endParaRPr lang="en-US" sz="1500" dirty="0"/>
-          </a:p>
-        </p:txBody>
-      </p:sp>
-      <p:sp>
-        <p:nvSpPr>
-          <p:cNvPr id="9" name="Text 7"/>
-          <p:cNvSpPr/>
-          <p:nvPr/>
-        </p:nvSpPr>
-        <p:spPr>
-          <a:xfrm>
-            <a:off x="365760" y="4160520"/>
-            <a:ext cx="8412480" cy="365760"/>
+        </p:txBody>
+      </p:sp>
+      <p:sp>
+        <p:nvSpPr>
+          <p:cNvPr id="11" name="Text 9"/>
+          <p:cNvSpPr/>
+          <p:nvPr/>
+        </p:nvSpPr>
+        <p:spPr>
+          <a:xfrm>
+            <a:off x="3291840" y="1920240"/>
+            <a:ext cx="2560320" cy="320040"/>
           </a:xfrm>
           <a:prstGeom prst="rect">
             <a:avLst/>
@@ -3855,24 +4096,278 @@
           <a:ln/>
         </p:spPr>
         <p:txBody>
-          <a:bodyPr wrap="square" rtlCol="0" anchor="ctr"/>
+          <a:bodyPr wrap="square" lIns="0" tIns="0" rIns="0" bIns="0" rtlCol="0" anchor="ctr"/>
+          <a:lstStyle/>
+          <a:p>
+            <a:pPr algn="ctr" indent="0" marL="0">
+              <a:buNone/>
+            </a:pPr>
+            <a:r>
+              <a:rPr lang="en-US" sz="1200" i="1" dirty="0">
+                <a:solidFill>
+                  <a:srgbClr val="6B7280"/>
+                </a:solidFill>
+                <a:latin typeface="Calibri" pitchFamily="34" charset="0"/>
+                <a:ea typeface="Calibri" pitchFamily="34" charset="-122"/>
+                <a:cs typeface="Calibri" pitchFamily="34" charset="-120"/>
+              </a:rPr>
+              <a:t>Runs in your process</a:t>
+            </a:r>
+            <a:endParaRPr lang="en-US" sz="1200" dirty="0"/>
+          </a:p>
+        </p:txBody>
+      </p:sp>
+      <p:sp>
+        <p:nvSpPr>
+          <p:cNvPr id="12" name="Text 10"/>
+          <p:cNvSpPr/>
+          <p:nvPr/>
+        </p:nvSpPr>
+        <p:spPr>
+          <a:xfrm>
+            <a:off x="3337560" y="2377440"/>
+            <a:ext cx="2468880" cy="1005840"/>
+          </a:xfrm>
+          <a:prstGeom prst="rect">
+            <a:avLst/>
+          </a:prstGeom>
+          <a:noFill/>
+          <a:ln/>
+        </p:spPr>
+        <p:txBody>
+          <a:bodyPr wrap="square" lIns="0" tIns="0" rIns="0" bIns="0" rtlCol="0" anchor="t"/>
+          <a:lstStyle/>
+          <a:p>
+            <a:pPr algn="ctr" indent="0" marL="0">
+              <a:buNone/>
+            </a:pPr>
+            <a:r>
+              <a:rPr lang="en-US" sz="1200" dirty="0">
+                <a:solidFill>
+                  <a:srgbClr val="212121"/>
+                </a:solidFill>
+                <a:latin typeface="Calibri" pitchFamily="34" charset="0"/>
+                <a:ea typeface="Calibri" pitchFamily="34" charset="-122"/>
+                <a:cs typeface="Calibri" pitchFamily="34" charset="-120"/>
+              </a:rPr>
+              <a:t>You manage the runtime; Foundry serves the model + tools</a:t>
+            </a:r>
+            <a:endParaRPr lang="en-US" sz="1200" dirty="0"/>
+          </a:p>
+        </p:txBody>
+      </p:sp>
+      <p:sp>
+        <p:nvSpPr>
+          <p:cNvPr id="13" name="Shape 11"/>
+          <p:cNvSpPr/>
+          <p:nvPr/>
+        </p:nvSpPr>
+        <p:spPr>
+          <a:xfrm>
+            <a:off x="6080760" y="1143000"/>
+            <a:ext cx="2743200" cy="2377440"/>
+          </a:xfrm>
+          <a:prstGeom prst="rect">
+            <a:avLst/>
+          </a:prstGeom>
+          <a:solidFill>
+            <a:srgbClr val="FFFFFF"/>
+          </a:solidFill>
+          <a:ln w="12700">
+            <a:solidFill>
+              <a:srgbClr val="1E2761"/>
+            </a:solidFill>
+            <a:prstDash val="solid"/>
+          </a:ln>
+        </p:spPr>
+      </p:sp>
+      <p:sp>
+        <p:nvSpPr>
+          <p:cNvPr id="14" name="Text 12"/>
+          <p:cNvSpPr/>
+          <p:nvPr/>
+        </p:nvSpPr>
+        <p:spPr>
+          <a:xfrm>
+            <a:off x="6172200" y="1280160"/>
+            <a:ext cx="2560320" cy="502920"/>
+          </a:xfrm>
+          <a:prstGeom prst="rect">
+            <a:avLst/>
+          </a:prstGeom>
+          <a:noFill/>
+          <a:ln/>
+        </p:spPr>
+        <p:txBody>
+          <a:bodyPr wrap="square" lIns="0" tIns="0" rIns="0" bIns="0" rtlCol="0" anchor="ctr"/>
+          <a:lstStyle/>
+          <a:p>
+            <a:pPr algn="ctr" indent="0" marL="0">
+              <a:buNone/>
+            </a:pPr>
+            <a:r>
+              <a:rPr lang="en-US" sz="1500" b="1" dirty="0">
+                <a:solidFill>
+                  <a:srgbClr val="1E2761"/>
+                </a:solidFill>
+                <a:latin typeface="Calibri" pitchFamily="34" charset="0"/>
+                <a:ea typeface="Calibri" pitchFamily="34" charset="-122"/>
+                <a:cs typeface="Calibri" pitchFamily="34" charset="-120"/>
+              </a:rPr>
+              <a:t>Path C · Hosted agent</a:t>
+            </a:r>
+            <a:endParaRPr lang="en-US" sz="1500" dirty="0"/>
+          </a:p>
+        </p:txBody>
+      </p:sp>
+      <p:sp>
+        <p:nvSpPr>
+          <p:cNvPr id="15" name="Text 13"/>
+          <p:cNvSpPr/>
+          <p:nvPr/>
+        </p:nvSpPr>
+        <p:spPr>
+          <a:xfrm>
+            <a:off x="6172200" y="1920240"/>
+            <a:ext cx="2560320" cy="320040"/>
+          </a:xfrm>
+          <a:prstGeom prst="rect">
+            <a:avLst/>
+          </a:prstGeom>
+          <a:noFill/>
+          <a:ln/>
+        </p:spPr>
+        <p:txBody>
+          <a:bodyPr wrap="square" lIns="0" tIns="0" rIns="0" bIns="0" rtlCol="0" anchor="ctr"/>
+          <a:lstStyle/>
+          <a:p>
+            <a:pPr algn="ctr" indent="0" marL="0">
+              <a:buNone/>
+            </a:pPr>
+            <a:r>
+              <a:rPr lang="en-US" sz="1200" i="1" dirty="0">
+                <a:solidFill>
+                  <a:srgbClr val="6B7280"/>
+                </a:solidFill>
+                <a:latin typeface="Calibri" pitchFamily="34" charset="0"/>
+                <a:ea typeface="Calibri" pitchFamily="34" charset="-122"/>
+                <a:cs typeface="Calibri" pitchFamily="34" charset="-120"/>
+              </a:rPr>
+              <a:t>Your code, run by Foundry</a:t>
+            </a:r>
+            <a:endParaRPr lang="en-US" sz="1200" dirty="0"/>
+          </a:p>
+        </p:txBody>
+      </p:sp>
+      <p:sp>
+        <p:nvSpPr>
+          <p:cNvPr id="16" name="Text 14"/>
+          <p:cNvSpPr/>
+          <p:nvPr/>
+        </p:nvSpPr>
+        <p:spPr>
+          <a:xfrm>
+            <a:off x="6217920" y="2377440"/>
+            <a:ext cx="2468880" cy="1005840"/>
+          </a:xfrm>
+          <a:prstGeom prst="rect">
+            <a:avLst/>
+          </a:prstGeom>
+          <a:noFill/>
+          <a:ln/>
+        </p:spPr>
+        <p:txBody>
+          <a:bodyPr wrap="square" lIns="0" tIns="0" rIns="0" bIns="0" rtlCol="0" anchor="t"/>
+          <a:lstStyle/>
+          <a:p>
+            <a:pPr algn="ctr" indent="0" marL="0">
+              <a:buNone/>
+            </a:pPr>
+            <a:r>
+              <a:rPr lang="en-US" sz="1200" dirty="0">
+                <a:solidFill>
+                  <a:srgbClr val="212121"/>
+                </a:solidFill>
+                <a:latin typeface="Calibri" pitchFamily="34" charset="0"/>
+                <a:ea typeface="Calibri" pitchFamily="34" charset="-122"/>
+                <a:cs typeface="Calibri" pitchFamily="34" charset="-120"/>
+              </a:rPr>
+              <a:t>Foundry manages endpoint, autoscale, identity, observability</a:t>
+            </a:r>
+            <a:endParaRPr lang="en-US" sz="1200" dirty="0"/>
+          </a:p>
+        </p:txBody>
+      </p:sp>
+      <p:sp>
+        <p:nvSpPr>
+          <p:cNvPr id="17" name="Shape 15"/>
+          <p:cNvSpPr/>
+          <p:nvPr/>
+        </p:nvSpPr>
+        <p:spPr>
+          <a:xfrm>
+            <a:off x="365760" y="4160520"/>
+            <a:ext cx="8412480" cy="548640"/>
+          </a:xfrm>
+          <a:prstGeom prst="rect">
+            <a:avLst/>
+          </a:prstGeom>
+          <a:solidFill>
+            <a:srgbClr val="CADCFC"/>
+          </a:solidFill>
+          <a:ln/>
+        </p:spPr>
+      </p:sp>
+      <p:sp>
+        <p:nvSpPr>
+          <p:cNvPr id="18" name="Text 16"/>
+          <p:cNvSpPr/>
+          <p:nvPr/>
+        </p:nvSpPr>
+        <p:spPr>
+          <a:xfrm>
+            <a:off x="502920" y="4206240"/>
+            <a:ext cx="8138160" cy="457200"/>
+          </a:xfrm>
+          <a:prstGeom prst="rect">
+            <a:avLst/>
+          </a:prstGeom>
+          <a:noFill/>
+          <a:ln/>
+        </p:spPr>
+        <p:txBody>
+          <a:bodyPr wrap="square" lIns="0" tIns="0" rIns="0" bIns="0" rtlCol="0" anchor="ctr"/>
           <a:lstStyle/>
           <a:p>
             <a:pPr indent="0" marL="0">
               <a:buNone/>
             </a:pPr>
             <a:r>
-              <a:rPr lang="en-US" sz="1400" i="1" dirty="0">
-                <a:solidFill>
-                  <a:srgbClr val="6B7280"/>
-                </a:solidFill>
-                <a:latin typeface="Calibri" pitchFamily="34" charset="0"/>
-                <a:ea typeface="Calibri" pitchFamily="34" charset="-122"/>
-                <a:cs typeface="Calibri" pitchFamily="34" charset="-120"/>
-              </a:rPr>
-              <a:t>MAF gives you a consistent API for both. You choose based on the scenario, not the SDK.</a:t>
-            </a:r>
-            <a:endParaRPr lang="en-US" sz="1400" dirty="0"/>
+              <a:rPr lang="en-US" sz="1300" b="1" dirty="0">
+                <a:solidFill>
+                  <a:srgbClr val="1E2761"/>
+                </a:solidFill>
+                <a:latin typeface="Calibri" pitchFamily="34" charset="0"/>
+                <a:ea typeface="Calibri" pitchFamily="34" charset="-122"/>
+                <a:cs typeface="Calibri" pitchFamily="34" charset="-120"/>
+              </a:rPr>
+              <a:t>Shared entry point: </a:t>
+            </a:r>
+            <a:pPr indent="0" marL="0">
+              <a:buNone/>
+            </a:pPr>
+            <a:r>
+              <a:rPr lang="en-US" sz="1300" dirty="0">
+                <a:solidFill>
+                  <a:srgbClr val="1E2761"/>
+                </a:solidFill>
+                <a:latin typeface="Calibri" pitchFamily="34" charset="0"/>
+                <a:ea typeface="Calibri" pitchFamily="34" charset="-122"/>
+                <a:cs typeface="Calibri" pitchFamily="34" charset="-120"/>
+              </a:rPr>
+              <a:t>the Responses API. All three paths call it for models and platform tools.</a:t>
+            </a:r>
+            <a:endParaRPr lang="en-US" sz="1300" dirty="0"/>
           </a:p>
         </p:txBody>
       </p:sp>
@@ -4000,7 +4495,7 @@
                 <a:ea typeface="Calibri" pitchFamily="34" charset="-122"/>
                 <a:cs typeface="Calibri" pitchFamily="34" charset="-120"/>
               </a:rPr>
-              <a:t>Client-side agent — Python</a:t>
+              <a:t>Path A — Prompt agent</a:t>
             </a:r>
             <a:endParaRPr lang="en-US" sz="2800" dirty="0"/>
           </a:p>
@@ -4008,14 +4503,53 @@
       </p:sp>
       <p:sp>
         <p:nvSpPr>
-          <p:cNvPr id="5" name="Shape 3"/>
-          <p:cNvSpPr/>
-          <p:nvPr/>
-        </p:nvSpPr>
-        <p:spPr>
-          <a:xfrm>
-            <a:off x="365760" y="1097280"/>
-            <a:ext cx="8412480" cy="3291840"/>
+          <p:cNvPr id="5" name="Text 3"/>
+          <p:cNvSpPr/>
+          <p:nvPr/>
+        </p:nvSpPr>
+        <p:spPr>
+          <a:xfrm>
+            <a:off x="365760" y="1051560"/>
+            <a:ext cx="8412480" cy="822960"/>
+          </a:xfrm>
+          <a:prstGeom prst="rect">
+            <a:avLst/>
+          </a:prstGeom>
+          <a:noFill/>
+          <a:ln/>
+        </p:spPr>
+        <p:txBody>
+          <a:bodyPr wrap="square" rtlCol="0" anchor="ctr"/>
+          <a:lstStyle/>
+          <a:p>
+            <a:pPr indent="0" marL="0">
+              <a:buNone/>
+            </a:pPr>
+            <a:r>
+              <a:rPr lang="en-US" sz="1300" dirty="0">
+                <a:solidFill>
+                  <a:srgbClr val="212121"/>
+                </a:solidFill>
+                <a:latin typeface="Calibri" pitchFamily="34" charset="0"/>
+                <a:ea typeface="Calibri" pitchFamily="34" charset="-122"/>
+                <a:cs typeface="Calibri" pitchFamily="34" charset="-120"/>
+              </a:rPr>
+              <a:t>A Prompt agent is defined entirely as configuration: instructions, model, tools. Author in the Foundry portal or via SDK / REST. Foundry runs it — no application code to maintain, no compute to manage.</a:t>
+            </a:r>
+            <a:endParaRPr lang="en-US" sz="1300" dirty="0"/>
+          </a:p>
+        </p:txBody>
+      </p:sp>
+      <p:sp>
+        <p:nvSpPr>
+          <p:cNvPr id="6" name="Shape 4"/>
+          <p:cNvSpPr/>
+          <p:nvPr/>
+        </p:nvSpPr>
+        <p:spPr>
+          <a:xfrm>
+            <a:off x="365760" y="1965960"/>
+            <a:ext cx="8412480" cy="2331720"/>
           </a:xfrm>
           <a:prstGeom prst="rect">
             <a:avLst/>
@@ -4033,14 +4567,14 @@
       </p:sp>
       <p:sp>
         <p:nvSpPr>
-          <p:cNvPr id="6" name="Text 4"/>
-          <p:cNvSpPr/>
-          <p:nvPr/>
-        </p:nvSpPr>
-        <p:spPr>
-          <a:xfrm>
-            <a:off x="502920" y="1188720"/>
-            <a:ext cx="8138160" cy="3108960"/>
+          <p:cNvPr id="7" name="Text 5"/>
+          <p:cNvSpPr/>
+          <p:nvPr/>
+        </p:nvSpPr>
+        <p:spPr>
+          <a:xfrm>
+            <a:off x="502920" y="2057400"/>
+            <a:ext cx="8138160" cy="2148840"/>
           </a:xfrm>
           <a:prstGeom prst="rect">
             <a:avLst/>
@@ -4064,7 +4598,7 @@
                 <a:ea typeface="Consolas" pitchFamily="34" charset="-122"/>
                 <a:cs typeface="Consolas" pitchFamily="34" charset="-120"/>
               </a:rPr>
-              <a:t>from agent_framework import Agent</a:t>
+              <a:t>from agent_framework.foundry import FoundryAgent</a:t>
             </a:r>
             <a:endParaRPr lang="en-US" sz="1300" dirty="0"/>
           </a:p>
@@ -4081,8 +4615,14 @@
                 <a:ea typeface="Consolas" pitchFamily="34" charset="-122"/>
                 <a:cs typeface="Consolas" pitchFamily="34" charset="-120"/>
               </a:rPr>
-              <a:t>from agent_framework.foundry import FoundryChatClient</a:t>
-            </a:r>
+              <a:t>from azure.identity import AzureCliCredential</a:t>
+            </a:r>
+            <a:endParaRPr lang="en-US" sz="1300" dirty="0"/>
+          </a:p>
+          <a:p>
+            <a:pPr indent="0" marL="0">
+              <a:buNone/>
+            </a:pPr>
             <a:endParaRPr lang="en-US" sz="1300" dirty="0"/>
           </a:p>
           <a:p>
@@ -4098,14 +4638,8 @@
                 <a:ea typeface="Consolas" pitchFamily="34" charset="-122"/>
                 <a:cs typeface="Consolas" pitchFamily="34" charset="-120"/>
               </a:rPr>
-              <a:t>from azure.identity import AzureCliCredential</a:t>
-            </a:r>
-            <a:endParaRPr lang="en-US" sz="1300" dirty="0"/>
-          </a:p>
-          <a:p>
-            <a:pPr indent="0" marL="0">
-              <a:buNone/>
-            </a:pPr>
+              <a:t>agent = FoundryAgent(</a:t>
+            </a:r>
             <a:endParaRPr lang="en-US" sz="1300" dirty="0"/>
           </a:p>
           <a:p>
@@ -4121,7 +4655,7 @@
                 <a:ea typeface="Consolas" pitchFamily="34" charset="-122"/>
                 <a:cs typeface="Consolas" pitchFamily="34" charset="-120"/>
               </a:rPr>
-              <a:t>agent = Agent(</a:t>
+              <a:t>    project_endpoint="https://&lt;project&gt;.services.ai.azure.com",</a:t>
             </a:r>
             <a:endParaRPr lang="en-US" sz="1300" dirty="0"/>
           </a:p>
@@ -4138,7 +4672,7 @@
                 <a:ea typeface="Consolas" pitchFamily="34" charset="-122"/>
                 <a:cs typeface="Consolas" pitchFamily="34" charset="-120"/>
               </a:rPr>
-              <a:t>    client=FoundryChatClient(credential=AzureCliCredential()),</a:t>
+              <a:t>    agent_name="docs-assistant",</a:t>
             </a:r>
             <a:endParaRPr lang="en-US" sz="1300" dirty="0"/>
           </a:p>
@@ -4155,7 +4689,7 @@
                 <a:ea typeface="Consolas" pitchFamily="34" charset="-122"/>
                 <a:cs typeface="Consolas" pitchFamily="34" charset="-120"/>
               </a:rPr>
-              <a:t>    name="DocsAssistant",</a:t>
+              <a:t>    agent_version="1.0",</a:t>
             </a:r>
             <a:endParaRPr lang="en-US" sz="1300" dirty="0"/>
           </a:p>
@@ -4172,7 +4706,7 @@
                 <a:ea typeface="Consolas" pitchFamily="34" charset="-122"/>
                 <a:cs typeface="Consolas" pitchFamily="34" charset="-120"/>
               </a:rPr>
-              <a:t>    instructions="You are a helpful docs assistant. Cite sources.",</a:t>
+              <a:t>    credential=AzureCliCredential(),</a:t>
             </a:r>
             <a:endParaRPr lang="en-US" sz="1300" dirty="0"/>
           </a:p>
@@ -4189,7 +4723,7 @@
                 <a:ea typeface="Consolas" pitchFamily="34" charset="-122"/>
                 <a:cs typeface="Consolas" pitchFamily="34" charset="-120"/>
               </a:rPr>
-              <a:t>    # tools=[...],</a:t>
+              <a:t>)</a:t>
             </a:r>
             <a:endParaRPr lang="en-US" sz="1300" dirty="0"/>
           </a:p>
@@ -4206,44 +4740,21 @@
                 <a:ea typeface="Consolas" pitchFamily="34" charset="-122"/>
                 <a:cs typeface="Consolas" pitchFamily="34" charset="-120"/>
               </a:rPr>
-              <a:t>)</a:t>
+              <a:t>result = await agent.run("What is Foundry IQ?")</a:t>
             </a:r>
             <a:endParaRPr lang="en-US" sz="1300" dirty="0"/>
           </a:p>
-          <a:p>
-            <a:pPr indent="0" marL="0">
-              <a:buNone/>
-            </a:pPr>
-            <a:endParaRPr lang="en-US" sz="1300" dirty="0"/>
-          </a:p>
-          <a:p>
-            <a:pPr indent="0" marL="0">
-              <a:buNone/>
-            </a:pPr>
-            <a:r>
-              <a:rPr lang="en-US" sz="1300" dirty="0">
-                <a:solidFill>
-                  <a:srgbClr val="212121"/>
-                </a:solidFill>
-                <a:latin typeface="Consolas" pitchFamily="34" charset="0"/>
-                <a:ea typeface="Consolas" pitchFamily="34" charset="-122"/>
-                <a:cs typeface="Consolas" pitchFamily="34" charset="-120"/>
-              </a:rPr>
-              <a:t>result = await agent.run("What is Foundry IQ?")</a:t>
-            </a:r>
-            <a:endParaRPr lang="en-US" sz="1300" dirty="0"/>
-          </a:p>
-        </p:txBody>
-      </p:sp>
-      <p:sp>
-        <p:nvSpPr>
-          <p:cNvPr id="7" name="Text 5"/>
-          <p:cNvSpPr/>
-          <p:nvPr/>
-        </p:nvSpPr>
-        <p:spPr>
-          <a:xfrm>
-            <a:off x="365760" y="4480560"/>
+        </p:txBody>
+      </p:sp>
+      <p:sp>
+        <p:nvSpPr>
+          <p:cNvPr id="8" name="Text 6"/>
+          <p:cNvSpPr/>
+          <p:nvPr/>
+        </p:nvSpPr>
+        <p:spPr>
+          <a:xfrm>
+            <a:off x="365760" y="4434840"/>
             <a:ext cx="8412480" cy="365760"/>
           </a:xfrm>
           <a:prstGeom prst="rect">
@@ -4268,7 +4779,7 @@
                 <a:ea typeface="Calibri" pitchFamily="34" charset="-122"/>
                 <a:cs typeface="Calibri" pitchFamily="34" charset="-120"/>
               </a:rPr>
-              <a:t>The agent object lives entirely in your process. Kill the process, kill the thread.</a:t>
+              <a:t>Best for: fast start, internal tools, production agents that don't need custom orchestration.</a:t>
             </a:r>
             <a:endParaRPr lang="en-US" sz="1300" dirty="0"/>
           </a:p>
@@ -4398,7 +4909,7 @@
                 <a:ea typeface="Calibri" pitchFamily="34" charset="-122"/>
                 <a:cs typeface="Calibri" pitchFamily="34" charset="-120"/>
               </a:rPr>
-              <a:t>Client-side agent — C#</a:t>
+              <a:t>Path B — Your own code, calling the Responses API</a:t>
             </a:r>
             <a:endParaRPr lang="en-US" sz="2800" dirty="0"/>
           </a:p>
@@ -4406,14 +4917,53 @@
       </p:sp>
       <p:sp>
         <p:nvSpPr>
-          <p:cNvPr id="5" name="Shape 3"/>
-          <p:cNvSpPr/>
-          <p:nvPr/>
-        </p:nvSpPr>
-        <p:spPr>
-          <a:xfrm>
-            <a:off x="365760" y="1097280"/>
-            <a:ext cx="8412480" cy="3291840"/>
+          <p:cNvPr id="5" name="Text 3"/>
+          <p:cNvSpPr/>
+          <p:nvPr/>
+        </p:nvSpPr>
+        <p:spPr>
+          <a:xfrm>
+            <a:off x="365760" y="1051560"/>
+            <a:ext cx="8412480" cy="640080"/>
+          </a:xfrm>
+          <a:prstGeom prst="rect">
+            <a:avLst/>
+          </a:prstGeom>
+          <a:noFill/>
+          <a:ln/>
+        </p:spPr>
+        <p:txBody>
+          <a:bodyPr wrap="square" rtlCol="0" anchor="ctr"/>
+          <a:lstStyle/>
+          <a:p>
+            <a:pPr indent="0" marL="0">
+              <a:buNone/>
+            </a:pPr>
+            <a:r>
+              <a:rPr lang="en-US" sz="1300" dirty="0">
+                <a:solidFill>
+                  <a:srgbClr val="212121"/>
+                </a:solidFill>
+                <a:latin typeface="Calibri" pitchFamily="34" charset="0"/>
+                <a:ea typeface="Calibri" pitchFamily="34" charset="-122"/>
+                <a:cs typeface="Calibri" pitchFamily="34" charset="-120"/>
+              </a:rPr>
+              <a:t>Your MAF app runs in your process — laptop, Container Apps, App Service, AKS, Functions — and calls Foundry's Responses API. You own the runtime.</a:t>
+            </a:r>
+            <a:endParaRPr lang="en-US" sz="1300" dirty="0"/>
+          </a:p>
+        </p:txBody>
+      </p:sp>
+      <p:sp>
+        <p:nvSpPr>
+          <p:cNvPr id="6" name="Shape 4"/>
+          <p:cNvSpPr/>
+          <p:nvPr/>
+        </p:nvSpPr>
+        <p:spPr>
+          <a:xfrm>
+            <a:off x="365760" y="1783080"/>
+            <a:ext cx="8412480" cy="2514600"/>
           </a:xfrm>
           <a:prstGeom prst="rect">
             <a:avLst/>
@@ -4431,14 +4981,14 @@
       </p:sp>
       <p:sp>
         <p:nvSpPr>
-          <p:cNvPr id="6" name="Text 4"/>
-          <p:cNvSpPr/>
-          <p:nvPr/>
-        </p:nvSpPr>
-        <p:spPr>
-          <a:xfrm>
-            <a:off x="502920" y="1188720"/>
-            <a:ext cx="8138160" cy="3108960"/>
+          <p:cNvPr id="7" name="Text 5"/>
+          <p:cNvSpPr/>
+          <p:nvPr/>
+        </p:nvSpPr>
+        <p:spPr>
+          <a:xfrm>
+            <a:off x="502920" y="1874520"/>
+            <a:ext cx="8138160" cy="2331720"/>
           </a:xfrm>
           <a:prstGeom prst="rect">
             <a:avLst/>
@@ -4462,7 +5012,7 @@
                 <a:ea typeface="Consolas" pitchFamily="34" charset="-122"/>
                 <a:cs typeface="Consolas" pitchFamily="34" charset="-120"/>
               </a:rPr>
-              <a:t>using Azure.AI.Projects;</a:t>
+              <a:t>from agent_framework import Agent</a:t>
             </a:r>
             <a:endParaRPr lang="en-US" sz="1300" dirty="0"/>
           </a:p>
@@ -4479,7 +5029,7 @@
                 <a:ea typeface="Consolas" pitchFamily="34" charset="-122"/>
                 <a:cs typeface="Consolas" pitchFamily="34" charset="-120"/>
               </a:rPr>
-              <a:t>using Azure.Identity;</a:t>
+              <a:t>from agent_framework.foundry import FoundryChatClient</a:t>
             </a:r>
             <a:endParaRPr lang="en-US" sz="1300" dirty="0"/>
           </a:p>
@@ -4496,7 +5046,7 @@
                 <a:ea typeface="Consolas" pitchFamily="34" charset="-122"/>
                 <a:cs typeface="Consolas" pitchFamily="34" charset="-120"/>
               </a:rPr>
-              <a:t>using Microsoft.Agents.AI;</a:t>
+              <a:t>from azure.identity import AzureCliCredential</a:t>
             </a:r>
             <a:endParaRPr lang="en-US" sz="1300" dirty="0"/>
           </a:p>
@@ -4519,7 +5069,7 @@
                 <a:ea typeface="Consolas" pitchFamily="34" charset="-122"/>
                 <a:cs typeface="Consolas" pitchFamily="34" charset="-120"/>
               </a:rPr>
-              <a:t>AIAgent agent = new AIProjectClient(</a:t>
+              <a:t>agent = Agent(</a:t>
             </a:r>
             <a:endParaRPr lang="en-US" sz="1300" dirty="0"/>
           </a:p>
@@ -4536,7 +5086,7 @@
                 <a:ea typeface="Consolas" pitchFamily="34" charset="-122"/>
                 <a:cs typeface="Consolas" pitchFamily="34" charset="-120"/>
               </a:rPr>
-              <a:t>        new Uri(endpoint), new DefaultAzureCredential())</a:t>
+              <a:t>    client=FoundryChatClient(credential=AzureCliCredential()),</a:t>
             </a:r>
             <a:endParaRPr lang="en-US" sz="1300" dirty="0"/>
           </a:p>
@@ -4553,7 +5103,7 @@
                 <a:ea typeface="Consolas" pitchFamily="34" charset="-122"/>
                 <a:cs typeface="Consolas" pitchFamily="34" charset="-120"/>
               </a:rPr>
-              <a:t>    .AsAIAgent(</a:t>
+              <a:t>    name="DocsAssistant",</a:t>
             </a:r>
             <a:endParaRPr lang="en-US" sz="1300" dirty="0"/>
           </a:p>
@@ -4570,7 +5120,7 @@
                 <a:ea typeface="Consolas" pitchFamily="34" charset="-122"/>
                 <a:cs typeface="Consolas" pitchFamily="34" charset="-120"/>
               </a:rPr>
-              <a:t>        model: model,</a:t>
+              <a:t>    instructions="You are a helpful docs assistant. Cite sources.",</a:t>
             </a:r>
             <a:endParaRPr lang="en-US" sz="1300" dirty="0"/>
           </a:p>
@@ -4587,7 +5137,7 @@
                 <a:ea typeface="Consolas" pitchFamily="34" charset="-122"/>
                 <a:cs typeface="Consolas" pitchFamily="34" charset="-120"/>
               </a:rPr>
-              <a:t>        name: "DocsAssistant",</a:t>
+              <a:t>)</a:t>
             </a:r>
             <a:endParaRPr lang="en-US" sz="1300" dirty="0"/>
           </a:p>
@@ -4604,44 +5154,21 @@
                 <a:ea typeface="Consolas" pitchFamily="34" charset="-122"/>
                 <a:cs typeface="Consolas" pitchFamily="34" charset="-120"/>
               </a:rPr>
-              <a:t>        instructions: "You are a helpful docs assistant. Cite sources.");</a:t>
+              <a:t>result = await agent.run("What is Foundry IQ?")</a:t>
             </a:r>
             <a:endParaRPr lang="en-US" sz="1300" dirty="0"/>
           </a:p>
-          <a:p>
-            <a:pPr indent="0" marL="0">
-              <a:buNone/>
-            </a:pPr>
-            <a:endParaRPr lang="en-US" sz="1300" dirty="0"/>
-          </a:p>
-          <a:p>
-            <a:pPr indent="0" marL="0">
-              <a:buNone/>
-            </a:pPr>
-            <a:r>
-              <a:rPr lang="en-US" sz="1300" dirty="0">
-                <a:solidFill>
-                  <a:srgbClr val="212121"/>
-                </a:solidFill>
-                <a:latin typeface="Consolas" pitchFamily="34" charset="0"/>
-                <a:ea typeface="Consolas" pitchFamily="34" charset="-122"/>
-                <a:cs typeface="Consolas" pitchFamily="34" charset="-120"/>
-              </a:rPr>
-              <a:t>Console.WriteLine(await agent.RunAsync("What is Foundry IQ?"));</a:t>
-            </a:r>
-            <a:endParaRPr lang="en-US" sz="1300" dirty="0"/>
-          </a:p>
-        </p:txBody>
-      </p:sp>
-      <p:sp>
-        <p:nvSpPr>
-          <p:cNvPr id="7" name="Text 5"/>
-          <p:cNvSpPr/>
-          <p:nvPr/>
-        </p:nvSpPr>
-        <p:spPr>
-          <a:xfrm>
-            <a:off x="365760" y="4480560"/>
+        </p:txBody>
+      </p:sp>
+      <p:sp>
+        <p:nvSpPr>
+          <p:cNvPr id="8" name="Text 6"/>
+          <p:cNvSpPr/>
+          <p:nvPr/>
+        </p:nvSpPr>
+        <p:spPr>
+          <a:xfrm>
+            <a:off x="365760" y="4434840"/>
             <a:ext cx="8412480" cy="365760"/>
           </a:xfrm>
           <a:prstGeom prst="rect">
@@ -4658,15 +5185,15 @@
               <a:buNone/>
             </a:pPr>
             <a:r>
-              <a:rPr lang="en-US" sz="1300" i="1" dirty="0">
-                <a:solidFill>
-                  <a:srgbClr val="6B7280"/>
-                </a:solidFill>
-                <a:latin typeface="Calibri" pitchFamily="34" charset="0"/>
-                <a:ea typeface="Calibri" pitchFamily="34" charset="-122"/>
-                <a:cs typeface="Calibri" pitchFamily="34" charset="-120"/>
-              </a:rPr>
-              <a:t>Same shape — construct locally, run locally, no persisted server-side identity.</a:t>
+              <a:rPr lang="en-US" sz="1300" b="1" i="1" dirty="0">
+                <a:solidFill>
+                  <a:srgbClr val="1E2761"/>
+                </a:solidFill>
+                <a:latin typeface="Calibri" pitchFamily="34" charset="0"/>
+                <a:ea typeface="Calibri" pitchFamily="34" charset="-122"/>
+                <a:cs typeface="Calibri" pitchFamily="34" charset="-120"/>
+              </a:rPr>
+              <a:t>Additive to Path C — the same MAF code can be repackaged as a Hosted agent later. No rewrite.</a:t>
             </a:r>
             <a:endParaRPr lang="en-US" sz="1300" dirty="0"/>
           </a:p>
@@ -4796,7 +5323,7 @@
                 <a:ea typeface="Calibri" pitchFamily="34" charset="-122"/>
                 <a:cs typeface="Calibri" pitchFamily="34" charset="-120"/>
               </a:rPr>
-              <a:t>Foundry-hosted, flavor 1 — PromptAgent</a:t>
+              <a:t>Path B — C# equivalent</a:t>
             </a:r>
             <a:endParaRPr lang="en-US" sz="2800" dirty="0"/>
           </a:p>
@@ -4804,53 +5331,14 @@
       </p:sp>
       <p:sp>
         <p:nvSpPr>
-          <p:cNvPr id="5" name="Text 3"/>
-          <p:cNvSpPr/>
-          <p:nvPr/>
-        </p:nvSpPr>
-        <p:spPr>
-          <a:xfrm>
-            <a:off x="365760" y="1051560"/>
-            <a:ext cx="8412480" cy="731520"/>
-          </a:xfrm>
-          <a:prstGeom prst="rect">
-            <a:avLst/>
-          </a:prstGeom>
-          <a:noFill/>
-          <a:ln/>
-        </p:spPr>
-        <p:txBody>
-          <a:bodyPr wrap="square" rtlCol="0" anchor="ctr"/>
-          <a:lstStyle/>
-          <a:p>
-            <a:pPr indent="0" marL="0">
-              <a:buNone/>
-            </a:pPr>
-            <a:r>
-              <a:rPr lang="en-US" sz="1400" dirty="0">
-                <a:solidFill>
-                  <a:srgbClr val="212121"/>
-                </a:solidFill>
-                <a:latin typeface="Calibri" pitchFamily="34" charset="0"/>
-                <a:ea typeface="Calibri" pitchFamily="34" charset="-122"/>
-                <a:cs typeface="Calibri" pitchFamily="34" charset="-120"/>
-              </a:rPr>
-              <a:t>A versioned, portal-configured agent inside Foundry. Instructions, model, tools, knowledge sources all live on the service.</a:t>
-            </a:r>
-            <a:endParaRPr lang="en-US" sz="1400" dirty="0"/>
-          </a:p>
-        </p:txBody>
-      </p:sp>
-      <p:sp>
-        <p:nvSpPr>
-          <p:cNvPr id="6" name="Shape 4"/>
-          <p:cNvSpPr/>
-          <p:nvPr/>
-        </p:nvSpPr>
-        <p:spPr>
-          <a:xfrm>
-            <a:off x="365760" y="1874520"/>
-            <a:ext cx="8412480" cy="2468880"/>
+          <p:cNvPr id="5" name="Shape 3"/>
+          <p:cNvSpPr/>
+          <p:nvPr/>
+        </p:nvSpPr>
+        <p:spPr>
+          <a:xfrm>
+            <a:off x="365760" y="1097280"/>
+            <a:ext cx="8412480" cy="3291840"/>
           </a:xfrm>
           <a:prstGeom prst="rect">
             <a:avLst/>
@@ -4868,14 +5356,14 @@
       </p:sp>
       <p:sp>
         <p:nvSpPr>
-          <p:cNvPr id="7" name="Text 5"/>
-          <p:cNvSpPr/>
-          <p:nvPr/>
-        </p:nvSpPr>
-        <p:spPr>
-          <a:xfrm>
-            <a:off x="502920" y="1965960"/>
-            <a:ext cx="8138160" cy="2286000"/>
+          <p:cNvPr id="6" name="Text 4"/>
+          <p:cNvSpPr/>
+          <p:nvPr/>
+        </p:nvSpPr>
+        <p:spPr>
+          <a:xfrm>
+            <a:off x="502920" y="1188720"/>
+            <a:ext cx="8138160" cy="3108960"/>
           </a:xfrm>
           <a:prstGeom prst="rect">
             <a:avLst/>
@@ -4899,7 +5387,7 @@
                 <a:ea typeface="Consolas" pitchFamily="34" charset="-122"/>
                 <a:cs typeface="Consolas" pitchFamily="34" charset="-120"/>
               </a:rPr>
-              <a:t>from agent_framework.foundry import FoundryAgent</a:t>
+              <a:t>using Azure.AI.Projects;</a:t>
             </a:r>
             <a:endParaRPr lang="en-US" sz="1300" dirty="0"/>
           </a:p>
@@ -4916,14 +5404,8 @@
                 <a:ea typeface="Consolas" pitchFamily="34" charset="-122"/>
                 <a:cs typeface="Consolas" pitchFamily="34" charset="-120"/>
               </a:rPr>
-              <a:t>from azure.identity import AzureCliCredential</a:t>
-            </a:r>
-            <a:endParaRPr lang="en-US" sz="1300" dirty="0"/>
-          </a:p>
-          <a:p>
-            <a:pPr indent="0" marL="0">
-              <a:buNone/>
-            </a:pPr>
+              <a:t>using Azure.Identity;</a:t>
+            </a:r>
             <a:endParaRPr lang="en-US" sz="1300" dirty="0"/>
           </a:p>
           <a:p>
@@ -4939,8 +5421,14 @@
                 <a:ea typeface="Consolas" pitchFamily="34" charset="-122"/>
                 <a:cs typeface="Consolas" pitchFamily="34" charset="-120"/>
               </a:rPr>
-              <a:t>agent = FoundryAgent(</a:t>
-            </a:r>
+              <a:t>using Microsoft.Agents.AI;</a:t>
+            </a:r>
+            <a:endParaRPr lang="en-US" sz="1300" dirty="0"/>
+          </a:p>
+          <a:p>
+            <a:pPr indent="0" marL="0">
+              <a:buNone/>
+            </a:pPr>
             <a:endParaRPr lang="en-US" sz="1300" dirty="0"/>
           </a:p>
           <a:p>
@@ -4956,7 +5444,7 @@
                 <a:ea typeface="Consolas" pitchFamily="34" charset="-122"/>
                 <a:cs typeface="Consolas" pitchFamily="34" charset="-120"/>
               </a:rPr>
-              <a:t>    project_endpoint="https://&lt;project&gt;.services.ai.azure.com",</a:t>
+              <a:t>AIAgent agent = new AIProjectClient(</a:t>
             </a:r>
             <a:endParaRPr lang="en-US" sz="1300" dirty="0"/>
           </a:p>
@@ -4973,7 +5461,7 @@
                 <a:ea typeface="Consolas" pitchFamily="34" charset="-122"/>
                 <a:cs typeface="Consolas" pitchFamily="34" charset="-120"/>
               </a:rPr>
-              <a:t>    agent_name="docs-assistant",</a:t>
+              <a:t>        new Uri(endpoint), new DefaultAzureCredential())</a:t>
             </a:r>
             <a:endParaRPr lang="en-US" sz="1300" dirty="0"/>
           </a:p>
@@ -4990,7 +5478,7 @@
                 <a:ea typeface="Consolas" pitchFamily="34" charset="-122"/>
                 <a:cs typeface="Consolas" pitchFamily="34" charset="-120"/>
               </a:rPr>
-              <a:t>    agent_version="1.0",           # PromptAgent is versioned</a:t>
+              <a:t>    .AsAIAgent(</a:t>
             </a:r>
             <a:endParaRPr lang="en-US" sz="1300" dirty="0"/>
           </a:p>
@@ -5007,7 +5495,7 @@
                 <a:ea typeface="Consolas" pitchFamily="34" charset="-122"/>
                 <a:cs typeface="Consolas" pitchFamily="34" charset="-120"/>
               </a:rPr>
-              <a:t>    credential=AzureCliCredential(),</a:t>
+              <a:t>        model: model,</a:t>
             </a:r>
             <a:endParaRPr lang="en-US" sz="1300" dirty="0"/>
           </a:p>
@@ -5024,14 +5512,8 @@
                 <a:ea typeface="Consolas" pitchFamily="34" charset="-122"/>
                 <a:cs typeface="Consolas" pitchFamily="34" charset="-120"/>
               </a:rPr>
-              <a:t>)</a:t>
-            </a:r>
-            <a:endParaRPr lang="en-US" sz="1300" dirty="0"/>
-          </a:p>
-          <a:p>
-            <a:pPr indent="0" marL="0">
-              <a:buNone/>
-            </a:pPr>
+              <a:t>        name: "DocsAssistant",</a:t>
+            </a:r>
             <a:endParaRPr lang="en-US" sz="1300" dirty="0"/>
           </a:p>
           <a:p>
@@ -5047,22 +5529,45 @@
                 <a:ea typeface="Consolas" pitchFamily="34" charset="-122"/>
                 <a:cs typeface="Consolas" pitchFamily="34" charset="-120"/>
               </a:rPr>
-              <a:t>result = await agent.run("What is Foundry IQ?")</a:t>
+              <a:t>        instructions: "You are a helpful docs assistant. Cite sources.");</a:t>
             </a:r>
             <a:endParaRPr lang="en-US" sz="1300" dirty="0"/>
           </a:p>
-        </p:txBody>
-      </p:sp>
-      <p:sp>
-        <p:nvSpPr>
-          <p:cNvPr id="8" name="Text 6"/>
+          <a:p>
+            <a:pPr indent="0" marL="0">
+              <a:buNone/>
+            </a:pPr>
+            <a:endParaRPr lang="en-US" sz="1300" dirty="0"/>
+          </a:p>
+          <a:p>
+            <a:pPr indent="0" marL="0">
+              <a:buNone/>
+            </a:pPr>
+            <a:r>
+              <a:rPr lang="en-US" sz="1300" dirty="0">
+                <a:solidFill>
+                  <a:srgbClr val="212121"/>
+                </a:solidFill>
+                <a:latin typeface="Consolas" pitchFamily="34" charset="0"/>
+                <a:ea typeface="Consolas" pitchFamily="34" charset="-122"/>
+                <a:cs typeface="Consolas" pitchFamily="34" charset="-120"/>
+              </a:rPr>
+              <a:t>Console.WriteLine(await agent.RunAsync("What is Foundry IQ?"));</a:t>
+            </a:r>
+            <a:endParaRPr lang="en-US" sz="1300" dirty="0"/>
+          </a:p>
+        </p:txBody>
+      </p:sp>
+      <p:sp>
+        <p:nvSpPr>
+          <p:cNvPr id="7" name="Text 5"/>
           <p:cNvSpPr/>
           <p:nvPr/>
         </p:nvSpPr>
         <p:spPr>
           <a:xfrm>
             <a:off x="365760" y="4480560"/>
-            <a:ext cx="8412480" cy="457200"/>
+            <a:ext cx="8412480" cy="365760"/>
           </a:xfrm>
           <a:prstGeom prst="rect">
             <a:avLst/>
@@ -5078,7 +5583,7 @@
               <a:buNone/>
             </a:pPr>
             <a:r>
-              <a:rPr lang="en-US" sz="1200" i="1" dirty="0">
+              <a:rPr lang="en-US" sz="1300" i="1" dirty="0">
                 <a:solidFill>
                   <a:srgbClr val="6B7280"/>
                 </a:solidFill>
@@ -5086,9 +5591,9 @@
                 <a:ea typeface="Calibri" pitchFamily="34" charset="-122"/>
                 <a:cs typeface="Calibri" pitchFamily="34" charset="-120"/>
               </a:rPr>
-              <a:t>Prefer PromptAgent when the agent is a shipped artifact your team versions and deploys independently from app code.</a:t>
-            </a:r>
-            <a:endParaRPr lang="en-US" sz="1200" dirty="0"/>
+              <a:t>Same shape. Same primitives. Same "your process calls Foundry's Responses API" pattern.</a:t>
+            </a:r>
+            <a:endParaRPr lang="en-US" sz="1300" dirty="0"/>
           </a:p>
         </p:txBody>
       </p:sp>
@@ -5216,7 +5721,7 @@
                 <a:ea typeface="Calibri" pitchFamily="34" charset="-122"/>
                 <a:cs typeface="Calibri" pitchFamily="34" charset="-120"/>
               </a:rPr>
-              <a:t>Foundry-hosted, flavor 2 — HostedAgent</a:t>
+              <a:t>Path C — Hosted agent</a:t>
             </a:r>
             <a:endParaRPr lang="en-US" sz="2800" dirty="0"/>
           </a:p>
@@ -5231,7 +5736,7 @@
         <p:spPr>
           <a:xfrm>
             <a:off x="365760" y="1051560"/>
-            <a:ext cx="8412480" cy="731520"/>
+            <a:ext cx="8412480" cy="1188720"/>
           </a:xfrm>
           <a:prstGeom prst="rect">
             <a:avLst/>
@@ -5247,7 +5752,7 @@
               <a:buNone/>
             </a:pPr>
             <a:r>
-              <a:rPr lang="en-US" sz="1400" dirty="0">
+              <a:rPr lang="en-US" sz="1200" dirty="0">
                 <a:solidFill>
                   <a:srgbClr val="212121"/>
                 </a:solidFill>
@@ -5255,9 +5760,9 @@
                 <a:ea typeface="Calibri" pitchFamily="34" charset="-122"/>
                 <a:cs typeface="Calibri" pitchFamily="34" charset="-120"/>
               </a:rPr>
-              <a:t>A Foundry-hosted agent without an explicit version number. Slightly simpler; still server-managed.</a:t>
-            </a:r>
-            <a:endParaRPr lang="en-US" sz="1400" dirty="0"/>
+              <a:t>Your agent code (MAF, LangGraph, OpenAI Agents SDK, or your own), packaged as a container or a source zip. Foundry runs the container with a managed endpoint, autoscale, dedicated Entra identity, and end-to-end observability. Under the hood, your code calls the Responses API.</a:t>
+            </a:r>
+            <a:endParaRPr lang="en-US" sz="1200" dirty="0"/>
           </a:p>
         </p:txBody>
       </p:sp>
@@ -5269,8 +5774,8 @@
         </p:nvSpPr>
         <p:spPr>
           <a:xfrm>
-            <a:off x="365760" y="1874520"/>
-            <a:ext cx="8412480" cy="2468880"/>
+            <a:off x="365760" y="2286000"/>
+            <a:ext cx="8412480" cy="1874520"/>
           </a:xfrm>
           <a:prstGeom prst="rect">
             <a:avLst/>
@@ -5294,8 +5799,8 @@
         </p:nvSpPr>
         <p:spPr>
           <a:xfrm>
-            <a:off x="502920" y="1965960"/>
-            <a:ext cx="8138160" cy="2286000"/>
+            <a:off x="502920" y="2377440"/>
+            <a:ext cx="8138160" cy="1691640"/>
           </a:xfrm>
           <a:prstGeom prst="rect">
             <a:avLst/>
@@ -5311,7 +5816,7 @@
               <a:buNone/>
             </a:pPr>
             <a:r>
-              <a:rPr lang="en-US" sz="1300" dirty="0">
+              <a:rPr lang="en-US" sz="1200" dirty="0">
                 <a:solidFill>
                   <a:srgbClr val="212121"/>
                 </a:solidFill>
@@ -5319,16 +5824,16 @@
                 <a:ea typeface="Consolas" pitchFamily="34" charset="-122"/>
                 <a:cs typeface="Consolas" pitchFamily="34" charset="-120"/>
               </a:rPr>
-              <a:t>from agent_framework.foundry import FoundryAgent</a:t>
-            </a:r>
-            <a:endParaRPr lang="en-US" sz="1300" dirty="0"/>
+              <a:t># From any client — including another agent — connect by name:</a:t>
+            </a:r>
+            <a:endParaRPr lang="en-US" sz="1200" dirty="0"/>
           </a:p>
           <a:p>
             <a:pPr indent="0" marL="0">
               <a:buNone/>
             </a:pPr>
             <a:r>
-              <a:rPr lang="en-US" sz="1300" dirty="0">
+              <a:rPr lang="en-US" sz="1200" dirty="0">
                 <a:solidFill>
                   <a:srgbClr val="212121"/>
                 </a:solidFill>
@@ -5336,22 +5841,22 @@
                 <a:ea typeface="Consolas" pitchFamily="34" charset="-122"/>
                 <a:cs typeface="Consolas" pitchFamily="34" charset="-120"/>
               </a:rPr>
-              <a:t>from azure.identity import AzureCliCredential</a:t>
-            </a:r>
-            <a:endParaRPr lang="en-US" sz="1300" dirty="0"/>
+              <a:t>from agent_framework.foundry import FoundryAgent</a:t>
+            </a:r>
+            <a:endParaRPr lang="en-US" sz="1200" dirty="0"/>
           </a:p>
           <a:p>
             <a:pPr indent="0" marL="0">
               <a:buNone/>
             </a:pPr>
-            <a:endParaRPr lang="en-US" sz="1300" dirty="0"/>
+            <a:endParaRPr lang="en-US" sz="1200" dirty="0"/>
           </a:p>
           <a:p>
             <a:pPr indent="0" marL="0">
               <a:buNone/>
             </a:pPr>
             <a:r>
-              <a:rPr lang="en-US" sz="1300" dirty="0">
+              <a:rPr lang="en-US" sz="1200" dirty="0">
                 <a:solidFill>
                   <a:srgbClr val="212121"/>
                 </a:solidFill>
@@ -5361,14 +5866,14 @@
               </a:rPr>
               <a:t>agent = FoundryAgent(</a:t>
             </a:r>
-            <a:endParaRPr lang="en-US" sz="1300" dirty="0"/>
+            <a:endParaRPr lang="en-US" sz="1200" dirty="0"/>
           </a:p>
           <a:p>
             <a:pPr indent="0" marL="0">
               <a:buNone/>
             </a:pPr>
             <a:r>
-              <a:rPr lang="en-US" sz="1300" dirty="0">
+              <a:rPr lang="en-US" sz="1200" dirty="0">
                 <a:solidFill>
                   <a:srgbClr val="212121"/>
                 </a:solidFill>
@@ -5378,14 +5883,14 @@
               </a:rPr>
               <a:t>    project_endpoint="https://&lt;project&gt;.services.ai.azure.com",</a:t>
             </a:r>
-            <a:endParaRPr lang="en-US" sz="1300" dirty="0"/>
+            <a:endParaRPr lang="en-US" sz="1200" dirty="0"/>
           </a:p>
           <a:p>
             <a:pPr indent="0" marL="0">
               <a:buNone/>
             </a:pPr>
             <a:r>
-              <a:rPr lang="en-US" sz="1300" dirty="0">
+              <a:rPr lang="en-US" sz="1200" dirty="0">
                 <a:solidFill>
                   <a:srgbClr val="212121"/>
                 </a:solidFill>
@@ -5393,16 +5898,16 @@
                 <a:ea typeface="Consolas" pitchFamily="34" charset="-122"/>
                 <a:cs typeface="Consolas" pitchFamily="34" charset="-120"/>
               </a:rPr>
-              <a:t>    agent_name="docs-assistant",</a:t>
-            </a:r>
-            <a:endParaRPr lang="en-US" sz="1300" dirty="0"/>
+              <a:t>    agent_name="docs-assistant-hosted",</a:t>
+            </a:r>
+            <a:endParaRPr lang="en-US" sz="1200" dirty="0"/>
           </a:p>
           <a:p>
             <a:pPr indent="0" marL="0">
               <a:buNone/>
             </a:pPr>
             <a:r>
-              <a:rPr lang="en-US" sz="1300" dirty="0">
+              <a:rPr lang="en-US" sz="1200" dirty="0">
                 <a:solidFill>
                   <a:srgbClr val="212121"/>
                 </a:solidFill>
@@ -5410,16 +5915,16 @@
                 <a:ea typeface="Consolas" pitchFamily="34" charset="-122"/>
                 <a:cs typeface="Consolas" pitchFamily="34" charset="-120"/>
               </a:rPr>
-              <a:t>    # no agent_version</a:t>
-            </a:r>
-            <a:endParaRPr lang="en-US" sz="1300" dirty="0"/>
+              <a:t>    credential=AzureCliCredential(),</a:t>
+            </a:r>
+            <a:endParaRPr lang="en-US" sz="1200" dirty="0"/>
           </a:p>
           <a:p>
             <a:pPr indent="0" marL="0">
               <a:buNone/>
             </a:pPr>
             <a:r>
-              <a:rPr lang="en-US" sz="1300" dirty="0">
+              <a:rPr lang="en-US" sz="1200" dirty="0">
                 <a:solidFill>
                   <a:srgbClr val="212121"/>
                 </a:solidFill>
@@ -5427,49 +5932,9 @@
                 <a:ea typeface="Consolas" pitchFamily="34" charset="-122"/>
                 <a:cs typeface="Consolas" pitchFamily="34" charset="-120"/>
               </a:rPr>
-              <a:t>    credential=AzureCliCredential(),</a:t>
-            </a:r>
-            <a:endParaRPr lang="en-US" sz="1300" dirty="0"/>
-          </a:p>
-          <a:p>
-            <a:pPr indent="0" marL="0">
-              <a:buNone/>
-            </a:pPr>
-            <a:r>
-              <a:rPr lang="en-US" sz="1300" dirty="0">
-                <a:solidFill>
-                  <a:srgbClr val="212121"/>
-                </a:solidFill>
-                <a:latin typeface="Consolas" pitchFamily="34" charset="0"/>
-                <a:ea typeface="Consolas" pitchFamily="34" charset="-122"/>
-                <a:cs typeface="Consolas" pitchFamily="34" charset="-120"/>
-              </a:rPr>
               <a:t>)</a:t>
             </a:r>
-            <a:endParaRPr lang="en-US" sz="1300" dirty="0"/>
-          </a:p>
-          <a:p>
-            <a:pPr indent="0" marL="0">
-              <a:buNone/>
-            </a:pPr>
-            <a:endParaRPr lang="en-US" sz="1300" dirty="0"/>
-          </a:p>
-          <a:p>
-            <a:pPr indent="0" marL="0">
-              <a:buNone/>
-            </a:pPr>
-            <a:r>
-              <a:rPr lang="en-US" sz="1300" dirty="0">
-                <a:solidFill>
-                  <a:srgbClr val="212121"/>
-                </a:solidFill>
-                <a:latin typeface="Consolas" pitchFamily="34" charset="0"/>
-                <a:ea typeface="Consolas" pitchFamily="34" charset="-122"/>
-                <a:cs typeface="Consolas" pitchFamily="34" charset="-120"/>
-              </a:rPr>
-              <a:t>result = await agent.run("What is Foundry IQ?")</a:t>
-            </a:r>
-            <a:endParaRPr lang="en-US" sz="1300" dirty="0"/>
+            <a:endParaRPr lang="en-US" sz="1200" dirty="0"/>
           </a:p>
         </p:txBody>
       </p:sp>
@@ -5481,8 +5946,8 @@
         </p:nvSpPr>
         <p:spPr>
           <a:xfrm>
-            <a:off x="365760" y="4480560"/>
-            <a:ext cx="8412480" cy="457200"/>
+            <a:off x="365760" y="4297680"/>
+            <a:ext cx="8412480" cy="502920"/>
           </a:xfrm>
           <a:prstGeom prst="rect">
             <a:avLst/>
@@ -5506,7 +5971,7 @@
                 <a:ea typeface="Calibri" pitchFamily="34" charset="-122"/>
                 <a:cs typeface="Calibri" pitchFamily="34" charset="-120"/>
               </a:rPr>
-              <a:t>Prefer HostedAgent when you want a shared server-hosted agent but versioning discipline isn't a hard constraint.</a:t>
+              <a:t>Best for: agents that call into your own custom code, custom orchestration, and any scenario where you want Foundry to handle hosting, scaling, and identity.</a:t>
             </a:r>
             <a:endParaRPr lang="en-US" sz="1200" dirty="0"/>
           </a:p>
@@ -5636,7 +6101,511 @@
                 <a:ea typeface="Calibri" pitchFamily="34" charset="-122"/>
                 <a:cs typeface="Calibri" pitchFamily="34" charset="-120"/>
               </a:rPr>
-              <a:t>Trade-offs at a glance</a:t>
+              <a:t>What Foundry manages for a Hosted agent</a:t>
+            </a:r>
+            <a:endParaRPr lang="en-US" sz="2800" dirty="0"/>
+          </a:p>
+        </p:txBody>
+      </p:sp>
+      <p:sp>
+        <p:nvSpPr>
+          <p:cNvPr id="5" name="Text 3"/>
+          <p:cNvSpPr/>
+          <p:nvPr/>
+        </p:nvSpPr>
+        <p:spPr>
+          <a:xfrm>
+            <a:off x="365760" y="1097280"/>
+            <a:ext cx="4069080" cy="365760"/>
+          </a:xfrm>
+          <a:prstGeom prst="rect">
+            <a:avLst/>
+          </a:prstGeom>
+          <a:noFill/>
+          <a:ln/>
+        </p:spPr>
+        <p:txBody>
+          <a:bodyPr wrap="square" lIns="0" tIns="0" rIns="0" bIns="0" rtlCol="0" anchor="ctr"/>
+          <a:lstStyle/>
+          <a:p>
+            <a:pPr indent="0" marL="0">
+              <a:buNone/>
+            </a:pPr>
+            <a:r>
+              <a:rPr lang="en-US" sz="2000" b="1" dirty="0">
+                <a:solidFill>
+                  <a:srgbClr val="1E2761"/>
+                </a:solidFill>
+                <a:latin typeface="Calibri" pitchFamily="34" charset="0"/>
+                <a:ea typeface="Calibri" pitchFamily="34" charset="-122"/>
+                <a:cs typeface="Calibri" pitchFamily="34" charset="-120"/>
+              </a:rPr>
+              <a:t>What you write</a:t>
+            </a:r>
+            <a:endParaRPr lang="en-US" sz="2000" dirty="0"/>
+          </a:p>
+        </p:txBody>
+      </p:sp>
+      <p:sp>
+        <p:nvSpPr>
+          <p:cNvPr id="6" name="Text 4"/>
+          <p:cNvSpPr/>
+          <p:nvPr/>
+        </p:nvSpPr>
+        <p:spPr>
+          <a:xfrm>
+            <a:off x="4709160" y="1097280"/>
+            <a:ext cx="4069080" cy="365760"/>
+          </a:xfrm>
+          <a:prstGeom prst="rect">
+            <a:avLst/>
+          </a:prstGeom>
+          <a:noFill/>
+          <a:ln/>
+        </p:spPr>
+        <p:txBody>
+          <a:bodyPr wrap="square" lIns="0" tIns="0" rIns="0" bIns="0" rtlCol="0" anchor="ctr"/>
+          <a:lstStyle/>
+          <a:p>
+            <a:pPr indent="0" marL="0">
+              <a:buNone/>
+            </a:pPr>
+            <a:r>
+              <a:rPr lang="en-US" sz="2000" b="1" dirty="0">
+                <a:solidFill>
+                  <a:srgbClr val="1E2761"/>
+                </a:solidFill>
+                <a:latin typeface="Calibri" pitchFamily="34" charset="0"/>
+                <a:ea typeface="Calibri" pitchFamily="34" charset="-122"/>
+                <a:cs typeface="Calibri" pitchFamily="34" charset="-120"/>
+              </a:rPr>
+              <a:t>What Foundry gives you</a:t>
+            </a:r>
+            <a:endParaRPr lang="en-US" sz="2000" dirty="0"/>
+          </a:p>
+        </p:txBody>
+      </p:sp>
+      <p:sp>
+        <p:nvSpPr>
+          <p:cNvPr id="7" name="Text 5"/>
+          <p:cNvSpPr/>
+          <p:nvPr/>
+        </p:nvSpPr>
+        <p:spPr>
+          <a:xfrm>
+            <a:off x="365760" y="1554480"/>
+            <a:ext cx="4069080" cy="3291840"/>
+          </a:xfrm>
+          <a:prstGeom prst="rect">
+            <a:avLst/>
+          </a:prstGeom>
+          <a:noFill/>
+          <a:ln/>
+        </p:spPr>
+        <p:txBody>
+          <a:bodyPr wrap="square" rtlCol="0" anchor="ctr"/>
+          <a:lstStyle/>
+          <a:p>
+            <a:pPr marL="342900" indent="-342900">
+              <a:spcAft>
+                <a:spcPts val="600"/>
+              </a:spcAft>
+              <a:buSzPct val="100000"/>
+              <a:buChar char="•"/>
+            </a:pPr>
+            <a:r>
+              <a:rPr lang="en-US" sz="1500" dirty="0">
+                <a:solidFill>
+                  <a:srgbClr val="212121"/>
+                </a:solidFill>
+                <a:latin typeface="Calibri" pitchFamily="34" charset="0"/>
+                <a:ea typeface="Calibri" pitchFamily="34" charset="-122"/>
+                <a:cs typeface="Calibri" pitchFamily="34" charset="-120"/>
+              </a:rPr>
+              <a:t>Agent logic (MAF or other frameworks)</a:t>
+            </a:r>
+            <a:endParaRPr lang="en-US" sz="1500" dirty="0"/>
+          </a:p>
+          <a:p>
+            <a:pPr marL="342900" indent="-342900">
+              <a:spcAft>
+                <a:spcPts val="600"/>
+              </a:spcAft>
+              <a:buSzPct val="100000"/>
+              <a:buChar char="•"/>
+            </a:pPr>
+            <a:r>
+              <a:rPr lang="en-US" sz="1500" dirty="0">
+                <a:solidFill>
+                  <a:srgbClr val="212121"/>
+                </a:solidFill>
+                <a:latin typeface="Calibri" pitchFamily="34" charset="0"/>
+                <a:ea typeface="Calibri" pitchFamily="34" charset="-122"/>
+                <a:cs typeface="Calibri" pitchFamily="34" charset="-120"/>
+              </a:rPr>
+              <a:t>Instructions and tool wiring</a:t>
+            </a:r>
+            <a:endParaRPr lang="en-US" sz="1500" dirty="0"/>
+          </a:p>
+          <a:p>
+            <a:pPr marL="342900" indent="-342900">
+              <a:spcAft>
+                <a:spcPts val="600"/>
+              </a:spcAft>
+              <a:buSzPct val="100000"/>
+              <a:buChar char="•"/>
+            </a:pPr>
+            <a:r>
+              <a:rPr lang="en-US" sz="1500" dirty="0">
+                <a:solidFill>
+                  <a:srgbClr val="212121"/>
+                </a:solidFill>
+                <a:latin typeface="Calibri" pitchFamily="34" charset="0"/>
+                <a:ea typeface="Calibri" pitchFamily="34" charset="-122"/>
+                <a:cs typeface="Calibri" pitchFamily="34" charset="-120"/>
+              </a:rPr>
+              <a:t>Any custom business code</a:t>
+            </a:r>
+            <a:endParaRPr lang="en-US" sz="1500" dirty="0"/>
+          </a:p>
+          <a:p>
+            <a:pPr marL="342900" indent="-342900">
+              <a:spcAft>
+                <a:spcPts val="600"/>
+              </a:spcAft>
+              <a:buSzPct val="100000"/>
+              <a:buChar char="•"/>
+            </a:pPr>
+            <a:r>
+              <a:rPr lang="en-US" sz="1500" dirty="0">
+                <a:solidFill>
+                  <a:srgbClr val="212121"/>
+                </a:solidFill>
+                <a:latin typeface="Calibri" pitchFamily="34" charset="0"/>
+                <a:ea typeface="Calibri" pitchFamily="34" charset="-122"/>
+                <a:cs typeface="Calibri" pitchFamily="34" charset="-120"/>
+              </a:rPr>
+              <a:t>Your unit tests and CI</a:t>
+            </a:r>
+            <a:endParaRPr lang="en-US" sz="1500" dirty="0"/>
+          </a:p>
+          <a:p>
+            <a:pPr marL="342900" indent="-342900">
+              <a:spcAft>
+                <a:spcPts val="600"/>
+              </a:spcAft>
+              <a:buSzPct val="100000"/>
+              <a:buChar char="•"/>
+            </a:pPr>
+            <a:r>
+              <a:rPr lang="en-US" sz="1500" dirty="0">
+                <a:solidFill>
+                  <a:srgbClr val="212121"/>
+                </a:solidFill>
+                <a:latin typeface="Calibri" pitchFamily="34" charset="0"/>
+                <a:ea typeface="Calibri" pitchFamily="34" charset="-122"/>
+                <a:cs typeface="Calibri" pitchFamily="34" charset="-120"/>
+              </a:rPr>
+              <a:t>That's it.</a:t>
+            </a:r>
+            <a:endParaRPr lang="en-US" sz="1500" dirty="0"/>
+          </a:p>
+        </p:txBody>
+      </p:sp>
+      <p:sp>
+        <p:nvSpPr>
+          <p:cNvPr id="8" name="Text 6"/>
+          <p:cNvSpPr/>
+          <p:nvPr/>
+        </p:nvSpPr>
+        <p:spPr>
+          <a:xfrm>
+            <a:off x="4709160" y="1554480"/>
+            <a:ext cx="4069080" cy="3291840"/>
+          </a:xfrm>
+          <a:prstGeom prst="rect">
+            <a:avLst/>
+          </a:prstGeom>
+          <a:noFill/>
+          <a:ln/>
+        </p:spPr>
+        <p:txBody>
+          <a:bodyPr wrap="square" rtlCol="0" anchor="ctr"/>
+          <a:lstStyle/>
+          <a:p>
+            <a:pPr marL="342900" indent="-342900">
+              <a:spcAft>
+                <a:spcPts val="600"/>
+              </a:spcAft>
+              <a:buSzPct val="100000"/>
+              <a:buChar char="•"/>
+            </a:pPr>
+            <a:r>
+              <a:rPr lang="en-US" sz="1500" dirty="0">
+                <a:solidFill>
+                  <a:srgbClr val="212121"/>
+                </a:solidFill>
+                <a:latin typeface="Calibri" pitchFamily="34" charset="0"/>
+                <a:ea typeface="Calibri" pitchFamily="34" charset="-122"/>
+                <a:cs typeface="Calibri" pitchFamily="34" charset="-120"/>
+              </a:rPr>
+              <a:t>Managed endpoint (a stable URL)</a:t>
+            </a:r>
+            <a:endParaRPr lang="en-US" sz="1500" dirty="0"/>
+          </a:p>
+          <a:p>
+            <a:pPr marL="342900" indent="-342900">
+              <a:spcAft>
+                <a:spcPts val="600"/>
+              </a:spcAft>
+              <a:buSzPct val="100000"/>
+              <a:buChar char="•"/>
+            </a:pPr>
+            <a:r>
+              <a:rPr lang="en-US" sz="1500" dirty="0">
+                <a:solidFill>
+                  <a:srgbClr val="212121"/>
+                </a:solidFill>
+                <a:latin typeface="Calibri" pitchFamily="34" charset="0"/>
+                <a:ea typeface="Calibri" pitchFamily="34" charset="-122"/>
+                <a:cs typeface="Calibri" pitchFamily="34" charset="-120"/>
+              </a:rPr>
+              <a:t>Autoscale — container instances per session and request volume</a:t>
+            </a:r>
+            <a:endParaRPr lang="en-US" sz="1500" dirty="0"/>
+          </a:p>
+          <a:p>
+            <a:pPr marL="342900" indent="-342900">
+              <a:spcAft>
+                <a:spcPts val="600"/>
+              </a:spcAft>
+              <a:buSzPct val="100000"/>
+              <a:buChar char="•"/>
+            </a:pPr>
+            <a:r>
+              <a:rPr lang="en-US" sz="1500" dirty="0">
+                <a:solidFill>
+                  <a:srgbClr val="212121"/>
+                </a:solidFill>
+                <a:latin typeface="Calibri" pitchFamily="34" charset="0"/>
+                <a:ea typeface="Calibri" pitchFamily="34" charset="-122"/>
+                <a:cs typeface="Calibri" pitchFamily="34" charset="-120"/>
+              </a:rPr>
+              <a:t>Dedicated Microsoft Entra identity per agent</a:t>
+            </a:r>
+            <a:endParaRPr lang="en-US" sz="1500" dirty="0"/>
+          </a:p>
+          <a:p>
+            <a:pPr marL="342900" indent="-342900">
+              <a:spcAft>
+                <a:spcPts val="600"/>
+              </a:spcAft>
+              <a:buSzPct val="100000"/>
+              <a:buChar char="•"/>
+            </a:pPr>
+            <a:r>
+              <a:rPr lang="en-US" sz="1500" dirty="0">
+                <a:solidFill>
+                  <a:srgbClr val="212121"/>
+                </a:solidFill>
+                <a:latin typeface="Calibri" pitchFamily="34" charset="0"/>
+                <a:ea typeface="Calibri" pitchFamily="34" charset="-122"/>
+                <a:cs typeface="Calibri" pitchFamily="34" charset="-120"/>
+              </a:rPr>
+              <a:t>End-to-end tracing + App Insights integration</a:t>
+            </a:r>
+            <a:endParaRPr lang="en-US" sz="1500" dirty="0"/>
+          </a:p>
+          <a:p>
+            <a:pPr marL="342900" indent="-342900">
+              <a:spcAft>
+                <a:spcPts val="600"/>
+              </a:spcAft>
+              <a:buSzPct val="100000"/>
+              <a:buChar char="•"/>
+            </a:pPr>
+            <a:r>
+              <a:rPr lang="en-US" sz="1500" dirty="0">
+                <a:solidFill>
+                  <a:srgbClr val="212121"/>
+                </a:solidFill>
+                <a:latin typeface="Calibri" pitchFamily="34" charset="0"/>
+                <a:ea typeface="Calibri" pitchFamily="34" charset="-122"/>
+                <a:cs typeface="Calibri" pitchFamily="34" charset="-120"/>
+              </a:rPr>
+              <a:t>Content safety and prompt-injection mitigation</a:t>
+            </a:r>
+            <a:endParaRPr lang="en-US" sz="1500" dirty="0"/>
+          </a:p>
+          <a:p>
+            <a:pPr marL="342900" indent="-342900">
+              <a:spcAft>
+                <a:spcPts val="600"/>
+              </a:spcAft>
+              <a:buSzPct val="100000"/>
+              <a:buChar char="•"/>
+            </a:pPr>
+            <a:r>
+              <a:rPr lang="en-US" sz="1500" dirty="0">
+                <a:solidFill>
+                  <a:srgbClr val="212121"/>
+                </a:solidFill>
+                <a:latin typeface="Calibri" pitchFamily="34" charset="0"/>
+                <a:ea typeface="Calibri" pitchFamily="34" charset="-122"/>
+                <a:cs typeface="Calibri" pitchFamily="34" charset="-120"/>
+              </a:rPr>
+              <a:t>Foundry Toolbox tools (web search, code interpreter, MCP servers, …)</a:t>
+            </a:r>
+            <a:endParaRPr lang="en-US" sz="1500" dirty="0"/>
+          </a:p>
+          <a:p>
+            <a:pPr marL="342900" indent="-342900">
+              <a:spcAft>
+                <a:spcPts val="600"/>
+              </a:spcAft>
+              <a:buSzPct val="100000"/>
+              <a:buChar char="•"/>
+            </a:pPr>
+            <a:r>
+              <a:rPr lang="en-US" sz="1500" dirty="0">
+                <a:solidFill>
+                  <a:srgbClr val="212121"/>
+                </a:solidFill>
+                <a:latin typeface="Calibri" pitchFamily="34" charset="0"/>
+                <a:ea typeface="Calibri" pitchFamily="34" charset="-122"/>
+                <a:cs typeface="Calibri" pitchFamily="34" charset="-120"/>
+              </a:rPr>
+              <a:t>Managed conversations / memory (BYO also supported)</a:t>
+            </a:r>
+            <a:endParaRPr lang="en-US" sz="1500" dirty="0"/>
+          </a:p>
+        </p:txBody>
+      </p:sp>
+    </p:spTree>
+  </p:cSld>
+  <p:clrMapOvr>
+    <a:masterClrMapping/>
+  </p:clrMapOvr>
+</p:sld>
+</file>
+
+<file path=ppt/slides/slide8.xml><?xml version="1.0" encoding="utf-8"?>
+<p:sld xmlns:a="http://schemas.openxmlformats.org/drawingml/2006/main" xmlns:r="http://schemas.openxmlformats.org/officeDocument/2006/relationships" xmlns:p="http://schemas.openxmlformats.org/presentationml/2006/main">
+  <p:cSld name="Slide 8">
+    <p:bg>
+      <p:bgPr>
+        <a:solidFill>
+          <a:srgbClr val="FFFFFF"/>
+        </a:solidFill>
+      </p:bgPr>
+    </p:bg>
+    <p:spTree>
+      <p:nvGrpSpPr>
+        <p:cNvPr id="1" name=""/>
+        <p:cNvGrpSpPr/>
+        <p:nvPr/>
+      </p:nvGrpSpPr>
+      <p:grpSpPr>
+        <a:xfrm>
+          <a:off x="0" y="0"/>
+          <a:ext cx="0" cy="0"/>
+          <a:chOff x="0" y="0"/>
+          <a:chExt cx="0" cy="0"/>
+        </a:xfrm>
+      </p:grpSpPr>
+      <p:sp>
+        <p:nvSpPr>
+          <p:cNvPr id="2" name="Shape 0"/>
+          <p:cNvSpPr/>
+          <p:nvPr/>
+        </p:nvSpPr>
+        <p:spPr>
+          <a:xfrm>
+            <a:off x="0" y="0"/>
+            <a:ext cx="54864" cy="5143500"/>
+          </a:xfrm>
+          <a:prstGeom prst="rect">
+            <a:avLst/>
+          </a:prstGeom>
+          <a:solidFill>
+            <a:srgbClr val="1E2761"/>
+          </a:solidFill>
+          <a:ln/>
+        </p:spPr>
+      </p:sp>
+      <p:sp>
+        <p:nvSpPr>
+          <p:cNvPr id="3" name="Text 1"/>
+          <p:cNvSpPr/>
+          <p:nvPr/>
+        </p:nvSpPr>
+        <p:spPr>
+          <a:xfrm>
+            <a:off x="5669280" y="274320"/>
+            <a:ext cx="3291840" cy="274320"/>
+          </a:xfrm>
+          <a:prstGeom prst="rect">
+            <a:avLst/>
+          </a:prstGeom>
+          <a:noFill/>
+          <a:ln/>
+        </p:spPr>
+        <p:txBody>
+          <a:bodyPr wrap="square" lIns="0" tIns="0" rIns="0" bIns="0" rtlCol="0" anchor="ctr"/>
+          <a:lstStyle/>
+          <a:p>
+            <a:pPr algn="r" indent="0" marL="0">
+              <a:buNone/>
+            </a:pPr>
+            <a:r>
+              <a:rPr lang="en-US" sz="1000" dirty="0">
+                <a:solidFill>
+                  <a:srgbClr val="6B7280"/>
+                </a:solidFill>
+                <a:latin typeface="Calibri" pitchFamily="34" charset="0"/>
+                <a:ea typeface="Calibri" pitchFamily="34" charset="-122"/>
+                <a:cs typeface="Calibri" pitchFamily="34" charset="-120"/>
+              </a:rPr>
+              <a:t>Day 1 · Module 6</a:t>
+            </a:r>
+            <a:endParaRPr lang="en-US" sz="1000" dirty="0"/>
+          </a:p>
+        </p:txBody>
+      </p:sp>
+      <p:sp>
+        <p:nvSpPr>
+          <p:cNvPr id="4" name="Text 2"/>
+          <p:cNvSpPr/>
+          <p:nvPr/>
+        </p:nvSpPr>
+        <p:spPr>
+          <a:xfrm>
+            <a:off x="365760" y="320040"/>
+            <a:ext cx="6217920" cy="640080"/>
+          </a:xfrm>
+          <a:prstGeom prst="rect">
+            <a:avLst/>
+          </a:prstGeom>
+          <a:noFill/>
+          <a:ln/>
+        </p:spPr>
+        <p:txBody>
+          <a:bodyPr wrap="square" lIns="0" tIns="0" rIns="0" bIns="0" rtlCol="0" anchor="ctr"/>
+          <a:lstStyle/>
+          <a:p>
+            <a:pPr indent="0" marL="0">
+              <a:buNone/>
+            </a:pPr>
+            <a:r>
+              <a:rPr lang="en-US" sz="2800" b="1" dirty="0">
+                <a:solidFill>
+                  <a:srgbClr val="1E2761"/>
+                </a:solidFill>
+                <a:latin typeface="Calibri" pitchFamily="34" charset="0"/>
+                <a:ea typeface="Calibri" pitchFamily="34" charset="-122"/>
+                <a:cs typeface="Calibri" pitchFamily="34" charset="-120"/>
+              </a:rPr>
+              <a:t>Compare at a glance</a:t>
             </a:r>
             <a:endParaRPr lang="en-US" sz="2800" dirty="0"/>
           </a:p>
@@ -5644,7 +6613,7 @@
       </p:sp>
       <p:graphicFrame>
         <p:nvGraphicFramePr>
-          <p:cNvPr id="8" name="Table 0"/>
+          <p:cNvPr id="9" name="Table 0"/>
           <p:cNvGraphicFramePr>
             <a:graphicFrameLocks noGrp="1"/>
           </p:cNvGraphicFramePr>
@@ -5665,12 +6634,12 @@
             <a:tbl>
               <a:tblPr/>
               <a:tblGrid>
-                <a:gridCol w="2194560"/>
+                <a:gridCol w="2377440"/>
                 <a:gridCol w="1828800"/>
-                <a:gridCol w="2194560"/>
+                <a:gridCol w="2011680"/>
                 <a:gridCol w="2194560"/>
               </a:tblGrid>
-              <a:tr h="365760">
+              <a:tr h="384048">
                 <a:tc>
                   <a:txBody>
                     <a:bodyPr/>
@@ -5756,7 +6725,7 @@
                           <a:ea typeface="Calibri" pitchFamily="34" charset="-122"/>
                           <a:cs typeface="Calibri" pitchFamily="34" charset="-120"/>
                         </a:rPr>
-                        <a:t>Client-side</a:t>
+                        <a:t>A · Prompt</a:t>
                       </a:r>
                       <a:endParaRPr lang="en-US" sz="1200" dirty="0">
                         <a:latin typeface="Calibri" charset="0"/>
@@ -5824,7 +6793,7 @@
                           <a:ea typeface="Calibri" pitchFamily="34" charset="-122"/>
                           <a:cs typeface="Calibri" pitchFamily="34" charset="-120"/>
                         </a:rPr>
-                        <a:t>PromptAgent</a:t>
+                        <a:t>B · Your code</a:t>
                       </a:r>
                       <a:endParaRPr lang="en-US" sz="1200" dirty="0">
                         <a:latin typeface="Calibri" charset="0"/>
@@ -5892,7 +6861,7 @@
                           <a:ea typeface="Calibri" pitchFamily="34" charset="-122"/>
                           <a:cs typeface="Calibri" pitchFamily="34" charset="-120"/>
                         </a:rPr>
-                        <a:t>HostedAgent</a:t>
+                        <a:t>C · Hosted</a:t>
                       </a:r>
                       <a:endParaRPr lang="en-US" sz="1200" dirty="0">
                         <a:latin typeface="Calibri" charset="0"/>
@@ -5944,7 +6913,7 @@
                   </a:tcPr>
                 </a:tc>
               </a:tr>
-              <a:tr h="365760">
+              <a:tr h="384048">
                 <a:tc>
                   <a:txBody>
                     <a:bodyPr/>
@@ -5962,7 +6931,7 @@
                           <a:ea typeface="Calibri" pitchFamily="34" charset="-122"/>
                           <a:cs typeface="Calibri" pitchFamily="34" charset="-120"/>
                         </a:rPr>
-                        <a:t>Agent identity lives</a:t>
+                        <a:t>Runtime code to maintain</a:t>
                       </a:r>
                       <a:endParaRPr lang="en-US" sz="1200" dirty="0">
                         <a:latin typeface="Calibri" charset="0"/>
@@ -6030,7 +6999,7 @@
                           <a:ea typeface="Calibri" pitchFamily="34" charset="-122"/>
                           <a:cs typeface="Calibri" pitchFamily="34" charset="-120"/>
                         </a:rPr>
-                        <a:t>In your code</a:t>
+                        <a:t>None</a:t>
                       </a:r>
                       <a:endParaRPr lang="en-US" sz="1200" dirty="0">
                         <a:latin typeface="Calibri" charset="0"/>
@@ -6098,7 +7067,7 @@
                           <a:ea typeface="Calibri" pitchFamily="34" charset="-122"/>
                           <a:cs typeface="Calibri" pitchFamily="34" charset="-120"/>
                         </a:rPr>
-                        <a:t>In Foundry</a:t>
+                        <a:t>Yours</a:t>
                       </a:r>
                       <a:endParaRPr lang="en-US" sz="1200" dirty="0">
                         <a:latin typeface="Calibri" charset="0"/>
@@ -6166,7 +7135,7 @@
                           <a:ea typeface="Calibri" pitchFamily="34" charset="-122"/>
                           <a:cs typeface="Calibri" pitchFamily="34" charset="-120"/>
                         </a:rPr>
-                        <a:t>In Foundry</a:t>
+                        <a:t>Yours</a:t>
                       </a:r>
                       <a:endParaRPr lang="en-US" sz="1200" dirty="0">
                         <a:latin typeface="Calibri" charset="0"/>
@@ -6218,7 +7187,7 @@
                   </a:tcPr>
                 </a:tc>
               </a:tr>
-              <a:tr h="365760">
+              <a:tr h="384048">
                 <a:tc>
                   <a:txBody>
                     <a:bodyPr/>
@@ -6236,7 +7205,7 @@
                           <a:ea typeface="Calibri" pitchFamily="34" charset="-122"/>
                           <a:cs typeface="Calibri" pitchFamily="34" charset="-120"/>
                         </a:rPr>
-                        <a:t>Thread state</a:t>
+                        <a:t>Compute to manage</a:t>
                       </a:r>
                       <a:endParaRPr lang="en-US" sz="1200" dirty="0">
                         <a:latin typeface="Calibri" charset="0"/>
@@ -6304,7 +7273,7 @@
                           <a:ea typeface="Calibri" pitchFamily="34" charset="-122"/>
                           <a:cs typeface="Calibri" pitchFamily="34" charset="-120"/>
                         </a:rPr>
-                        <a:t>In-process</a:t>
+                        <a:t>None</a:t>
                       </a:r>
                       <a:endParaRPr lang="en-US" sz="1200" dirty="0">
                         <a:latin typeface="Calibri" charset="0"/>
@@ -6372,7 +7341,7 @@
                           <a:ea typeface="Calibri" pitchFamily="34" charset="-122"/>
                           <a:cs typeface="Calibri" pitchFamily="34" charset="-120"/>
                         </a:rPr>
-                        <a:t>Server-managed</a:t>
+                        <a:t>Yours</a:t>
                       </a:r>
                       <a:endParaRPr lang="en-US" sz="1200" dirty="0">
                         <a:latin typeface="Calibri" charset="0"/>
@@ -6440,7 +7409,7 @@
                           <a:ea typeface="Calibri" pitchFamily="34" charset="-122"/>
                           <a:cs typeface="Calibri" pitchFamily="34" charset="-120"/>
                         </a:rPr>
-                        <a:t>Server-managed</a:t>
+                        <a:t>Container (Foundry)</a:t>
                       </a:r>
                       <a:endParaRPr lang="en-US" sz="1200" dirty="0">
                         <a:latin typeface="Calibri" charset="0"/>
@@ -6492,7 +7461,7 @@
                   </a:tcPr>
                 </a:tc>
               </a:tr>
-              <a:tr h="365760">
+              <a:tr h="384048">
                 <a:tc>
                   <a:txBody>
                     <a:bodyPr/>
@@ -6510,75 +7479,7 @@
                           <a:ea typeface="Calibri" pitchFamily="34" charset="-122"/>
                           <a:cs typeface="Calibri" pitchFamily="34" charset="-120"/>
                         </a:rPr>
-                        <a:t>Versioning built in</a:t>
-                      </a:r>
-                      <a:endParaRPr lang="en-US" sz="1200" dirty="0">
-                        <a:latin typeface="Calibri" charset="0"/>
-                        <a:ea typeface="Calibri" charset="0"/>
-                        <a:cs typeface="Calibri" charset="0"/>
-                      </a:endParaRPr>
-                    </a:p>
-                  </a:txBody>
-                  <a:tcPr marL="54864" marR="54864" marT="54864" marB="54864" anchor="ctr">
-                    <a:lnL w="6350" cap="flat" cmpd="sng" algn="ctr">
-                      <a:solidFill>
-                        <a:srgbClr val="D1D5DB"/>
-                      </a:solidFill>
-                      <a:prstDash val="solid"/>
-                      <a:round/>
-                      <a:headEnd type="none" w="med" len="med"/>
-                      <a:tailEnd type="none" w="med" len="med"/>
-                    </a:lnL>
-                    <a:lnR w="6350" cap="flat" cmpd="sng" algn="ctr">
-                      <a:solidFill>
-                        <a:srgbClr val="D1D5DB"/>
-                      </a:solidFill>
-                      <a:prstDash val="solid"/>
-                      <a:round/>
-                      <a:headEnd type="none" w="med" len="med"/>
-                      <a:tailEnd type="none" w="med" len="med"/>
-                    </a:lnR>
-                    <a:lnT w="6350" cap="flat" cmpd="sng" algn="ctr">
-                      <a:solidFill>
-                        <a:srgbClr val="D1D5DB"/>
-                      </a:solidFill>
-                      <a:prstDash val="solid"/>
-                      <a:round/>
-                      <a:headEnd type="none" w="med" len="med"/>
-                      <a:tailEnd type="none" w="med" len="med"/>
-                    </a:lnT>
-                    <a:lnB w="6350" cap="flat" cmpd="sng" algn="ctr">
-                      <a:solidFill>
-                        <a:srgbClr val="D1D5DB"/>
-                      </a:solidFill>
-                      <a:prstDash val="solid"/>
-                      <a:round/>
-                      <a:headEnd type="none" w="med" len="med"/>
-                      <a:tailEnd type="none" w="med" len="med"/>
-                    </a:lnB>
-                    <a:solidFill>
-                      <a:srgbClr val="FFFFFF"/>
-                    </a:solidFill>
-                  </a:tcPr>
-                </a:tc>
-                <a:tc>
-                  <a:txBody>
-                    <a:bodyPr/>
-                    <a:lstStyle/>
-                    <a:p>
-                      <a:pPr indent="0" marL="0">
-                        <a:buNone/>
-                      </a:pPr>
-                      <a:r>
-                        <a:rPr lang="en-US" sz="1200" dirty="0">
-                          <a:solidFill>
-                            <a:srgbClr val="212121"/>
-                          </a:solidFill>
-                          <a:latin typeface="Calibri" pitchFamily="34" charset="0"/>
-                          <a:ea typeface="Calibri" pitchFamily="34" charset="-122"/>
-                          <a:cs typeface="Calibri" pitchFamily="34" charset="-120"/>
-                        </a:rPr>
-                        <a:t>You handle it</a:t>
+                        <a:t>Managed endpoint</a:t>
                       </a:r>
                       <a:endParaRPr lang="en-US" sz="1200" dirty="0">
                         <a:latin typeface="Calibri" charset="0"/>
@@ -6714,7 +7615,7 @@
                           <a:ea typeface="Calibri" pitchFamily="34" charset="-122"/>
                           <a:cs typeface="Calibri" pitchFamily="34" charset="-120"/>
                         </a:rPr>
-                        <a:t>No</a:t>
+                        <a:t>You provide</a:t>
                       </a:r>
                       <a:endParaRPr lang="en-US" sz="1200" dirty="0">
                         <a:latin typeface="Calibri" charset="0"/>
@@ -6762,76 +7663,6 @@
                     </a:lnB>
                     <a:solidFill>
                       <a:srgbClr val="FFFFFF"/>
-                    </a:solidFill>
-                  </a:tcPr>
-                </a:tc>
-              </a:tr>
-              <a:tr h="365760">
-                <a:tc>
-                  <a:txBody>
-                    <a:bodyPr/>
-                    <a:lstStyle/>
-                    <a:p>
-                      <a:pPr indent="0" marL="0">
-                        <a:buNone/>
-                      </a:pPr>
-                      <a:r>
-                        <a:rPr lang="en-US" sz="1200" dirty="0">
-                          <a:solidFill>
-                            <a:srgbClr val="212121"/>
-                          </a:solidFill>
-                          <a:latin typeface="Calibri" pitchFamily="34" charset="0"/>
-                          <a:ea typeface="Calibri" pitchFamily="34" charset="-122"/>
-                          <a:cs typeface="Calibri" pitchFamily="34" charset="-120"/>
-                        </a:rPr>
-                        <a:t>Shared across apps</a:t>
-                      </a:r>
-                      <a:endParaRPr lang="en-US" sz="1200" dirty="0">
-                        <a:latin typeface="Calibri" charset="0"/>
-                        <a:ea typeface="Calibri" charset="0"/>
-                        <a:cs typeface="Calibri" charset="0"/>
-                      </a:endParaRPr>
-                    </a:p>
-                  </a:txBody>
-                  <a:tcPr marL="54864" marR="54864" marT="54864" marB="54864" anchor="ctr">
-                    <a:lnL w="6350" cap="flat" cmpd="sng" algn="ctr">
-                      <a:solidFill>
-                        <a:srgbClr val="D1D5DB"/>
-                      </a:solidFill>
-                      <a:prstDash val="solid"/>
-                      <a:round/>
-                      <a:headEnd type="none" w="med" len="med"/>
-                      <a:tailEnd type="none" w="med" len="med"/>
-                    </a:lnL>
-                    <a:lnR w="6350" cap="flat" cmpd="sng" algn="ctr">
-                      <a:solidFill>
-                        <a:srgbClr val="D1D5DB"/>
-                      </a:solidFill>
-                      <a:prstDash val="solid"/>
-                      <a:round/>
-                      <a:headEnd type="none" w="med" len="med"/>
-                      <a:tailEnd type="none" w="med" len="med"/>
-                    </a:lnR>
-                    <a:lnT w="6350" cap="flat" cmpd="sng" algn="ctr">
-                      <a:solidFill>
-                        <a:srgbClr val="D1D5DB"/>
-                      </a:solidFill>
-                      <a:prstDash val="solid"/>
-                      <a:round/>
-                      <a:headEnd type="none" w="med" len="med"/>
-                      <a:tailEnd type="none" w="med" len="med"/>
-                    </a:lnT>
-                    <a:lnB w="6350" cap="flat" cmpd="sng" algn="ctr">
-                      <a:solidFill>
-                        <a:srgbClr val="D1D5DB"/>
-                      </a:solidFill>
-                      <a:prstDash val="solid"/>
-                      <a:round/>
-                      <a:headEnd type="none" w="med" len="med"/>
-                      <a:tailEnd type="none" w="med" len="med"/>
-                    </a:lnB>
-                    <a:solidFill>
-                      <a:srgbClr val="F3F4F6"/>
                     </a:solidFill>
                   </a:tcPr>
                 </a:tc>
@@ -6852,7 +7683,77 @@
                           <a:ea typeface="Calibri" pitchFamily="34" charset="-122"/>
                           <a:cs typeface="Calibri" pitchFamily="34" charset="-120"/>
                         </a:rPr>
-                        <a:t>Duplicate code</a:t>
+                        <a:t>Yes</a:t>
+                      </a:r>
+                      <a:endParaRPr lang="en-US" sz="1200" dirty="0">
+                        <a:latin typeface="Calibri" charset="0"/>
+                        <a:ea typeface="Calibri" charset="0"/>
+                        <a:cs typeface="Calibri" charset="0"/>
+                      </a:endParaRPr>
+                    </a:p>
+                  </a:txBody>
+                  <a:tcPr marL="54864" marR="54864" marT="54864" marB="54864" anchor="ctr">
+                    <a:lnL w="6350" cap="flat" cmpd="sng" algn="ctr">
+                      <a:solidFill>
+                        <a:srgbClr val="D1D5DB"/>
+                      </a:solidFill>
+                      <a:prstDash val="solid"/>
+                      <a:round/>
+                      <a:headEnd type="none" w="med" len="med"/>
+                      <a:tailEnd type="none" w="med" len="med"/>
+                    </a:lnL>
+                    <a:lnR w="6350" cap="flat" cmpd="sng" algn="ctr">
+                      <a:solidFill>
+                        <a:srgbClr val="D1D5DB"/>
+                      </a:solidFill>
+                      <a:prstDash val="solid"/>
+                      <a:round/>
+                      <a:headEnd type="none" w="med" len="med"/>
+                      <a:tailEnd type="none" w="med" len="med"/>
+                    </a:lnR>
+                    <a:lnT w="6350" cap="flat" cmpd="sng" algn="ctr">
+                      <a:solidFill>
+                        <a:srgbClr val="D1D5DB"/>
+                      </a:solidFill>
+                      <a:prstDash val="solid"/>
+                      <a:round/>
+                      <a:headEnd type="none" w="med" len="med"/>
+                      <a:tailEnd type="none" w="med" len="med"/>
+                    </a:lnT>
+                    <a:lnB w="6350" cap="flat" cmpd="sng" algn="ctr">
+                      <a:solidFill>
+                        <a:srgbClr val="D1D5DB"/>
+                      </a:solidFill>
+                      <a:prstDash val="solid"/>
+                      <a:round/>
+                      <a:headEnd type="none" w="med" len="med"/>
+                      <a:tailEnd type="none" w="med" len="med"/>
+                    </a:lnB>
+                    <a:solidFill>
+                      <a:srgbClr val="FFFFFF"/>
+                    </a:solidFill>
+                  </a:tcPr>
+                </a:tc>
+              </a:tr>
+              <a:tr h="384048">
+                <a:tc>
+                  <a:txBody>
+                    <a:bodyPr/>
+                    <a:lstStyle/>
+                    <a:p>
+                      <a:pPr indent="0" marL="0">
+                        <a:buNone/>
+                      </a:pPr>
+                      <a:r>
+                        <a:rPr lang="en-US" sz="1200" dirty="0">
+                          <a:solidFill>
+                            <a:srgbClr val="212121"/>
+                          </a:solidFill>
+                          <a:latin typeface="Calibri" pitchFamily="34" charset="0"/>
+                          <a:ea typeface="Calibri" pitchFamily="34" charset="-122"/>
+                          <a:cs typeface="Calibri" pitchFamily="34" charset="-120"/>
+                        </a:rPr>
+                        <a:t>Autoscale</a:t>
                       </a:r>
                       <a:endParaRPr lang="en-US" sz="1200" dirty="0">
                         <a:latin typeface="Calibri" charset="0"/>
@@ -6988,6 +7889,74 @@
                           <a:ea typeface="Calibri" pitchFamily="34" charset="-122"/>
                           <a:cs typeface="Calibri" pitchFamily="34" charset="-120"/>
                         </a:rPr>
+                        <a:t>You handle</a:t>
+                      </a:r>
+                      <a:endParaRPr lang="en-US" sz="1200" dirty="0">
+                        <a:latin typeface="Calibri" charset="0"/>
+                        <a:ea typeface="Calibri" charset="0"/>
+                        <a:cs typeface="Calibri" charset="0"/>
+                      </a:endParaRPr>
+                    </a:p>
+                  </a:txBody>
+                  <a:tcPr marL="54864" marR="54864" marT="54864" marB="54864" anchor="ctr">
+                    <a:lnL w="6350" cap="flat" cmpd="sng" algn="ctr">
+                      <a:solidFill>
+                        <a:srgbClr val="D1D5DB"/>
+                      </a:solidFill>
+                      <a:prstDash val="solid"/>
+                      <a:round/>
+                      <a:headEnd type="none" w="med" len="med"/>
+                      <a:tailEnd type="none" w="med" len="med"/>
+                    </a:lnL>
+                    <a:lnR w="6350" cap="flat" cmpd="sng" algn="ctr">
+                      <a:solidFill>
+                        <a:srgbClr val="D1D5DB"/>
+                      </a:solidFill>
+                      <a:prstDash val="solid"/>
+                      <a:round/>
+                      <a:headEnd type="none" w="med" len="med"/>
+                      <a:tailEnd type="none" w="med" len="med"/>
+                    </a:lnR>
+                    <a:lnT w="6350" cap="flat" cmpd="sng" algn="ctr">
+                      <a:solidFill>
+                        <a:srgbClr val="D1D5DB"/>
+                      </a:solidFill>
+                      <a:prstDash val="solid"/>
+                      <a:round/>
+                      <a:headEnd type="none" w="med" len="med"/>
+                      <a:tailEnd type="none" w="med" len="med"/>
+                    </a:lnT>
+                    <a:lnB w="6350" cap="flat" cmpd="sng" algn="ctr">
+                      <a:solidFill>
+                        <a:srgbClr val="D1D5DB"/>
+                      </a:solidFill>
+                      <a:prstDash val="solid"/>
+                      <a:round/>
+                      <a:headEnd type="none" w="med" len="med"/>
+                      <a:tailEnd type="none" w="med" len="med"/>
+                    </a:lnB>
+                    <a:solidFill>
+                      <a:srgbClr val="F3F4F6"/>
+                    </a:solidFill>
+                  </a:tcPr>
+                </a:tc>
+                <a:tc>
+                  <a:txBody>
+                    <a:bodyPr/>
+                    <a:lstStyle/>
+                    <a:p>
+                      <a:pPr indent="0" marL="0">
+                        <a:buNone/>
+                      </a:pPr>
+                      <a:r>
+                        <a:rPr lang="en-US" sz="1200" dirty="0">
+                          <a:solidFill>
+                            <a:srgbClr val="212121"/>
+                          </a:solidFill>
+                          <a:latin typeface="Calibri" pitchFamily="34" charset="0"/>
+                          <a:ea typeface="Calibri" pitchFamily="34" charset="-122"/>
+                          <a:cs typeface="Calibri" pitchFamily="34" charset="-120"/>
+                        </a:rPr>
                         <a:t>Yes</a:t>
                       </a:r>
                       <a:endParaRPr lang="en-US" sz="1200" dirty="0">
@@ -7040,7 +8009,281 @@
                   </a:tcPr>
                 </a:tc>
               </a:tr>
-              <a:tr h="365760">
+              <a:tr h="384048">
+                <a:tc>
+                  <a:txBody>
+                    <a:bodyPr/>
+                    <a:lstStyle/>
+                    <a:p>
+                      <a:pPr indent="0" marL="0">
+                        <a:buNone/>
+                      </a:pPr>
+                      <a:r>
+                        <a:rPr lang="en-US" sz="1200" dirty="0">
+                          <a:solidFill>
+                            <a:srgbClr val="212121"/>
+                          </a:solidFill>
+                          <a:latin typeface="Calibri" pitchFamily="34" charset="0"/>
+                          <a:ea typeface="Calibri" pitchFamily="34" charset="-122"/>
+                          <a:cs typeface="Calibri" pitchFamily="34" charset="-120"/>
+                        </a:rPr>
+                        <a:t>Agent identity (Entra)</a:t>
+                      </a:r>
+                      <a:endParaRPr lang="en-US" sz="1200" dirty="0">
+                        <a:latin typeface="Calibri" charset="0"/>
+                        <a:ea typeface="Calibri" charset="0"/>
+                        <a:cs typeface="Calibri" charset="0"/>
+                      </a:endParaRPr>
+                    </a:p>
+                  </a:txBody>
+                  <a:tcPr marL="54864" marR="54864" marT="54864" marB="54864" anchor="ctr">
+                    <a:lnL w="6350" cap="flat" cmpd="sng" algn="ctr">
+                      <a:solidFill>
+                        <a:srgbClr val="D1D5DB"/>
+                      </a:solidFill>
+                      <a:prstDash val="solid"/>
+                      <a:round/>
+                      <a:headEnd type="none" w="med" len="med"/>
+                      <a:tailEnd type="none" w="med" len="med"/>
+                    </a:lnL>
+                    <a:lnR w="6350" cap="flat" cmpd="sng" algn="ctr">
+                      <a:solidFill>
+                        <a:srgbClr val="D1D5DB"/>
+                      </a:solidFill>
+                      <a:prstDash val="solid"/>
+                      <a:round/>
+                      <a:headEnd type="none" w="med" len="med"/>
+                      <a:tailEnd type="none" w="med" len="med"/>
+                    </a:lnR>
+                    <a:lnT w="6350" cap="flat" cmpd="sng" algn="ctr">
+                      <a:solidFill>
+                        <a:srgbClr val="D1D5DB"/>
+                      </a:solidFill>
+                      <a:prstDash val="solid"/>
+                      <a:round/>
+                      <a:headEnd type="none" w="med" len="med"/>
+                      <a:tailEnd type="none" w="med" len="med"/>
+                    </a:lnT>
+                    <a:lnB w="6350" cap="flat" cmpd="sng" algn="ctr">
+                      <a:solidFill>
+                        <a:srgbClr val="D1D5DB"/>
+                      </a:solidFill>
+                      <a:prstDash val="solid"/>
+                      <a:round/>
+                      <a:headEnd type="none" w="med" len="med"/>
+                      <a:tailEnd type="none" w="med" len="med"/>
+                    </a:lnB>
+                    <a:solidFill>
+                      <a:srgbClr val="FFFFFF"/>
+                    </a:solidFill>
+                  </a:tcPr>
+                </a:tc>
+                <a:tc>
+                  <a:txBody>
+                    <a:bodyPr/>
+                    <a:lstStyle/>
+                    <a:p>
+                      <a:pPr indent="0" marL="0">
+                        <a:buNone/>
+                      </a:pPr>
+                      <a:r>
+                        <a:rPr lang="en-US" sz="1200" dirty="0">
+                          <a:solidFill>
+                            <a:srgbClr val="212121"/>
+                          </a:solidFill>
+                          <a:latin typeface="Calibri" pitchFamily="34" charset="0"/>
+                          <a:ea typeface="Calibri" pitchFamily="34" charset="-122"/>
+                          <a:cs typeface="Calibri" pitchFamily="34" charset="-120"/>
+                        </a:rPr>
+                        <a:t>Yes</a:t>
+                      </a:r>
+                      <a:endParaRPr lang="en-US" sz="1200" dirty="0">
+                        <a:latin typeface="Calibri" charset="0"/>
+                        <a:ea typeface="Calibri" charset="0"/>
+                        <a:cs typeface="Calibri" charset="0"/>
+                      </a:endParaRPr>
+                    </a:p>
+                  </a:txBody>
+                  <a:tcPr marL="54864" marR="54864" marT="54864" marB="54864" anchor="ctr">
+                    <a:lnL w="6350" cap="flat" cmpd="sng" algn="ctr">
+                      <a:solidFill>
+                        <a:srgbClr val="D1D5DB"/>
+                      </a:solidFill>
+                      <a:prstDash val="solid"/>
+                      <a:round/>
+                      <a:headEnd type="none" w="med" len="med"/>
+                      <a:tailEnd type="none" w="med" len="med"/>
+                    </a:lnL>
+                    <a:lnR w="6350" cap="flat" cmpd="sng" algn="ctr">
+                      <a:solidFill>
+                        <a:srgbClr val="D1D5DB"/>
+                      </a:solidFill>
+                      <a:prstDash val="solid"/>
+                      <a:round/>
+                      <a:headEnd type="none" w="med" len="med"/>
+                      <a:tailEnd type="none" w="med" len="med"/>
+                    </a:lnR>
+                    <a:lnT w="6350" cap="flat" cmpd="sng" algn="ctr">
+                      <a:solidFill>
+                        <a:srgbClr val="D1D5DB"/>
+                      </a:solidFill>
+                      <a:prstDash val="solid"/>
+                      <a:round/>
+                      <a:headEnd type="none" w="med" len="med"/>
+                      <a:tailEnd type="none" w="med" len="med"/>
+                    </a:lnT>
+                    <a:lnB w="6350" cap="flat" cmpd="sng" algn="ctr">
+                      <a:solidFill>
+                        <a:srgbClr val="D1D5DB"/>
+                      </a:solidFill>
+                      <a:prstDash val="solid"/>
+                      <a:round/>
+                      <a:headEnd type="none" w="med" len="med"/>
+                      <a:tailEnd type="none" w="med" len="med"/>
+                    </a:lnB>
+                    <a:solidFill>
+                      <a:srgbClr val="FFFFFF"/>
+                    </a:solidFill>
+                  </a:tcPr>
+                </a:tc>
+                <a:tc>
+                  <a:txBody>
+                    <a:bodyPr/>
+                    <a:lstStyle/>
+                    <a:p>
+                      <a:pPr indent="0" marL="0">
+                        <a:buNone/>
+                      </a:pPr>
+                      <a:r>
+                        <a:rPr lang="en-US" sz="1200" dirty="0">
+                          <a:solidFill>
+                            <a:srgbClr val="212121"/>
+                          </a:solidFill>
+                          <a:latin typeface="Calibri" pitchFamily="34" charset="0"/>
+                          <a:ea typeface="Calibri" pitchFamily="34" charset="-122"/>
+                          <a:cs typeface="Calibri" pitchFamily="34" charset="-120"/>
+                        </a:rPr>
+                        <a:t>You handle</a:t>
+                      </a:r>
+                      <a:endParaRPr lang="en-US" sz="1200" dirty="0">
+                        <a:latin typeface="Calibri" charset="0"/>
+                        <a:ea typeface="Calibri" charset="0"/>
+                        <a:cs typeface="Calibri" charset="0"/>
+                      </a:endParaRPr>
+                    </a:p>
+                  </a:txBody>
+                  <a:tcPr marL="54864" marR="54864" marT="54864" marB="54864" anchor="ctr">
+                    <a:lnL w="6350" cap="flat" cmpd="sng" algn="ctr">
+                      <a:solidFill>
+                        <a:srgbClr val="D1D5DB"/>
+                      </a:solidFill>
+                      <a:prstDash val="solid"/>
+                      <a:round/>
+                      <a:headEnd type="none" w="med" len="med"/>
+                      <a:tailEnd type="none" w="med" len="med"/>
+                    </a:lnL>
+                    <a:lnR w="6350" cap="flat" cmpd="sng" algn="ctr">
+                      <a:solidFill>
+                        <a:srgbClr val="D1D5DB"/>
+                      </a:solidFill>
+                      <a:prstDash val="solid"/>
+                      <a:round/>
+                      <a:headEnd type="none" w="med" len="med"/>
+                      <a:tailEnd type="none" w="med" len="med"/>
+                    </a:lnR>
+                    <a:lnT w="6350" cap="flat" cmpd="sng" algn="ctr">
+                      <a:solidFill>
+                        <a:srgbClr val="D1D5DB"/>
+                      </a:solidFill>
+                      <a:prstDash val="solid"/>
+                      <a:round/>
+                      <a:headEnd type="none" w="med" len="med"/>
+                      <a:tailEnd type="none" w="med" len="med"/>
+                    </a:lnT>
+                    <a:lnB w="6350" cap="flat" cmpd="sng" algn="ctr">
+                      <a:solidFill>
+                        <a:srgbClr val="D1D5DB"/>
+                      </a:solidFill>
+                      <a:prstDash val="solid"/>
+                      <a:round/>
+                      <a:headEnd type="none" w="med" len="med"/>
+                      <a:tailEnd type="none" w="med" len="med"/>
+                    </a:lnB>
+                    <a:solidFill>
+                      <a:srgbClr val="FFFFFF"/>
+                    </a:solidFill>
+                  </a:tcPr>
+                </a:tc>
+                <a:tc>
+                  <a:txBody>
+                    <a:bodyPr/>
+                    <a:lstStyle/>
+                    <a:p>
+                      <a:pPr indent="0" marL="0">
+                        <a:buNone/>
+                      </a:pPr>
+                      <a:r>
+                        <a:rPr lang="en-US" sz="1200" dirty="0">
+                          <a:solidFill>
+                            <a:srgbClr val="212121"/>
+                          </a:solidFill>
+                          <a:latin typeface="Calibri" pitchFamily="34" charset="0"/>
+                          <a:ea typeface="Calibri" pitchFamily="34" charset="-122"/>
+                          <a:cs typeface="Calibri" pitchFamily="34" charset="-120"/>
+                        </a:rPr>
+                        <a:t>Yes, dedicated</a:t>
+                      </a:r>
+                      <a:endParaRPr lang="en-US" sz="1200" dirty="0">
+                        <a:latin typeface="Calibri" charset="0"/>
+                        <a:ea typeface="Calibri" charset="0"/>
+                        <a:cs typeface="Calibri" charset="0"/>
+                      </a:endParaRPr>
+                    </a:p>
+                  </a:txBody>
+                  <a:tcPr marL="54864" marR="54864" marT="54864" marB="54864" anchor="ctr">
+                    <a:lnL w="6350" cap="flat" cmpd="sng" algn="ctr">
+                      <a:solidFill>
+                        <a:srgbClr val="D1D5DB"/>
+                      </a:solidFill>
+                      <a:prstDash val="solid"/>
+                      <a:round/>
+                      <a:headEnd type="none" w="med" len="med"/>
+                      <a:tailEnd type="none" w="med" len="med"/>
+                    </a:lnL>
+                    <a:lnR w="6350" cap="flat" cmpd="sng" algn="ctr">
+                      <a:solidFill>
+                        <a:srgbClr val="D1D5DB"/>
+                      </a:solidFill>
+                      <a:prstDash val="solid"/>
+                      <a:round/>
+                      <a:headEnd type="none" w="med" len="med"/>
+                      <a:tailEnd type="none" w="med" len="med"/>
+                    </a:lnR>
+                    <a:lnT w="6350" cap="flat" cmpd="sng" algn="ctr">
+                      <a:solidFill>
+                        <a:srgbClr val="D1D5DB"/>
+                      </a:solidFill>
+                      <a:prstDash val="solid"/>
+                      <a:round/>
+                      <a:headEnd type="none" w="med" len="med"/>
+                      <a:tailEnd type="none" w="med" len="med"/>
+                    </a:lnT>
+                    <a:lnB w="6350" cap="flat" cmpd="sng" algn="ctr">
+                      <a:solidFill>
+                        <a:srgbClr val="D1D5DB"/>
+                      </a:solidFill>
+                      <a:prstDash val="solid"/>
+                      <a:round/>
+                      <a:headEnd type="none" w="med" len="med"/>
+                      <a:tailEnd type="none" w="med" len="med"/>
+                    </a:lnB>
+                    <a:solidFill>
+                      <a:srgbClr val="FFFFFF"/>
+                    </a:solidFill>
+                  </a:tcPr>
+                </a:tc>
+              </a:tr>
+              <a:tr h="384048">
                 <a:tc>
                   <a:txBody>
                     <a:bodyPr/>
@@ -7105,7 +8348,7 @@
                       <a:tailEnd type="none" w="med" len="med"/>
                     </a:lnB>
                     <a:solidFill>
-                      <a:srgbClr val="FFFFFF"/>
+                      <a:srgbClr val="F3F4F6"/>
                     </a:solidFill>
                   </a:tcPr>
                 </a:tc>
@@ -7126,7 +8369,7 @@
                           <a:ea typeface="Calibri" pitchFamily="34" charset="-122"/>
                           <a:cs typeface="Calibri" pitchFamily="34" charset="-120"/>
                         </a:rPr>
-                        <a:t>Fast (redeploy app)</a:t>
+                        <a:t>Portal + publish</a:t>
                       </a:r>
                       <a:endParaRPr lang="en-US" sz="1200" dirty="0">
                         <a:latin typeface="Calibri" charset="0"/>
@@ -7173,7 +8416,7 @@
                       <a:tailEnd type="none" w="med" len="med"/>
                     </a:lnB>
                     <a:solidFill>
-                      <a:srgbClr val="FFFFFF"/>
+                      <a:srgbClr val="F3F4F6"/>
                     </a:solidFill>
                   </a:tcPr>
                 </a:tc>
@@ -7194,7 +8437,7 @@
                           <a:ea typeface="Calibri" pitchFamily="34" charset="-122"/>
                           <a:cs typeface="Calibri" pitchFamily="34" charset="-120"/>
                         </a:rPr>
-                        <a:t>Portal + new version</a:t>
+                        <a:t>Edit + restart</a:t>
                       </a:r>
                       <a:endParaRPr lang="en-US" sz="1200" dirty="0">
                         <a:latin typeface="Calibri" charset="0"/>
@@ -7241,7 +8484,7 @@
                       <a:tailEnd type="none" w="med" len="med"/>
                     </a:lnB>
                     <a:solidFill>
-                      <a:srgbClr val="FFFFFF"/>
+                      <a:srgbClr val="F3F4F6"/>
                     </a:solidFill>
                   </a:tcPr>
                 </a:tc>
@@ -7262,7 +8505,7 @@
                           <a:ea typeface="Calibri" pitchFamily="34" charset="-122"/>
                           <a:cs typeface="Calibri" pitchFamily="34" charset="-120"/>
                         </a:rPr>
-                        <a:t>Fastest (portal edit)</a:t>
+                        <a:t>Portal upload / redeploy</a:t>
                       </a:r>
                       <a:endParaRPr lang="en-US" sz="1200" dirty="0">
                         <a:latin typeface="Calibri" charset="0"/>
@@ -7309,12 +8552,12 @@
                       <a:tailEnd type="none" w="med" len="med"/>
                     </a:lnB>
                     <a:solidFill>
-                      <a:srgbClr val="FFFFFF"/>
+                      <a:srgbClr val="F3F4F6"/>
                     </a:solidFill>
                   </a:tcPr>
                 </a:tc>
               </a:tr>
-              <a:tr h="365760">
+              <a:tr h="384048">
                 <a:tc>
                   <a:txBody>
                     <a:bodyPr/>
@@ -7379,7 +8622,75 @@
                       <a:tailEnd type="none" w="med" len="med"/>
                     </a:lnB>
                     <a:solidFill>
-                      <a:srgbClr val="F3F4F6"/>
+                      <a:srgbClr val="FFFFFF"/>
+                    </a:solidFill>
+                  </a:tcPr>
+                </a:tc>
+                <a:tc>
+                  <a:txBody>
+                    <a:bodyPr/>
+                    <a:lstStyle/>
+                    <a:p>
+                      <a:pPr indent="0" marL="0">
+                        <a:buNone/>
+                      </a:pPr>
+                      <a:r>
+                        <a:rPr lang="en-US" sz="1200" dirty="0">
+                          <a:solidFill>
+                            <a:srgbClr val="212121"/>
+                          </a:solidFill>
+                          <a:latin typeface="Calibri" pitchFamily="34" charset="0"/>
+                          <a:ea typeface="Calibri" pitchFamily="34" charset="-122"/>
+                          <a:cs typeface="Calibri" pitchFamily="34" charset="-120"/>
+                        </a:rPr>
+                        <a:t>Low</a:t>
+                      </a:r>
+                      <a:endParaRPr lang="en-US" sz="1200" dirty="0">
+                        <a:latin typeface="Calibri" charset="0"/>
+                        <a:ea typeface="Calibri" charset="0"/>
+                        <a:cs typeface="Calibri" charset="0"/>
+                      </a:endParaRPr>
+                    </a:p>
+                  </a:txBody>
+                  <a:tcPr marL="54864" marR="54864" marT="54864" marB="54864" anchor="ctr">
+                    <a:lnL w="6350" cap="flat" cmpd="sng" algn="ctr">
+                      <a:solidFill>
+                        <a:srgbClr val="D1D5DB"/>
+                      </a:solidFill>
+                      <a:prstDash val="solid"/>
+                      <a:round/>
+                      <a:headEnd type="none" w="med" len="med"/>
+                      <a:tailEnd type="none" w="med" len="med"/>
+                    </a:lnL>
+                    <a:lnR w="6350" cap="flat" cmpd="sng" algn="ctr">
+                      <a:solidFill>
+                        <a:srgbClr val="D1D5DB"/>
+                      </a:solidFill>
+                      <a:prstDash val="solid"/>
+                      <a:round/>
+                      <a:headEnd type="none" w="med" len="med"/>
+                      <a:tailEnd type="none" w="med" len="med"/>
+                    </a:lnR>
+                    <a:lnT w="6350" cap="flat" cmpd="sng" algn="ctr">
+                      <a:solidFill>
+                        <a:srgbClr val="D1D5DB"/>
+                      </a:solidFill>
+                      <a:prstDash val="solid"/>
+                      <a:round/>
+                      <a:headEnd type="none" w="med" len="med"/>
+                      <a:tailEnd type="none" w="med" len="med"/>
+                    </a:lnT>
+                    <a:lnB w="6350" cap="flat" cmpd="sng" algn="ctr">
+                      <a:solidFill>
+                        <a:srgbClr val="D1D5DB"/>
+                      </a:solidFill>
+                      <a:prstDash val="solid"/>
+                      <a:round/>
+                      <a:headEnd type="none" w="med" len="med"/>
+                      <a:tailEnd type="none" w="med" len="med"/>
+                    </a:lnB>
+                    <a:solidFill>
+                      <a:srgbClr val="FFFFFF"/>
                     </a:solidFill>
                   </a:tcPr>
                 </a:tc>
@@ -7447,7 +8758,7 @@
                       <a:tailEnd type="none" w="med" len="med"/>
                     </a:lnB>
                     <a:solidFill>
-                      <a:srgbClr val="F3F4F6"/>
+                      <a:srgbClr val="FFFFFF"/>
                     </a:solidFill>
                   </a:tcPr>
                 </a:tc>
@@ -7468,7 +8779,7 @@
                           <a:ea typeface="Calibri" pitchFamily="34" charset="-122"/>
                           <a:cs typeface="Calibri" pitchFamily="34" charset="-120"/>
                         </a:rPr>
-                        <a:t>Lower</a:t>
+                        <a:t>Medium</a:t>
                       </a:r>
                       <a:endParaRPr lang="en-US" sz="1200" dirty="0">
                         <a:latin typeface="Calibri" charset="0"/>
@@ -7515,75 +8826,7 @@
                       <a:tailEnd type="none" w="med" len="med"/>
                     </a:lnB>
                     <a:solidFill>
-                      <a:srgbClr val="F3F4F6"/>
-                    </a:solidFill>
-                  </a:tcPr>
-                </a:tc>
-                <a:tc>
-                  <a:txBody>
-                    <a:bodyPr/>
-                    <a:lstStyle/>
-                    <a:p>
-                      <a:pPr indent="0" marL="0">
-                        <a:buNone/>
-                      </a:pPr>
-                      <a:r>
-                        <a:rPr lang="en-US" sz="1200" dirty="0">
-                          <a:solidFill>
-                            <a:srgbClr val="212121"/>
-                          </a:solidFill>
-                          <a:latin typeface="Calibri" pitchFamily="34" charset="0"/>
-                          <a:ea typeface="Calibri" pitchFamily="34" charset="-122"/>
-                          <a:cs typeface="Calibri" pitchFamily="34" charset="-120"/>
-                        </a:rPr>
-                        <a:t>Lower</a:t>
-                      </a:r>
-                      <a:endParaRPr lang="en-US" sz="1200" dirty="0">
-                        <a:latin typeface="Calibri" charset="0"/>
-                        <a:ea typeface="Calibri" charset="0"/>
-                        <a:cs typeface="Calibri" charset="0"/>
-                      </a:endParaRPr>
-                    </a:p>
-                  </a:txBody>
-                  <a:tcPr marL="54864" marR="54864" marT="54864" marB="54864" anchor="ctr">
-                    <a:lnL w="6350" cap="flat" cmpd="sng" algn="ctr">
-                      <a:solidFill>
-                        <a:srgbClr val="D1D5DB"/>
-                      </a:solidFill>
-                      <a:prstDash val="solid"/>
-                      <a:round/>
-                      <a:headEnd type="none" w="med" len="med"/>
-                      <a:tailEnd type="none" w="med" len="med"/>
-                    </a:lnL>
-                    <a:lnR w="6350" cap="flat" cmpd="sng" algn="ctr">
-                      <a:solidFill>
-                        <a:srgbClr val="D1D5DB"/>
-                      </a:solidFill>
-                      <a:prstDash val="solid"/>
-                      <a:round/>
-                      <a:headEnd type="none" w="med" len="med"/>
-                      <a:tailEnd type="none" w="med" len="med"/>
-                    </a:lnR>
-                    <a:lnT w="6350" cap="flat" cmpd="sng" algn="ctr">
-                      <a:solidFill>
-                        <a:srgbClr val="D1D5DB"/>
-                      </a:solidFill>
-                      <a:prstDash val="solid"/>
-                      <a:round/>
-                      <a:headEnd type="none" w="med" len="med"/>
-                      <a:tailEnd type="none" w="med" len="med"/>
-                    </a:lnT>
-                    <a:lnB w="6350" cap="flat" cmpd="sng" algn="ctr">
-                      <a:solidFill>
-                        <a:srgbClr val="D1D5DB"/>
-                      </a:solidFill>
-                      <a:prstDash val="solid"/>
-                      <a:round/>
-                      <a:headEnd type="none" w="med" len="med"/>
-                      <a:tailEnd type="none" w="med" len="med"/>
-                    </a:lnB>
-                    <a:solidFill>
-                      <a:srgbClr val="F3F4F6"/>
+                      <a:srgbClr val="FFFFFF"/>
                     </a:solidFill>
                   </a:tcPr>
                 </a:tc>
@@ -7592,281 +8835,6 @@
           </a:graphicData>
         </a:graphic>
       </p:graphicFrame>
-    </p:spTree>
-  </p:cSld>
-  <p:clrMapOvr>
-    <a:masterClrMapping/>
-  </p:clrMapOvr>
-</p:sld>
-</file>
-
-<file path=ppt/slides/slide8.xml><?xml version="1.0" encoding="utf-8"?>
-<p:sld xmlns:a="http://schemas.openxmlformats.org/drawingml/2006/main" xmlns:r="http://schemas.openxmlformats.org/officeDocument/2006/relationships" xmlns:p="http://schemas.openxmlformats.org/presentationml/2006/main">
-  <p:cSld name="Slide 8">
-    <p:bg>
-      <p:bgPr>
-        <a:solidFill>
-          <a:srgbClr val="FFFFFF"/>
-        </a:solidFill>
-      </p:bgPr>
-    </p:bg>
-    <p:spTree>
-      <p:nvGrpSpPr>
-        <p:cNvPr id="1" name=""/>
-        <p:cNvGrpSpPr/>
-        <p:nvPr/>
-      </p:nvGrpSpPr>
-      <p:grpSpPr>
-        <a:xfrm>
-          <a:off x="0" y="0"/>
-          <a:ext cx="0" cy="0"/>
-          <a:chOff x="0" y="0"/>
-          <a:chExt cx="0" cy="0"/>
-        </a:xfrm>
-      </p:grpSpPr>
-      <p:sp>
-        <p:nvSpPr>
-          <p:cNvPr id="2" name="Shape 0"/>
-          <p:cNvSpPr/>
-          <p:nvPr/>
-        </p:nvSpPr>
-        <p:spPr>
-          <a:xfrm>
-            <a:off x="0" y="0"/>
-            <a:ext cx="54864" cy="5143500"/>
-          </a:xfrm>
-          <a:prstGeom prst="rect">
-            <a:avLst/>
-          </a:prstGeom>
-          <a:solidFill>
-            <a:srgbClr val="1E2761"/>
-          </a:solidFill>
-          <a:ln/>
-        </p:spPr>
-      </p:sp>
-      <p:sp>
-        <p:nvSpPr>
-          <p:cNvPr id="3" name="Text 1"/>
-          <p:cNvSpPr/>
-          <p:nvPr/>
-        </p:nvSpPr>
-        <p:spPr>
-          <a:xfrm>
-            <a:off x="5669280" y="274320"/>
-            <a:ext cx="3291840" cy="274320"/>
-          </a:xfrm>
-          <a:prstGeom prst="rect">
-            <a:avLst/>
-          </a:prstGeom>
-          <a:noFill/>
-          <a:ln/>
-        </p:spPr>
-        <p:txBody>
-          <a:bodyPr wrap="square" lIns="0" tIns="0" rIns="0" bIns="0" rtlCol="0" anchor="ctr"/>
-          <a:lstStyle/>
-          <a:p>
-            <a:pPr algn="r" indent="0" marL="0">
-              <a:buNone/>
-            </a:pPr>
-            <a:r>
-              <a:rPr lang="en-US" sz="1000" dirty="0">
-                <a:solidFill>
-                  <a:srgbClr val="6B7280"/>
-                </a:solidFill>
-                <a:latin typeface="Calibri" pitchFamily="34" charset="0"/>
-                <a:ea typeface="Calibri" pitchFamily="34" charset="-122"/>
-                <a:cs typeface="Calibri" pitchFamily="34" charset="-120"/>
-              </a:rPr>
-              <a:t>Day 1 · Module 6</a:t>
-            </a:r>
-            <a:endParaRPr lang="en-US" sz="1000" dirty="0"/>
-          </a:p>
-        </p:txBody>
-      </p:sp>
-      <p:sp>
-        <p:nvSpPr>
-          <p:cNvPr id="4" name="Text 2"/>
-          <p:cNvSpPr/>
-          <p:nvPr/>
-        </p:nvSpPr>
-        <p:spPr>
-          <a:xfrm>
-            <a:off x="365760" y="320040"/>
-            <a:ext cx="6217920" cy="640080"/>
-          </a:xfrm>
-          <a:prstGeom prst="rect">
-            <a:avLst/>
-          </a:prstGeom>
-          <a:noFill/>
-          <a:ln/>
-        </p:spPr>
-        <p:txBody>
-          <a:bodyPr wrap="square" lIns="0" tIns="0" rIns="0" bIns="0" rtlCol="0" anchor="ctr"/>
-          <a:lstStyle/>
-          <a:p>
-            <a:pPr indent="0" marL="0">
-              <a:buNone/>
-            </a:pPr>
-            <a:r>
-              <a:rPr lang="en-US" sz="2800" b="1" dirty="0">
-                <a:solidFill>
-                  <a:srgbClr val="1E2761"/>
-                </a:solidFill>
-                <a:latin typeface="Calibri" pitchFamily="34" charset="0"/>
-                <a:ea typeface="Calibri" pitchFamily="34" charset="-122"/>
-                <a:cs typeface="Calibri" pitchFamily="34" charset="-120"/>
-              </a:rPr>
-              <a:t>Decision guide (rough cuts)</a:t>
-            </a:r>
-            <a:endParaRPr lang="en-US" sz="2800" dirty="0"/>
-          </a:p>
-        </p:txBody>
-      </p:sp>
-      <p:sp>
-        <p:nvSpPr>
-          <p:cNvPr id="5" name="Text 3"/>
-          <p:cNvSpPr/>
-          <p:nvPr/>
-        </p:nvSpPr>
-        <p:spPr>
-          <a:xfrm>
-            <a:off x="365760" y="1097280"/>
-            <a:ext cx="8412480" cy="3749040"/>
-          </a:xfrm>
-          <a:prstGeom prst="rect">
-            <a:avLst/>
-          </a:prstGeom>
-          <a:noFill/>
-          <a:ln/>
-        </p:spPr>
-        <p:txBody>
-          <a:bodyPr wrap="square" rtlCol="0" anchor="ctr"/>
-          <a:lstStyle/>
-          <a:p>
-            <a:pPr marL="342900" indent="-342900">
-              <a:spcAft>
-                <a:spcPts val="600"/>
-              </a:spcAft>
-              <a:buSzPct val="100000"/>
-              <a:buChar char="•"/>
-            </a:pPr>
-            <a:r>
-              <a:rPr lang="en-US" sz="1500" dirty="0">
-                <a:solidFill>
-                  <a:srgbClr val="212121"/>
-                </a:solidFill>
-                <a:latin typeface="Calibri" pitchFamily="34" charset="0"/>
-                <a:ea typeface="Calibri" pitchFamily="34" charset="-122"/>
-                <a:cs typeface="Calibri" pitchFamily="34" charset="-120"/>
-              </a:rPr>
-              <a:t>Building a library or embedded assistant? → Client-side</a:t>
-            </a:r>
-            <a:endParaRPr lang="en-US" sz="1500" dirty="0"/>
-          </a:p>
-          <a:p>
-            <a:pPr marL="342900" indent="-342900">
-              <a:spcAft>
-                <a:spcPts val="600"/>
-              </a:spcAft>
-              <a:buSzPct val="100000"/>
-              <a:buChar char="•"/>
-            </a:pPr>
-            <a:r>
-              <a:rPr lang="en-US" sz="1500" dirty="0">
-                <a:solidFill>
-                  <a:srgbClr val="212121"/>
-                </a:solidFill>
-                <a:latin typeface="Calibri" pitchFamily="34" charset="0"/>
-                <a:ea typeface="Calibri" pitchFamily="34" charset="-122"/>
-                <a:cs typeface="Calibri" pitchFamily="34" charset="-120"/>
-              </a:rPr>
-              <a:t>One agent used by 3+ apps or teams? → Foundry-hosted</a:t>
-            </a:r>
-            <a:endParaRPr lang="en-US" sz="1500" dirty="0"/>
-          </a:p>
-          <a:p>
-            <a:pPr marL="342900" indent="-342900">
-              <a:spcAft>
-                <a:spcPts val="600"/>
-              </a:spcAft>
-              <a:buSzPct val="100000"/>
-              <a:buChar char="•"/>
-            </a:pPr>
-            <a:r>
-              <a:rPr lang="en-US" sz="1500" dirty="0">
-                <a:solidFill>
-                  <a:srgbClr val="212121"/>
-                </a:solidFill>
-                <a:latin typeface="Calibri" pitchFamily="34" charset="0"/>
-                <a:ea typeface="Calibri" pitchFamily="34" charset="-122"/>
-                <a:cs typeface="Calibri" pitchFamily="34" charset="-120"/>
-              </a:rPr>
-              <a:t>Regulated / auditable agent that needs immutable versions? → PromptAgent</a:t>
-            </a:r>
-            <a:endParaRPr lang="en-US" sz="1500" dirty="0"/>
-          </a:p>
-          <a:p>
-            <a:pPr marL="342900" indent="-342900">
-              <a:spcAft>
-                <a:spcPts val="600"/>
-              </a:spcAft>
-              <a:buSzPct val="100000"/>
-              <a:buChar char="•"/>
-            </a:pPr>
-            <a:r>
-              <a:rPr lang="en-US" sz="1500" dirty="0">
-                <a:solidFill>
-                  <a:srgbClr val="212121"/>
-                </a:solidFill>
-                <a:latin typeface="Calibri" pitchFamily="34" charset="0"/>
-                <a:ea typeface="Calibri" pitchFamily="34" charset="-122"/>
-                <a:cs typeface="Calibri" pitchFamily="34" charset="-120"/>
-              </a:rPr>
-              <a:t>Prototyping quickly with portal edits? → HostedAgent</a:t>
-            </a:r>
-            <a:endParaRPr lang="en-US" sz="1500" dirty="0"/>
-          </a:p>
-        </p:txBody>
-      </p:sp>
-      <p:sp>
-        <p:nvSpPr>
-          <p:cNvPr id="6" name="Text 4"/>
-          <p:cNvSpPr/>
-          <p:nvPr/>
-        </p:nvSpPr>
-        <p:spPr>
-          <a:xfrm>
-            <a:off x="365760" y="4160520"/>
-            <a:ext cx="8412480" cy="457200"/>
-          </a:xfrm>
-          <a:prstGeom prst="rect">
-            <a:avLst/>
-          </a:prstGeom>
-          <a:noFill/>
-          <a:ln/>
-        </p:spPr>
-        <p:txBody>
-          <a:bodyPr wrap="square" rtlCol="0" anchor="ctr"/>
-          <a:lstStyle/>
-          <a:p>
-            <a:pPr indent="0" marL="0">
-              <a:buNone/>
-            </a:pPr>
-            <a:r>
-              <a:rPr lang="en-US" sz="1400" i="1" dirty="0">
-                <a:solidFill>
-                  <a:srgbClr val="6B7280"/>
-                </a:solidFill>
-                <a:latin typeface="Calibri" pitchFamily="34" charset="0"/>
-                <a:ea typeface="Calibri" pitchFamily="34" charset="-122"/>
-                <a:cs typeface="Calibri" pitchFamily="34" charset="-120"/>
-              </a:rPr>
-              <a:t>Mix and match — you can have some client-side and some Foundry-hosted agents in the same app.</a:t>
-            </a:r>
-            <a:endParaRPr lang="en-US" sz="1400" dirty="0"/>
-          </a:p>
-        </p:txBody>
-      </p:sp>
     </p:spTree>
   </p:cSld>
   <p:clrMapOvr>
@@ -7991,7 +8959,7 @@
                 <a:ea typeface="Calibri" pitchFamily="34" charset="-122"/>
                 <a:cs typeface="Calibri" pitchFamily="34" charset="-120"/>
               </a:rPr>
-              <a:t>Common gotchas</a:t>
+              <a:t>Decision guide (rough cuts)</a:t>
             </a:r>
             <a:endParaRPr lang="en-US" sz="2800" dirty="0"/>
           </a:p>
@@ -8026,7 +8994,7 @@
               <a:buChar char="•"/>
             </a:pPr>
             <a:r>
-              <a:rPr lang="en-US" sz="1500" dirty="0">
+              <a:rPr lang="en-US" sz="1400" dirty="0">
                 <a:solidFill>
                   <a:srgbClr val="212121"/>
                 </a:solidFill>
@@ -8034,9 +9002,9 @@
                 <a:ea typeface="Calibri" pitchFamily="34" charset="-122"/>
                 <a:cs typeface="Calibri" pitchFamily="34" charset="-120"/>
               </a:rPr>
-              <a:t>'PromptAgent = client-side' — wrong. PromptAgent is Foundry-hosted. 'Prompt' sounds lightweight but isn't.</a:t>
-            </a:r>
-            <a:endParaRPr lang="en-US" sz="1500" dirty="0"/>
+              <a:t>Getting started, or building a scoped internal tool with no custom logic? → Path A (Prompt agent)</a:t>
+            </a:r>
+            <a:endParaRPr lang="en-US" sz="1400" dirty="0"/>
           </a:p>
           <a:p>
             <a:pPr marL="342900" indent="-342900">
@@ -8047,7 +9015,7 @@
               <a:buChar char="•"/>
             </a:pPr>
             <a:r>
-              <a:rPr lang="en-US" sz="1500" dirty="0">
+              <a:rPr lang="en-US" sz="1400" dirty="0">
                 <a:solidFill>
                   <a:srgbClr val="212121"/>
                 </a:solidFill>
@@ -8055,9 +9023,9 @@
                 <a:ea typeface="Calibri" pitchFamily="34" charset="-122"/>
                 <a:cs typeface="Calibri" pitchFamily="34" charset="-120"/>
               </a:rPr>
-              <a:t>Assuming portability — a PromptAgent's configuration is Foundry-specific. Design your app so runtime choice is behind an interface.</a:t>
-            </a:r>
-            <a:endParaRPr lang="en-US" sz="1500" dirty="0"/>
+              <a:t>Embedding an agent inside an existing app you already run somewhere? → Path B (your code + Responses API)</a:t>
+            </a:r>
+            <a:endParaRPr lang="en-US" sz="1400" dirty="0"/>
           </a:p>
           <a:p>
             <a:pPr marL="342900" indent="-342900">
@@ -8068,7 +9036,7 @@
               <a:buChar char="•"/>
             </a:pPr>
             <a:r>
-              <a:rPr lang="en-US" sz="1500" dirty="0">
+              <a:rPr lang="en-US" sz="1400" dirty="0">
                 <a:solidFill>
                   <a:srgbClr val="212121"/>
                 </a:solidFill>
@@ -8076,9 +9044,90 @@
                 <a:ea typeface="Calibri" pitchFamily="34" charset="-122"/>
                 <a:cs typeface="Calibri" pitchFamily="34" charset="-120"/>
               </a:rPr>
-              <a:t>Mixing credentials — all three use Azure identity; differences are in what the credential authenticates to.</a:t>
-            </a:r>
-            <a:endParaRPr lang="en-US" sz="1500" dirty="0"/>
+              <a:t>Prototyping quickly on your laptop before you decide on hosting? → Path B</a:t>
+            </a:r>
+            <a:endParaRPr lang="en-US" sz="1400" dirty="0"/>
+          </a:p>
+          <a:p>
+            <a:pPr marL="342900" indent="-342900">
+              <a:spcAft>
+                <a:spcPts val="600"/>
+              </a:spcAft>
+              <a:buSzPct val="100000"/>
+              <a:buChar char="•"/>
+            </a:pPr>
+            <a:r>
+              <a:rPr lang="en-US" sz="1400" dirty="0">
+                <a:solidFill>
+                  <a:srgbClr val="212121"/>
+                </a:solidFill>
+                <a:latin typeface="Calibri" pitchFamily="34" charset="0"/>
+                <a:ea typeface="Calibri" pitchFamily="34" charset="-122"/>
+                <a:cs typeface="Calibri" pitchFamily="34" charset="-120"/>
+              </a:rPr>
+              <a:t>Shipping a production agent with custom code that needs managed hosting, Entra identity, and observability? → Path C (Hosted agent)</a:t>
+            </a:r>
+            <a:endParaRPr lang="en-US" sz="1400" dirty="0"/>
+          </a:p>
+          <a:p>
+            <a:pPr marL="342900" indent="-342900">
+              <a:spcAft>
+                <a:spcPts val="600"/>
+              </a:spcAft>
+              <a:buSzPct val="100000"/>
+              <a:buChar char="•"/>
+            </a:pPr>
+            <a:r>
+              <a:rPr lang="en-US" sz="1400" dirty="0">
+                <a:solidFill>
+                  <a:srgbClr val="212121"/>
+                </a:solidFill>
+                <a:latin typeface="Calibri" pitchFamily="34" charset="0"/>
+                <a:ea typeface="Calibri" pitchFamily="34" charset="-122"/>
+                <a:cs typeface="Calibri" pitchFamily="34" charset="-120"/>
+              </a:rPr>
+              <a:t>Regulated agent that needs managed content safety, a stable endpoint, and dedicated identity? → Path A or Path C</a:t>
+            </a:r>
+            <a:endParaRPr lang="en-US" sz="1400" dirty="0"/>
+          </a:p>
+        </p:txBody>
+      </p:sp>
+      <p:sp>
+        <p:nvSpPr>
+          <p:cNvPr id="6" name="Text 4"/>
+          <p:cNvSpPr/>
+          <p:nvPr/>
+        </p:nvSpPr>
+        <p:spPr>
+          <a:xfrm>
+            <a:off x="365760" y="4480560"/>
+            <a:ext cx="8412480" cy="365760"/>
+          </a:xfrm>
+          <a:prstGeom prst="rect">
+            <a:avLst/>
+          </a:prstGeom>
+          <a:noFill/>
+          <a:ln/>
+        </p:spPr>
+        <p:txBody>
+          <a:bodyPr wrap="square" rtlCol="0" anchor="ctr"/>
+          <a:lstStyle/>
+          <a:p>
+            <a:pPr indent="0" marL="0">
+              <a:buNone/>
+            </a:pPr>
+            <a:r>
+              <a:rPr lang="en-US" sz="1300" i="1" dirty="0">
+                <a:solidFill>
+                  <a:srgbClr val="6B7280"/>
+                </a:solidFill>
+                <a:latin typeface="Calibri" pitchFamily="34" charset="0"/>
+                <a:ea typeface="Calibri" pitchFamily="34" charset="-122"/>
+                <a:cs typeface="Calibri" pitchFamily="34" charset="-120"/>
+              </a:rPr>
+              <a:t>Mix and match — real systems combine paths.</a:t>
+            </a:r>
+            <a:endParaRPr lang="en-US" sz="1300" dirty="0"/>
           </a:p>
         </p:txBody>
       </p:sp>
